--- a/Saving-the-Tokens/slides/Saving_the_Tokens.pptx
+++ b/Saving-the-Tokens/slides/Saving_the_Tokens.pptx
@@ -15505,7 +15505,7 @@
                 </a:solidFill>
                 <a:latin typeface="Aptos"/>
               </a:rPr>
-              <a:t>No Python? Open calc.html</a:t>
+              <a:t>No Python? Colab link in the README</a:t>
             </a:r>
           </a:p>
         </p:txBody>

--- a/Saving-the-Tokens/slides/Saving_the_Tokens.pptx
+++ b/Saving-the-Tokens/slides/Saving_the_Tokens.pptx
@@ -3739,7 +3739,7 @@
         <p:spPr>
           <a:xfrm>
             <a:off x="685800" y="1783080"/>
-            <a:ext cx="5760720" cy="4121461"/>
+            <a:ext cx="5394960" cy="3859781"/>
           </a:xfrm>
           <a:prstGeom prst="rect">
             <a:avLst/>
@@ -3831,6 +3831,15 @@
               </a:rPr>
               <a:t>TRY IT</a:t>
             </a:r>
+            <a:r>
+              <a:rPr sz="1400" b="0">
+                <a:solidFill>
+                  <a:srgbClr val="6B6963"/>
+                </a:solidFill>
+                <a:latin typeface="Aptos"/>
+              </a:rPr>
+              <a:t>  ·  notebook section 2</a:t>
+            </a:r>
           </a:p>
           <a:p>
             <a:pPr algn="l">
@@ -4049,8 +4058,8 @@
         </p:nvSpPr>
         <p:spPr>
           <a:xfrm>
-            <a:off x="685800" y="6035040"/>
-            <a:ext cx="6675120" cy="365760"/>
+            <a:off x="685800" y="5760720"/>
+            <a:ext cx="6949440" cy="731520"/>
           </a:xfrm>
           <a:prstGeom prst="rect">
             <a:avLst/>
@@ -4072,7 +4081,7 @@
               </a:spcAft>
             </a:pPr>
             <a:r>
-              <a:rPr sz="1800" b="0">
+              <a:rPr sz="1700" b="0">
                 <a:solidFill>
                   <a:srgbClr val="3C3B38"/>
                 </a:solidFill>
@@ -4081,16 +4090,16 @@
               <a:t>Same picture: </a:t>
             </a:r>
             <a:r>
-              <a:rPr sz="1800" b="1">
+              <a:rPr sz="1700" b="1">
                 <a:solidFill>
                   <a:srgbClr val="1C66C2"/>
                 </a:solidFill>
                 <a:latin typeface="Aptos"/>
               </a:rPr>
-              <a:t>252</a:t>
-            </a:r>
-            <a:r>
-              <a:rPr sz="1800" b="0">
+              <a:t>1,105</a:t>
+            </a:r>
+            <a:r>
+              <a:rPr sz="1700" b="0">
                 <a:solidFill>
                   <a:srgbClr val="3C3B38"/>
                 </a:solidFill>
@@ -4099,7 +4108,7 @@
               <a:t> to </a:t>
             </a:r>
             <a:r>
-              <a:rPr sz="1800" b="1">
+              <a:rPr sz="1700" b="1">
                 <a:solidFill>
                   <a:srgbClr val="3C3B38"/>
                 </a:solidFill>
@@ -4108,13 +4117,32 @@
               <a:t>2,691</a:t>
             </a:r>
             <a:r>
-              <a:rPr sz="1800" b="0">
+              <a:rPr sz="1700" b="0">
                 <a:solidFill>
                   <a:srgbClr val="3C3B38"/>
                 </a:solidFill>
                 <a:latin typeface="Aptos"/>
               </a:rPr>
-              <a:t> tokens, depending on the strategy.</a:t>
+              <a:t> tokens on real products.</a:t>
+            </a:r>
+          </a:p>
+          <a:p>
+            <a:pPr algn="l">
+              <a:lnSpc>
+                <a:spcPct val="108000"/>
+              </a:lnSpc>
+              <a:spcAft>
+                <a:spcPts val="0"/>
+              </a:spcAft>
+            </a:pPr>
+            <a:r>
+              <a:rPr sz="1400" b="0">
+                <a:solidFill>
+                  <a:srgbClr val="6B6963"/>
+                </a:solidFill>
+                <a:latin typeface="Aptos"/>
+              </a:rPr>
+              <a:t>The modelled strategies span 252 to 2,304 (252 is a 588×336 view).</a:t>
             </a:r>
           </a:p>
         </p:txBody>
@@ -4415,7 +4443,64 @@
       </p:sp>
       <p:sp>
         <p:nvSpPr>
-          <p:cNvPr id="7" name="TextBox 6"/>
+          <p:cNvPr id="7" name="Rounded Rectangle 6"/>
+          <p:cNvSpPr/>
+          <p:nvPr/>
+        </p:nvSpPr>
+        <p:spPr>
+          <a:xfrm>
+            <a:off x="8387791" y="429768"/>
+            <a:ext cx="1600200" cy="310896"/>
+          </a:xfrm>
+          <a:prstGeom prst="roundRect">
+            <a:avLst>
+              <a:gd name="adj" fmla="val 50000"/>
+            </a:avLst>
+          </a:prstGeom>
+          <a:solidFill>
+            <a:srgbClr val="FFFFFF"/>
+          </a:solidFill>
+          <a:ln w="15875">
+            <a:solidFill>
+              <a:srgbClr val="6B6963"/>
+            </a:solidFill>
+          </a:ln>
+          <a:effectLst/>
+        </p:spPr>
+        <p:style>
+          <a:lnRef idx="1">
+            <a:schemeClr val="accent1"/>
+          </a:lnRef>
+          <a:fillRef idx="3">
+            <a:schemeClr val="accent1"/>
+          </a:fillRef>
+          <a:effectRef idx="2">
+            <a:schemeClr val="accent1"/>
+          </a:effectRef>
+          <a:fontRef idx="minor">
+            <a:schemeClr val="lt1"/>
+          </a:fontRef>
+        </p:style>
+        <p:txBody>
+          <a:bodyPr rtlCol="0" anchor="ctr" lIns="0" rIns="0" tIns="0" bIns="0"/>
+          <a:lstStyle/>
+          <a:p>
+            <a:pPr algn="ctr"/>
+            <a:r>
+              <a:rPr sz="1200" b="1">
+                <a:solidFill>
+                  <a:srgbClr val="3C3B38"/>
+                </a:solidFill>
+                <a:latin typeface="Aptos"/>
+              </a:rPr>
+              <a:t>EXAMPLE MODEL</a:t>
+            </a:r>
+          </a:p>
+        </p:txBody>
+      </p:sp>
+      <p:sp>
+        <p:nvSpPr>
+          <p:cNvPr id="8" name="TextBox 7"/>
           <p:cNvSpPr txBox="1"/>
           <p:nvPr/>
         </p:nvSpPr>
@@ -4457,7 +4542,7 @@
       </p:sp>
       <p:sp>
         <p:nvSpPr>
-          <p:cNvPr id="8" name="TextBox 7"/>
+          <p:cNvPr id="9" name="TextBox 8"/>
           <p:cNvSpPr txBox="1"/>
           <p:nvPr/>
         </p:nvSpPr>
@@ -4492,14 +4577,14 @@
                 </a:solidFill>
                 <a:latin typeface="Aptos"/>
               </a:rPr>
-              <a:t>Using the “cut into tiles” strategy</a:t>
+              <a:t>In the modelled “cut into tiles” strategy</a:t>
             </a:r>
           </a:p>
         </p:txBody>
       </p:sp>
       <p:pic>
         <p:nvPicPr>
-          <p:cNvPr id="9" name="Picture 8" descr="same_shape.png"/>
+          <p:cNvPr id="10" name="Picture 9" descr="same_shape.png"/>
           <p:cNvPicPr>
             <a:picLocks noChangeAspect="1"/>
           </p:cNvPicPr>
@@ -4523,14 +4608,14 @@
       </p:pic>
       <p:sp>
         <p:nvSpPr>
-          <p:cNvPr id="10" name="TextBox 9"/>
+          <p:cNvPr id="11" name="TextBox 10"/>
           <p:cNvSpPr txBox="1"/>
           <p:nvPr/>
         </p:nvSpPr>
         <p:spPr>
           <a:xfrm>
-            <a:off x="685800" y="5760720"/>
-            <a:ext cx="10789920" cy="548640"/>
+            <a:off x="685800" y="5532120"/>
+            <a:ext cx="10789920" cy="822960"/>
           </a:xfrm>
           <a:prstGeom prst="rect">
             <a:avLst/>
@@ -4548,20 +4633,20 @@
                 <a:spcPct val="108000"/>
               </a:lnSpc>
               <a:spcAft>
-                <a:spcPts val="0"/>
-              </a:spcAft>
-            </a:pPr>
-            <a:r>
-              <a:rPr sz="2600" b="1">
+                <a:spcPts val="400"/>
+              </a:spcAft>
+            </a:pPr>
+            <a:r>
+              <a:rPr sz="2400" b="1">
                 <a:solidFill>
                   <a:srgbClr val="0B0B0B"/>
                 </a:solidFill>
                 <a:latin typeface="Aptos"/>
               </a:rPr>
-              <a:t>Tiling looks at the </a:t>
-            </a:r>
-            <a:r>
-              <a:rPr sz="2600" b="1">
+              <a:t>A tiler prices the </a:t>
+            </a:r>
+            <a:r>
+              <a:rPr sz="2400" b="1">
                 <a:solidFill>
                   <a:srgbClr val="1C66C2"/>
                 </a:solidFill>
@@ -4570,7 +4655,7 @@
               <a:t>shape</a:t>
             </a:r>
             <a:r>
-              <a:rPr sz="2600" b="1">
+              <a:rPr sz="2400" b="1">
                 <a:solidFill>
                   <a:srgbClr val="0B0B0B"/>
                 </a:solidFill>
@@ -4579,11 +4664,30 @@
               <a:t> of your image, not its size.</a:t>
             </a:r>
           </a:p>
-        </p:txBody>
-      </p:sp>
-      <p:sp>
-        <p:nvSpPr>
-          <p:cNvPr id="11" name="TextBox 10"/>
+          <a:p>
+            <a:pPr algn="l">
+              <a:lnSpc>
+                <a:spcPct val="108000"/>
+              </a:lnSpc>
+              <a:spcAft>
+                <a:spcPts val="400"/>
+              </a:spcAft>
+            </a:pPr>
+            <a:r>
+              <a:rPr sz="1500" b="0">
+                <a:solidFill>
+                  <a:srgbClr val="6B6963"/>
+                </a:solidFill>
+                <a:latin typeface="Aptos"/>
+              </a:rPr>
+              <a:t>Real rules on the same two screens: OpenAI 1,105 and 1,105, Claude standard 1,334 and 1,550, Claude hi-res 1,334 and 4,698. Measure at the sizes you ship.</a:t>
+            </a:r>
+          </a:p>
+        </p:txBody>
+      </p:sp>
+      <p:sp>
+        <p:nvSpPr>
+          <p:cNvPr id="12" name="TextBox 11"/>
           <p:cNvSpPr txBox="1"/>
           <p:nvPr/>
         </p:nvSpPr>
@@ -4877,7 +4981,64 @@
       </p:sp>
       <p:sp>
         <p:nvSpPr>
-          <p:cNvPr id="7" name="TextBox 6"/>
+          <p:cNvPr id="7" name="Rounded Rectangle 6"/>
+          <p:cNvSpPr/>
+          <p:nvPr/>
+        </p:nvSpPr>
+        <p:spPr>
+          <a:xfrm>
+            <a:off x="8387791" y="429768"/>
+            <a:ext cx="1600200" cy="310896"/>
+          </a:xfrm>
+          <a:prstGeom prst="roundRect">
+            <a:avLst>
+              <a:gd name="adj" fmla="val 50000"/>
+            </a:avLst>
+          </a:prstGeom>
+          <a:solidFill>
+            <a:srgbClr val="FFFFFF"/>
+          </a:solidFill>
+          <a:ln w="15875">
+            <a:solidFill>
+              <a:srgbClr val="6B6963"/>
+            </a:solidFill>
+          </a:ln>
+          <a:effectLst/>
+        </p:spPr>
+        <p:style>
+          <a:lnRef idx="1">
+            <a:schemeClr val="accent1"/>
+          </a:lnRef>
+          <a:fillRef idx="3">
+            <a:schemeClr val="accent1"/>
+          </a:fillRef>
+          <a:effectRef idx="2">
+            <a:schemeClr val="accent1"/>
+          </a:effectRef>
+          <a:fontRef idx="minor">
+            <a:schemeClr val="lt1"/>
+          </a:fontRef>
+        </p:style>
+        <p:txBody>
+          <a:bodyPr rtlCol="0" anchor="ctr" lIns="0" rIns="0" tIns="0" bIns="0"/>
+          <a:lstStyle/>
+          <a:p>
+            <a:pPr algn="ctr"/>
+            <a:r>
+              <a:rPr sz="1200" b="1">
+                <a:solidFill>
+                  <a:srgbClr val="3C3B38"/>
+                </a:solidFill>
+                <a:latin typeface="Aptos"/>
+              </a:rPr>
+              <a:t>EXAMPLE MODEL</a:t>
+            </a:r>
+          </a:p>
+        </p:txBody>
+      </p:sp>
+      <p:sp>
+        <p:nvSpPr>
+          <p:cNvPr id="8" name="TextBox 7"/>
           <p:cNvSpPr txBox="1"/>
           <p:nvPr/>
         </p:nvSpPr>
@@ -4912,14 +5073,14 @@
                 </a:solidFill>
                 <a:latin typeface="Aptos Display"/>
               </a:rPr>
-              <a:t>With audio, you can pay for silence</a:t>
-            </a:r>
-          </a:p>
-        </p:txBody>
-      </p:sp>
-      <p:sp>
-        <p:nvSpPr>
-          <p:cNvPr id="8" name="TextBox 7"/>
+              <a:t>Check whether your audio is padded</a:t>
+            </a:r>
+          </a:p>
+        </p:txBody>
+      </p:sp>
+      <p:sp>
+        <p:nvSpPr>
+          <p:cNvPr id="9" name="TextBox 8"/>
           <p:cNvSpPr txBox="1"/>
           <p:nvPr/>
         </p:nvSpPr>
@@ -4954,14 +5115,14 @@
                 </a:solidFill>
                 <a:latin typeface="Aptos"/>
               </a:rPr>
-              <a:t>Some audio models pad every clip to a 30-second window</a:t>
+              <a:t>A Whisper-style encoder works in 30-second windows. Does your product bill for that?</a:t>
             </a:r>
           </a:p>
         </p:txBody>
       </p:sp>
       <p:pic>
         <p:nvPicPr>
-          <p:cNvPr id="9" name="Picture 8" descr="audio.png"/>
+          <p:cNvPr id="10" name="Picture 9" descr="audio.png"/>
           <p:cNvPicPr>
             <a:picLocks noChangeAspect="1"/>
           </p:cNvPicPr>
@@ -4985,7 +5146,7 @@
       </p:pic>
       <p:sp>
         <p:nvSpPr>
-          <p:cNvPr id="10" name="TextBox 9"/>
+          <p:cNvPr id="11" name="TextBox 10"/>
           <p:cNvSpPr txBox="1"/>
           <p:nvPr/>
         </p:nvSpPr>
@@ -5027,7 +5188,7 @@
       </p:sp>
       <p:sp>
         <p:nvSpPr>
-          <p:cNvPr id="11" name="TextBox 10"/>
+          <p:cNvPr id="12" name="TextBox 11"/>
           <p:cNvSpPr txBox="1"/>
           <p:nvPr/>
         </p:nvSpPr>
@@ -5062,14 +5223,14 @@
                 </a:solidFill>
                 <a:latin typeface="Aptos"/>
               </a:rPr>
-              <a:t>modelled audio encoders · check yours</a:t>
-            </a:r>
-          </a:p>
-        </p:txBody>
-      </p:sp>
-      <p:sp>
-        <p:nvSpPr>
-          <p:cNvPr id="12" name="Rounded Rectangle 11"/>
+              <a:t>window encoder: modelled · 32 tokens a second: Gemini, published</a:t>
+            </a:r>
+          </a:p>
+        </p:txBody>
+      </p:sp>
+      <p:sp>
+        <p:nvSpPr>
+          <p:cNvPr id="13" name="Rounded Rectangle 12"/>
           <p:cNvSpPr/>
           <p:nvPr/>
         </p:nvSpPr>
@@ -5115,7 +5276,7 @@
       </p:sp>
       <p:sp>
         <p:nvSpPr>
-          <p:cNvPr id="13" name="TextBox 12"/>
+          <p:cNvPr id="14" name="TextBox 13"/>
           <p:cNvSpPr txBox="1"/>
           <p:nvPr/>
         </p:nvSpPr>
@@ -5166,14 +5327,14 @@
       </p:sp>
       <p:sp>
         <p:nvSpPr>
-          <p:cNvPr id="14" name="TextBox 13"/>
+          <p:cNvPr id="15" name="TextBox 14"/>
           <p:cNvSpPr txBox="1"/>
           <p:nvPr/>
         </p:nvSpPr>
         <p:spPr>
           <a:xfrm>
-            <a:off x="3794760" y="4956048"/>
-            <a:ext cx="7589520" cy="1097280"/>
+            <a:off x="3794760" y="4892040"/>
+            <a:ext cx="7589520" cy="1188720"/>
           </a:xfrm>
           <a:prstGeom prst="rect">
             <a:avLst/>
@@ -5220,7 +5381,7 @@
                 </a:solidFill>
                 <a:latin typeface="Aptos"/>
               </a:rPr>
-              <a:t>An 8-second sentence as text: 6× cheaper than 25 tokens/s audio, 45× cheaper than a padded clip.</a:t>
+              <a:t>8 seconds as text: 8× fewer tokens than speech at Gemini's 32 a second (up to 45× against a padded window). Speech recognition is not priced.</a:t>
             </a:r>
           </a:p>
         </p:txBody>
@@ -5479,7 +5640,64 @@
       </p:sp>
       <p:sp>
         <p:nvSpPr>
-          <p:cNvPr id="7" name="TextBox 6"/>
+          <p:cNvPr id="7" name="Rounded Rectangle 6"/>
+          <p:cNvSpPr/>
+          <p:nvPr/>
+        </p:nvSpPr>
+        <p:spPr>
+          <a:xfrm>
+            <a:off x="8387791" y="429768"/>
+            <a:ext cx="1600200" cy="310896"/>
+          </a:xfrm>
+          <a:prstGeom prst="roundRect">
+            <a:avLst>
+              <a:gd name="adj" fmla="val 50000"/>
+            </a:avLst>
+          </a:prstGeom>
+          <a:solidFill>
+            <a:srgbClr val="121212"/>
+          </a:solidFill>
+          <a:ln w="15875">
+            <a:solidFill>
+              <a:srgbClr val="B5B2AA"/>
+            </a:solidFill>
+          </a:ln>
+          <a:effectLst/>
+        </p:spPr>
+        <p:style>
+          <a:lnRef idx="1">
+            <a:schemeClr val="accent1"/>
+          </a:lnRef>
+          <a:fillRef idx="3">
+            <a:schemeClr val="accent1"/>
+          </a:fillRef>
+          <a:effectRef idx="2">
+            <a:schemeClr val="accent1"/>
+          </a:effectRef>
+          <a:fontRef idx="minor">
+            <a:schemeClr val="lt1"/>
+          </a:fontRef>
+        </p:style>
+        <p:txBody>
+          <a:bodyPr rtlCol="0" anchor="ctr" lIns="0" rIns="0" tIns="0" bIns="0"/>
+          <a:lstStyle/>
+          <a:p>
+            <a:pPr algn="ctr"/>
+            <a:r>
+              <a:rPr sz="1200" b="1">
+                <a:solidFill>
+                  <a:srgbClr val="D7D5CE"/>
+                </a:solidFill>
+                <a:latin typeface="Aptos"/>
+              </a:rPr>
+              <a:t>EXAMPLE MODEL</a:t>
+            </a:r>
+          </a:p>
+        </p:txBody>
+      </p:sp>
+      <p:sp>
+        <p:nvSpPr>
+          <p:cNvPr id="8" name="TextBox 7"/>
           <p:cNvSpPr txBox="1"/>
           <p:nvPr/>
         </p:nvSpPr>
@@ -5521,7 +5739,7 @@
       </p:sp>
       <p:pic>
         <p:nvPicPr>
-          <p:cNvPr id="8" name="Picture 7" descr="resend_dark.png"/>
+          <p:cNvPr id="9" name="Picture 8" descr="resend_dark.png"/>
           <p:cNvPicPr>
             <a:picLocks noChangeAspect="1"/>
           </p:cNvPicPr>
@@ -5545,13 +5763,13 @@
       </p:pic>
       <p:sp>
         <p:nvSpPr>
-          <p:cNvPr id="9" name="TextBox 8"/>
+          <p:cNvPr id="10" name="TextBox 9"/>
           <p:cNvSpPr txBox="1"/>
           <p:nvPr/>
         </p:nvSpPr>
         <p:spPr>
           <a:xfrm>
-            <a:off x="685800" y="1874519"/>
+            <a:off x="685800" y="1828800"/>
             <a:ext cx="4297680" cy="1188720"/>
           </a:xfrm>
           <a:prstGeom prst="rect">
@@ -5587,13 +5805,13 @@
       </p:sp>
       <p:sp>
         <p:nvSpPr>
-          <p:cNvPr id="10" name="TextBox 9"/>
+          <p:cNvPr id="11" name="TextBox 10"/>
           <p:cNvSpPr txBox="1"/>
           <p:nvPr/>
         </p:nvSpPr>
         <p:spPr>
           <a:xfrm>
-            <a:off x="685800" y="3271519"/>
+            <a:off x="685800" y="3225800"/>
             <a:ext cx="4297680" cy="822960"/>
           </a:xfrm>
           <a:prstGeom prst="rect">
@@ -5616,13 +5834,13 @@
               </a:spcAft>
             </a:pPr>
             <a:r>
-              <a:rPr sz="2200" b="0">
+              <a:rPr sz="2000" b="0">
                 <a:solidFill>
                   <a:srgbClr val="D7D5CE"/>
                 </a:solidFill>
                 <a:latin typeface="Aptos"/>
               </a:rPr>
-              <a:t>of the bill was sent before
+              <a:t>of the input tokens were sent before
 (20 turns, no caching)</a:t>
             </a:r>
           </a:p>
@@ -5630,14 +5848,14 @@
       </p:sp>
       <p:sp>
         <p:nvSpPr>
-          <p:cNvPr id="11" name="TextBox 10"/>
+          <p:cNvPr id="12" name="TextBox 11"/>
           <p:cNvSpPr txBox="1"/>
           <p:nvPr/>
         </p:nvSpPr>
         <p:spPr>
           <a:xfrm>
-            <a:off x="685800" y="4160520"/>
-            <a:ext cx="4297680" cy="1737360"/>
+            <a:off x="685800" y="4023360"/>
+            <a:ext cx="4297680" cy="1188720"/>
           </a:xfrm>
           <a:prstGeom prst="rect">
             <a:avLst/>
@@ -5652,14 +5870,14 @@
           <a:p>
             <a:pPr algn="l">
               <a:lnSpc>
-                <a:spcPct val="130000"/>
-              </a:lnSpc>
-              <a:spcAft>
-                <a:spcPts val="0"/>
-              </a:spcAft>
-            </a:pPr>
-            <a:r>
-              <a:rPr sz="2400" b="0">
+                <a:spcPct val="125000"/>
+              </a:lnSpc>
+              <a:spcAft>
+                <a:spcPts val="0"/>
+              </a:spcAft>
+            </a:pPr>
+            <a:r>
+              <a:rPr sz="2200" b="0">
                 <a:solidFill>
                   <a:srgbClr val="B5B2AA"/>
                 </a:solidFill>
@@ -5668,26 +5886,26 @@
               <a:t>New content  </a:t>
             </a:r>
             <a:r>
-              <a:rPr sz="2400" b="1">
+              <a:rPr sz="2200" b="1">
                 <a:solidFill>
                   <a:srgbClr val="5AA3F0"/>
                 </a:solidFill>
                 <a:latin typeface="Aptos"/>
               </a:rPr>
-              <a:t>31,120</a:t>
-            </a:r>
-          </a:p>
-          <a:p>
-            <a:pPr algn="l">
-              <a:lnSpc>
-                <a:spcPct val="130000"/>
-              </a:lnSpc>
-              <a:spcAft>
-                <a:spcPts val="0"/>
-              </a:spcAft>
-            </a:pPr>
-            <a:r>
-              <a:rPr sz="2400" b="0">
+              <a:t>32,240</a:t>
+            </a:r>
+          </a:p>
+          <a:p>
+            <a:pPr algn="l">
+              <a:lnSpc>
+                <a:spcPct val="125000"/>
+              </a:lnSpc>
+              <a:spcAft>
+                <a:spcPts val="0"/>
+              </a:spcAft>
+            </a:pPr>
+            <a:r>
+              <a:rPr sz="2200" b="0">
                 <a:solidFill>
                   <a:srgbClr val="B5B2AA"/>
                 </a:solidFill>
@@ -5696,55 +5914,55 @@
               <a:t>Sent again  </a:t>
             </a:r>
             <a:r>
-              <a:rPr sz="2400" b="1">
+              <a:rPr sz="2200" b="1">
                 <a:solidFill>
                   <a:srgbClr val="F0834E"/>
                 </a:solidFill>
                 <a:latin typeface="Aptos"/>
               </a:rPr>
-              <a:t>298,300</a:t>
-            </a:r>
-          </a:p>
-          <a:p>
-            <a:pPr algn="l">
-              <a:lnSpc>
-                <a:spcPct val="130000"/>
-              </a:lnSpc>
-              <a:spcAft>
-                <a:spcPts val="0"/>
-              </a:spcAft>
-            </a:pPr>
-            <a:r>
-              <a:rPr sz="2400" b="0">
+              <a:t>308,940</a:t>
+            </a:r>
+          </a:p>
+          <a:p>
+            <a:pPr algn="l">
+              <a:lnSpc>
+                <a:spcPct val="125000"/>
+              </a:lnSpc>
+              <a:spcAft>
+                <a:spcPts val="0"/>
+              </a:spcAft>
+            </a:pPr>
+            <a:r>
+              <a:rPr sz="2200" b="0">
                 <a:solidFill>
                   <a:srgbClr val="B5B2AA"/>
                 </a:solidFill>
                 <a:latin typeface="Aptos"/>
               </a:rPr>
-              <a:t>Billed in total  </a:t>
-            </a:r>
-            <a:r>
-              <a:rPr sz="2400" b="1">
+              <a:t>Input in total  </a:t>
+            </a:r>
+            <a:r>
+              <a:rPr sz="2200" b="1">
                 <a:solidFill>
                   <a:srgbClr val="FFFFFF"/>
                 </a:solidFill>
                 <a:latin typeface="Aptos"/>
               </a:rPr>
-              <a:t>329,420</a:t>
-            </a:r>
-          </a:p>
-        </p:txBody>
-      </p:sp>
-      <p:sp>
-        <p:nvSpPr>
-          <p:cNvPr id="12" name="TextBox 11"/>
+              <a:t>341,180</a:t>
+            </a:r>
+          </a:p>
+        </p:txBody>
+      </p:sp>
+      <p:sp>
+        <p:nvSpPr>
+          <p:cNvPr id="13" name="TextBox 12"/>
           <p:cNvSpPr txBox="1"/>
           <p:nvPr/>
         </p:nvSpPr>
         <p:spPr>
           <a:xfrm>
-            <a:off x="685800" y="6473952"/>
-            <a:ext cx="5486400" cy="274320"/>
+            <a:off x="685800" y="5760720"/>
+            <a:ext cx="10789920" cy="731520"/>
           </a:xfrm>
           <a:prstGeom prst="rect">
             <a:avLst/>
@@ -5766,27 +5984,45 @@
               </a:spcAft>
             </a:pPr>
             <a:r>
-              <a:rPr sz="1100" b="0">
+              <a:rPr sz="1500" b="1">
+                <a:solidFill>
+                  <a:srgbClr val="FFFFFF"/>
+                </a:solidFill>
+                <a:latin typeface="Aptos"/>
+              </a:rPr>
+              <a:t>Two things grow. </a:t>
+            </a:r>
+            <a:r>
+              <a:rPr sz="1500" b="0">
+                <a:solidFill>
+                  <a:srgbClr val="D7D5CE"/>
+                </a:solidFill>
+                <a:latin typeface="Aptos"/>
+              </a:rPr>
+              <a:t>The bill: double the turns, about 4× the tokens. And the request itself: this agent reaches the 128,000-token context window at turn 80. </a:t>
+            </a:r>
+            <a:r>
+              <a:rPr sz="1500" b="0">
                 <a:solidFill>
                   <a:srgbClr val="B5B2AA"/>
                 </a:solidFill>
                 <a:latin typeface="Aptos"/>
               </a:rPr>
-              <a:t>Saving the Tokens  ·  Shyamji Tiwari</a:t>
-            </a:r>
-          </a:p>
-        </p:txBody>
-      </p:sp>
-      <p:sp>
-        <p:nvSpPr>
-          <p:cNvPr id="13" name="TextBox 12"/>
+              <a:t>max_tokens only caps one reply.</a:t>
+            </a:r>
+          </a:p>
+        </p:txBody>
+      </p:sp>
+      <p:sp>
+        <p:nvSpPr>
+          <p:cNvPr id="14" name="TextBox 13"/>
           <p:cNvSpPr txBox="1"/>
           <p:nvPr/>
         </p:nvSpPr>
         <p:spPr>
           <a:xfrm>
-            <a:off x="5760720" y="6473952"/>
-            <a:ext cx="5745175" cy="274320"/>
+            <a:off x="685800" y="6473952"/>
+            <a:ext cx="5486400" cy="274320"/>
           </a:xfrm>
           <a:prstGeom prst="rect">
             <a:avLst/>
@@ -5799,6 +6035,48 @@
           </a:bodyPr>
           <a:lstStyle/>
           <a:p>
+            <a:pPr algn="l">
+              <a:lnSpc>
+                <a:spcPct val="108000"/>
+              </a:lnSpc>
+              <a:spcAft>
+                <a:spcPts val="0"/>
+              </a:spcAft>
+            </a:pPr>
+            <a:r>
+              <a:rPr sz="1100" b="0">
+                <a:solidFill>
+                  <a:srgbClr val="B5B2AA"/>
+                </a:solidFill>
+                <a:latin typeface="Aptos"/>
+              </a:rPr>
+              <a:t>Saving the Tokens  ·  Shyamji Tiwari</a:t>
+            </a:r>
+          </a:p>
+        </p:txBody>
+      </p:sp>
+      <p:sp>
+        <p:nvSpPr>
+          <p:cNvPr id="15" name="TextBox 14"/>
+          <p:cNvSpPr txBox="1"/>
+          <p:nvPr/>
+        </p:nvSpPr>
+        <p:spPr>
+          <a:xfrm>
+            <a:off x="5760720" y="6473952"/>
+            <a:ext cx="5745175" cy="274320"/>
+          </a:xfrm>
+          <a:prstGeom prst="rect">
+            <a:avLst/>
+          </a:prstGeom>
+          <a:noFill/>
+        </p:spPr>
+        <p:txBody>
+          <a:bodyPr wrap="square" lIns="0" rIns="0" tIns="0" bIns="0" anchor="t">
+            <a:spAutoFit/>
+          </a:bodyPr>
+          <a:lstStyle/>
+          <a:p>
             <a:pPr algn="r">
               <a:lnSpc>
                 <a:spcPct val="108000"/>
@@ -5814,7 +6092,7 @@
                 </a:solidFill>
                 <a:latin typeface="Aptos"/>
               </a:rPr>
-              <a:t>Simulated 20-turn session · illustrative settings · input tokens only</a:t>
+              <a:t>input tokens only (output is priced separately)</a:t>
             </a:r>
           </a:p>
         </p:txBody>
@@ -5882,7 +6160,7 @@
                 </a:solidFill>
                 <a:latin typeface="Aptos"/>
               </a:rPr>
-              <a:t>FIX IT</a:t>
+              <a:t>EXERCISE 3</a:t>
             </a:r>
           </a:p>
         </p:txBody>
@@ -6073,7 +6351,64 @@
       </p:sp>
       <p:sp>
         <p:nvSpPr>
-          <p:cNvPr id="7" name="TextBox 6"/>
+          <p:cNvPr id="7" name="Rounded Rectangle 6"/>
+          <p:cNvSpPr/>
+          <p:nvPr/>
+        </p:nvSpPr>
+        <p:spPr>
+          <a:xfrm>
+            <a:off x="8387791" y="429768"/>
+            <a:ext cx="1600200" cy="310896"/>
+          </a:xfrm>
+          <a:prstGeom prst="roundRect">
+            <a:avLst>
+              <a:gd name="adj" fmla="val 50000"/>
+            </a:avLst>
+          </a:prstGeom>
+          <a:solidFill>
+            <a:srgbClr val="FFFFFF"/>
+          </a:solidFill>
+          <a:ln w="15875">
+            <a:solidFill>
+              <a:srgbClr val="6B6963"/>
+            </a:solidFill>
+          </a:ln>
+          <a:effectLst/>
+        </p:spPr>
+        <p:style>
+          <a:lnRef idx="1">
+            <a:schemeClr val="accent1"/>
+          </a:lnRef>
+          <a:fillRef idx="3">
+            <a:schemeClr val="accent1"/>
+          </a:fillRef>
+          <a:effectRef idx="2">
+            <a:schemeClr val="accent1"/>
+          </a:effectRef>
+          <a:fontRef idx="minor">
+            <a:schemeClr val="lt1"/>
+          </a:fontRef>
+        </p:style>
+        <p:txBody>
+          <a:bodyPr rtlCol="0" anchor="ctr" lIns="0" rIns="0" tIns="0" bIns="0"/>
+          <a:lstStyle/>
+          <a:p>
+            <a:pPr algn="ctr"/>
+            <a:r>
+              <a:rPr sz="1200" b="1">
+                <a:solidFill>
+                  <a:srgbClr val="3C3B38"/>
+                </a:solidFill>
+                <a:latin typeface="Aptos"/>
+              </a:rPr>
+              <a:t>EXAMPLE MODEL</a:t>
+            </a:r>
+          </a:p>
+        </p:txBody>
+      </p:sp>
+      <p:sp>
+        <p:nvSpPr>
+          <p:cNvPr id="8" name="TextBox 7"/>
           <p:cNvSpPr txBox="1"/>
           <p:nvPr/>
         </p:nvSpPr>
@@ -6108,21 +6443,21 @@
                 </a:solidFill>
                 <a:latin typeface="Aptos Display"/>
               </a:rPr>
-              <a:t>Your bill is a multiplication</a:t>
-            </a:r>
-          </a:p>
-        </p:txBody>
-      </p:sp>
-      <p:sp>
-        <p:nvSpPr>
-          <p:cNvPr id="8" name="TextBox 7"/>
+              <a:t>Ten ways to cut the bill. Which wins?</a:t>
+            </a:r>
+          </a:p>
+        </p:txBody>
+      </p:sp>
+      <p:sp>
+        <p:nvSpPr>
+          <p:cNvPr id="9" name="TextBox 8"/>
           <p:cNvSpPr txBox="1"/>
           <p:nvPr/>
         </p:nvSpPr>
         <p:spPr>
           <a:xfrm>
-            <a:off x="685800" y="1691640"/>
-            <a:ext cx="10789920" cy="731520"/>
+            <a:off x="685800" y="1371600"/>
+            <a:ext cx="10820095" cy="457200"/>
           </a:xfrm>
           <a:prstGeom prst="rect">
             <a:avLst/>
@@ -6144,89 +6479,20 @@
               </a:spcAft>
             </a:pPr>
             <a:r>
-              <a:rPr sz="3000" b="0">
-                <a:solidFill>
-                  <a:srgbClr val="0B0B0B"/>
-                </a:solidFill>
-                <a:latin typeface="Aptos"/>
-              </a:rPr>
-              <a:t>how </a:t>
-            </a:r>
-            <a:r>
-              <a:rPr sz="3000" b="1">
-                <a:solidFill>
-                  <a:srgbClr val="1C66C2"/>
-                </a:solidFill>
-                <a:latin typeface="Aptos"/>
-              </a:rPr>
-              <a:t>big</a:t>
-            </a:r>
-            <a:r>
-              <a:rPr sz="3000" b="0">
-                <a:solidFill>
-                  <a:srgbClr val="0B0B0B"/>
-                </a:solidFill>
-                <a:latin typeface="Aptos"/>
-              </a:rPr>
-              <a:t> each thing is   ×   how many times you </a:t>
-            </a:r>
-            <a:r>
-              <a:rPr sz="3000" b="1">
-                <a:solidFill>
-                  <a:srgbClr val="BF4C1C"/>
-                </a:solidFill>
-                <a:latin typeface="Aptos"/>
-              </a:rPr>
-              <a:t>send it again</a:t>
-            </a:r>
-          </a:p>
-        </p:txBody>
-      </p:sp>
-      <p:sp>
-        <p:nvSpPr>
-          <p:cNvPr id="9" name="TextBox 8"/>
-          <p:cNvSpPr txBox="1"/>
-          <p:nvPr/>
-        </p:nvSpPr>
-        <p:spPr>
-          <a:xfrm>
-            <a:off x="685800" y="2880360"/>
-            <a:ext cx="10789920" cy="457200"/>
-          </a:xfrm>
-          <a:prstGeom prst="rect">
-            <a:avLst/>
-          </a:prstGeom>
-          <a:noFill/>
-        </p:spPr>
-        <p:txBody>
-          <a:bodyPr wrap="square" lIns="0" rIns="0" tIns="0" bIns="0" anchor="t">
-            <a:spAutoFit/>
-          </a:bodyPr>
-          <a:lstStyle/>
-          <a:p>
-            <a:pPr algn="l">
-              <a:lnSpc>
-                <a:spcPct val="108000"/>
-              </a:lnSpc>
-              <a:spcAft>
-                <a:spcPts val="0"/>
-              </a:spcAft>
-            </a:pPr>
-            <a:r>
-              <a:rPr sz="2000" b="1">
-                <a:solidFill>
-                  <a:srgbClr val="6B6963"/>
-                </a:solidFill>
-                <a:latin typeface="Aptos"/>
-              </a:rPr>
-              <a:t>Share of the bill, one 20-turn session</a:t>
+              <a:rPr sz="2000" b="0">
+                <a:solidFill>
+                  <a:srgbClr val="3C3B38"/>
+                </a:solidFill>
+                <a:latin typeface="Aptos"/>
+              </a:rPr>
+              <a:t>For a voice agent that watches the screen, 20 turns</a:t>
             </a:r>
           </a:p>
         </p:txBody>
       </p:sp>
       <p:pic>
         <p:nvPicPr>
-          <p:cNvPr id="10" name="Picture 9" descr="composition.png"/>
+          <p:cNvPr id="10" name="Picture 9" descr="lever_tiles.png"/>
           <p:cNvPicPr>
             <a:picLocks noChangeAspect="1"/>
           </p:cNvPicPr>
@@ -6240,8 +6506,8 @@
         </p:blipFill>
         <p:spPr>
           <a:xfrm>
-            <a:off x="685800" y="3337560"/>
-            <a:ext cx="10820095" cy="2118935"/>
+            <a:off x="685800" y="1920240"/>
+            <a:ext cx="6766560" cy="4297680"/>
           </a:xfrm>
           <a:prstGeom prst="rect">
             <a:avLst/>
@@ -6250,14 +6516,60 @@
       </p:pic>
       <p:sp>
         <p:nvSpPr>
-          <p:cNvPr id="11" name="TextBox 10"/>
+          <p:cNvPr id="11" name="Rounded Rectangle 10"/>
+          <p:cNvSpPr/>
+          <p:nvPr/>
+        </p:nvSpPr>
+        <p:spPr>
+          <a:xfrm>
+            <a:off x="7909560" y="1920240"/>
+            <a:ext cx="3593592" cy="4206240"/>
+          </a:xfrm>
+          <a:prstGeom prst="roundRect">
+            <a:avLst>
+              <a:gd name="adj" fmla="val 7000"/>
+            </a:avLst>
+          </a:prstGeom>
+          <a:solidFill>
+            <a:srgbClr val="E6EFFA"/>
+          </a:solidFill>
+          <a:ln>
+            <a:noFill/>
+          </a:ln>
+          <a:effectLst/>
+        </p:spPr>
+        <p:style>
+          <a:lnRef idx="1">
+            <a:schemeClr val="accent1"/>
+          </a:lnRef>
+          <a:fillRef idx="3">
+            <a:schemeClr val="accent1"/>
+          </a:fillRef>
+          <a:effectRef idx="2">
+            <a:schemeClr val="accent1"/>
+          </a:effectRef>
+          <a:fontRef idx="minor">
+            <a:schemeClr val="lt1"/>
+          </a:fontRef>
+        </p:style>
+        <p:txBody>
+          <a:bodyPr rtlCol="0" anchor="ctr"/>
+          <a:lstStyle/>
+          <a:p>
+            <a:pPr algn="ctr"/>
+          </a:p>
+        </p:txBody>
+      </p:sp>
+      <p:sp>
+        <p:nvSpPr>
+          <p:cNvPr id="12" name="TextBox 11"/>
           <p:cNvSpPr txBox="1"/>
           <p:nvPr/>
         </p:nvSpPr>
         <p:spPr>
           <a:xfrm>
-            <a:off x="685800" y="5989320"/>
-            <a:ext cx="10789920" cy="365760"/>
+            <a:off x="8229600" y="2194560"/>
+            <a:ext cx="3017520" cy="2926080"/>
           </a:xfrm>
           <a:prstGeom prst="rect">
             <a:avLst/>
@@ -6279,63 +6591,122 @@
               </a:spcAft>
             </a:pPr>
             <a:r>
-              <a:rPr sz="1700" b="0">
-                <a:solidFill>
-                  <a:srgbClr val="6B6963"/>
-                </a:solidFill>
-                <a:latin typeface="Aptos"/>
-              </a:rPr>
-              <a:t>About </a:t>
-            </a:r>
-            <a:r>
-              <a:rPr sz="1700" b="1">
-                <a:solidFill>
-                  <a:srgbClr val="6B6963"/>
-                </a:solidFill>
-                <a:latin typeface="Aptos"/>
-              </a:rPr>
-              <a:t>$0.99</a:t>
-            </a:r>
-            <a:r>
-              <a:rPr sz="1700" b="0">
-                <a:solidFill>
-                  <a:srgbClr val="6B6963"/>
-                </a:solidFill>
-                <a:latin typeface="Aptos"/>
-              </a:rPr>
-              <a:t> a session, </a:t>
-            </a:r>
-            <a:r>
-              <a:rPr sz="1700" b="1">
-                <a:solidFill>
-                  <a:srgbClr val="6B6963"/>
-                </a:solidFill>
-                <a:latin typeface="Aptos"/>
-              </a:rPr>
-              <a:t>$296,478</a:t>
-            </a:r>
-            <a:r>
-              <a:rPr sz="1700" b="0">
-                <a:solidFill>
-                  <a:srgbClr val="6B6963"/>
-                </a:solidFill>
-                <a:latin typeface="Aptos"/>
-              </a:rPr>
-              <a:t> a month at 10,000 sessions a day. Assumed $3.00 per million tokens.</a:t>
-            </a:r>
-          </a:p>
-        </p:txBody>
-      </p:sp>
-      <p:sp>
-        <p:nvSpPr>
-          <p:cNvPr id="12" name="TextBox 11"/>
+              <a:rPr sz="1500" b="1">
+                <a:solidFill>
+                  <a:srgbClr val="1C66C2"/>
+                </a:solidFill>
+                <a:latin typeface="Aptos"/>
+              </a:rPr>
+              <a:t>ON PAPER, NOW</a:t>
+            </a:r>
+          </a:p>
+          <a:p>
+            <a:pPr algn="l">
+              <a:lnSpc>
+                <a:spcPct val="108000"/>
+              </a:lnSpc>
+              <a:spcAft>
+                <a:spcPts val="0"/>
+              </a:spcAft>
+            </a:pPr>
+            <a:r>
+              <a:rPr sz="2400" b="0">
+                <a:solidFill>
+                  <a:srgbClr val="0B0B0B"/>
+                </a:solidFill>
+                <a:latin typeface="Aptos"/>
+              </a:rPr>
+              <a:t/>
+            </a:r>
+          </a:p>
+          <a:p>
+            <a:pPr algn="l">
+              <a:lnSpc>
+                <a:spcPct val="108000"/>
+              </a:lnSpc>
+              <a:spcAft>
+                <a:spcPts val="0"/>
+              </a:spcAft>
+            </a:pPr>
+            <a:r>
+              <a:rPr sz="4000" b="1">
+                <a:solidFill>
+                  <a:srgbClr val="0B0B0B"/>
+                </a:solidFill>
+                <a:latin typeface="Aptos Display"/>
+              </a:rPr>
+              <a:t>Most?</a:t>
+            </a:r>
+          </a:p>
+          <a:p>
+            <a:pPr algn="l">
+              <a:lnSpc>
+                <a:spcPct val="108000"/>
+              </a:lnSpc>
+              <a:spcAft>
+                <a:spcPts val="0"/>
+              </a:spcAft>
+            </a:pPr>
+            <a:r>
+              <a:rPr sz="4000" b="1">
+                <a:solidFill>
+                  <a:srgbClr val="0B0B0B"/>
+                </a:solidFill>
+                <a:latin typeface="Aptos Display"/>
+              </a:rPr>
+              <a:t>Least?</a:t>
+            </a:r>
+          </a:p>
+          <a:p>
+            <a:pPr algn="l">
+              <a:lnSpc>
+                <a:spcPct val="108000"/>
+              </a:lnSpc>
+              <a:spcAft>
+                <a:spcPts val="0"/>
+              </a:spcAft>
+            </a:pPr>
+            <a:r>
+              <a:rPr sz="2400" b="0">
+                <a:solidFill>
+                  <a:srgbClr val="0B0B0B"/>
+                </a:solidFill>
+                <a:latin typeface="Aptos"/>
+              </a:rPr>
+              <a:t/>
+            </a:r>
+          </a:p>
+          <a:p>
+            <a:pPr algn="l">
+              <a:lnSpc>
+                <a:spcPct val="108000"/>
+              </a:lnSpc>
+              <a:spcAft>
+                <a:spcPts val="0"/>
+              </a:spcAft>
+            </a:pPr>
+            <a:r>
+              <a:rPr sz="1800" b="0">
+                <a:solidFill>
+                  <a:srgbClr val="3C3B38"/>
+                </a:solidFill>
+                <a:latin typeface="Aptos"/>
+              </a:rPr>
+              <a:t>90 seconds. Then run:</a:t>
+            </a:r>
+          </a:p>
+        </p:txBody>
+      </p:sp>
+      <p:sp>
+        <p:nvSpPr>
+          <p:cNvPr id="13" name="TextBox 12"/>
           <p:cNvSpPr txBox="1"/>
           <p:nvPr/>
         </p:nvSpPr>
         <p:spPr>
           <a:xfrm>
-            <a:off x="685800" y="6473952"/>
-            <a:ext cx="5486400" cy="274320"/>
+            <a:off x="8229600" y="5120640"/>
+            <a:ext cx="3108960" cy="457200"/>
           </a:xfrm>
           <a:prstGeom prst="rect">
             <a:avLst/>
@@ -6357,27 +6728,27 @@
               </a:spcAft>
             </a:pPr>
             <a:r>
-              <a:rPr sz="1100" b="0">
-                <a:solidFill>
-                  <a:srgbClr val="6B6963"/>
-                </a:solidFill>
-                <a:latin typeface="Aptos"/>
-              </a:rPr>
-              <a:t>Saving the Tokens  ·  Shyamji Tiwari</a:t>
-            </a:r>
-          </a:p>
-        </p:txBody>
-      </p:sp>
-      <p:sp>
-        <p:nvSpPr>
-          <p:cNvPr id="13" name="TextBox 12"/>
+              <a:rPr sz="1900" b="1">
+                <a:solidFill>
+                  <a:srgbClr val="1C66C2"/>
+                </a:solidFill>
+                <a:latin typeface="Aptos"/>
+              </a:rPr>
+              <a:t>Play “Reveal”</a:t>
+            </a:r>
+          </a:p>
+        </p:txBody>
+      </p:sp>
+      <p:sp>
+        <p:nvSpPr>
+          <p:cNvPr id="14" name="TextBox 13"/>
           <p:cNvSpPr txBox="1"/>
           <p:nvPr/>
         </p:nvSpPr>
         <p:spPr>
           <a:xfrm>
-            <a:off x="5760720" y="6473952"/>
-            <a:ext cx="5745175" cy="274320"/>
+            <a:off x="8229600" y="5532120"/>
+            <a:ext cx="3108960" cy="640080"/>
           </a:xfrm>
           <a:prstGeom prst="rect">
             <a:avLst/>
@@ -6390,7 +6761,7 @@
           </a:bodyPr>
           <a:lstStyle/>
           <a:p>
-            <a:pPr algn="r">
+            <a:pPr algn="l">
               <a:lnSpc>
                 <a:spcPct val="108000"/>
               </a:lnSpc>
@@ -6399,13 +6770,55 @@
               </a:spcAft>
             </a:pPr>
             <a:r>
+              <a:rPr sz="1300" b="0">
+                <a:solidFill>
+                  <a:srgbClr val="3C3B38"/>
+                </a:solidFill>
+                <a:latin typeface="Aptos"/>
+              </a:rPr>
+              <a:t>Prefix caching: the provider remembers the start of your prompt and charges about 10% to read it again.</a:t>
+            </a:r>
+          </a:p>
+        </p:txBody>
+      </p:sp>
+      <p:sp>
+        <p:nvSpPr>
+          <p:cNvPr id="15" name="TextBox 14"/>
+          <p:cNvSpPr txBox="1"/>
+          <p:nvPr/>
+        </p:nvSpPr>
+        <p:spPr>
+          <a:xfrm>
+            <a:off x="685800" y="6473952"/>
+            <a:ext cx="5486400" cy="274320"/>
+          </a:xfrm>
+          <a:prstGeom prst="rect">
+            <a:avLst/>
+          </a:prstGeom>
+          <a:noFill/>
+        </p:spPr>
+        <p:txBody>
+          <a:bodyPr wrap="square" lIns="0" rIns="0" tIns="0" bIns="0" anchor="t">
+            <a:spAutoFit/>
+          </a:bodyPr>
+          <a:lstStyle/>
+          <a:p>
+            <a:pPr algn="l">
+              <a:lnSpc>
+                <a:spcPct val="108000"/>
+              </a:lnSpc>
+              <a:spcAft>
+                <a:spcPts val="0"/>
+              </a:spcAft>
+            </a:pPr>
+            <a:r>
               <a:rPr sz="1100" b="0">
                 <a:solidFill>
                   <a:srgbClr val="6B6963"/>
                 </a:solidFill>
                 <a:latin typeface="Aptos"/>
               </a:rPr>
-              <a:t>Simulated 20-turn session · illustrative settings · input tokens only</a:t>
+              <a:t>Saving the Tokens  ·  Shyamji Tiwari</a:t>
             </a:r>
           </a:p>
         </p:txBody>
@@ -6419,6 +6832,729 @@
 </file>
 
 <file path=ppt/slides/slide15.xml><?xml version="1.0" encoding="utf-8"?>
+<p:sld xmlns:a="http://schemas.openxmlformats.org/drawingml/2006/main" xmlns:p="http://schemas.openxmlformats.org/presentationml/2006/main" xmlns:r="http://schemas.openxmlformats.org/officeDocument/2006/relationships">
+  <p:cSld>
+    <p:bg>
+      <p:bgPr>
+        <a:solidFill>
+          <a:srgbClr val="121212"/>
+        </a:solidFill>
+        <a:effectLst/>
+      </p:bgPr>
+    </p:bg>
+    <p:spTree>
+      <p:nvGrpSpPr>
+        <p:cNvPr id="1" name=""/>
+        <p:cNvGrpSpPr/>
+        <p:nvPr/>
+      </p:nvGrpSpPr>
+      <p:grpSpPr/>
+      <p:sp>
+        <p:nvSpPr>
+          <p:cNvPr id="2" name="TextBox 1"/>
+          <p:cNvSpPr txBox="1"/>
+          <p:nvPr/>
+        </p:nvSpPr>
+        <p:spPr>
+          <a:xfrm>
+            <a:off x="685800" y="457200"/>
+            <a:ext cx="5486400" cy="320040"/>
+          </a:xfrm>
+          <a:prstGeom prst="rect">
+            <a:avLst/>
+          </a:prstGeom>
+          <a:noFill/>
+        </p:spPr>
+        <p:txBody>
+          <a:bodyPr wrap="square" lIns="0" rIns="0" tIns="0" bIns="0" anchor="t">
+            <a:spAutoFit/>
+          </a:bodyPr>
+          <a:lstStyle/>
+          <a:p>
+            <a:pPr algn="l">
+              <a:lnSpc>
+                <a:spcPct val="108000"/>
+              </a:lnSpc>
+              <a:spcAft>
+                <a:spcPts val="0"/>
+              </a:spcAft>
+            </a:pPr>
+            <a:r>
+              <a:rPr sz="1400" b="1">
+                <a:solidFill>
+                  <a:srgbClr val="B5B2AA"/>
+                </a:solidFill>
+                <a:latin typeface="Aptos"/>
+              </a:rPr>
+              <a:t>EXERCISE 3 · THE ANSWER</a:t>
+            </a:r>
+          </a:p>
+        </p:txBody>
+      </p:sp>
+      <p:sp>
+        <p:nvSpPr>
+          <p:cNvPr id="3" name="Rounded Rectangle 2"/>
+          <p:cNvSpPr/>
+          <p:nvPr/>
+        </p:nvSpPr>
+        <p:spPr>
+          <a:xfrm>
+            <a:off x="10262311" y="548640"/>
+            <a:ext cx="256032" cy="64008"/>
+          </a:xfrm>
+          <a:prstGeom prst="roundRect">
+            <a:avLst>
+              <a:gd name="adj" fmla="val 50000"/>
+            </a:avLst>
+          </a:prstGeom>
+          <a:solidFill>
+            <a:srgbClr val="3A3A38"/>
+          </a:solidFill>
+          <a:ln>
+            <a:noFill/>
+          </a:ln>
+          <a:effectLst/>
+        </p:spPr>
+        <p:style>
+          <a:lnRef idx="1">
+            <a:schemeClr val="accent1"/>
+          </a:lnRef>
+          <a:fillRef idx="3">
+            <a:schemeClr val="accent1"/>
+          </a:fillRef>
+          <a:effectRef idx="2">
+            <a:schemeClr val="accent1"/>
+          </a:effectRef>
+          <a:fontRef idx="minor">
+            <a:schemeClr val="lt1"/>
+          </a:fontRef>
+        </p:style>
+        <p:txBody>
+          <a:bodyPr rtlCol="0" anchor="ctr"/>
+          <a:lstStyle/>
+          <a:p>
+            <a:pPr algn="ctr"/>
+          </a:p>
+        </p:txBody>
+      </p:sp>
+      <p:sp>
+        <p:nvSpPr>
+          <p:cNvPr id="4" name="Rounded Rectangle 3"/>
+          <p:cNvSpPr/>
+          <p:nvPr/>
+        </p:nvSpPr>
+        <p:spPr>
+          <a:xfrm>
+            <a:off x="10591495" y="548640"/>
+            <a:ext cx="256032" cy="64008"/>
+          </a:xfrm>
+          <a:prstGeom prst="roundRect">
+            <a:avLst>
+              <a:gd name="adj" fmla="val 50000"/>
+            </a:avLst>
+          </a:prstGeom>
+          <a:solidFill>
+            <a:srgbClr val="3A3A38"/>
+          </a:solidFill>
+          <a:ln>
+            <a:noFill/>
+          </a:ln>
+          <a:effectLst/>
+        </p:spPr>
+        <p:style>
+          <a:lnRef idx="1">
+            <a:schemeClr val="accent1"/>
+          </a:lnRef>
+          <a:fillRef idx="3">
+            <a:schemeClr val="accent1"/>
+          </a:fillRef>
+          <a:effectRef idx="2">
+            <a:schemeClr val="accent1"/>
+          </a:effectRef>
+          <a:fontRef idx="minor">
+            <a:schemeClr val="lt1"/>
+          </a:fontRef>
+        </p:style>
+        <p:txBody>
+          <a:bodyPr rtlCol="0" anchor="ctr"/>
+          <a:lstStyle/>
+          <a:p>
+            <a:pPr algn="ctr"/>
+          </a:p>
+        </p:txBody>
+      </p:sp>
+      <p:sp>
+        <p:nvSpPr>
+          <p:cNvPr id="5" name="Rounded Rectangle 4"/>
+          <p:cNvSpPr/>
+          <p:nvPr/>
+        </p:nvSpPr>
+        <p:spPr>
+          <a:xfrm>
+            <a:off x="10920679" y="548640"/>
+            <a:ext cx="256032" cy="64008"/>
+          </a:xfrm>
+          <a:prstGeom prst="roundRect">
+            <a:avLst>
+              <a:gd name="adj" fmla="val 50000"/>
+            </a:avLst>
+          </a:prstGeom>
+          <a:solidFill>
+            <a:srgbClr val="3A3A38"/>
+          </a:solidFill>
+          <a:ln>
+            <a:noFill/>
+          </a:ln>
+          <a:effectLst/>
+        </p:spPr>
+        <p:style>
+          <a:lnRef idx="1">
+            <a:schemeClr val="accent1"/>
+          </a:lnRef>
+          <a:fillRef idx="3">
+            <a:schemeClr val="accent1"/>
+          </a:fillRef>
+          <a:effectRef idx="2">
+            <a:schemeClr val="accent1"/>
+          </a:effectRef>
+          <a:fontRef idx="minor">
+            <a:schemeClr val="lt1"/>
+          </a:fontRef>
+        </p:style>
+        <p:txBody>
+          <a:bodyPr rtlCol="0" anchor="ctr"/>
+          <a:lstStyle/>
+          <a:p>
+            <a:pPr algn="ctr"/>
+          </a:p>
+        </p:txBody>
+      </p:sp>
+      <p:sp>
+        <p:nvSpPr>
+          <p:cNvPr id="6" name="Rounded Rectangle 5"/>
+          <p:cNvSpPr/>
+          <p:nvPr/>
+        </p:nvSpPr>
+        <p:spPr>
+          <a:xfrm>
+            <a:off x="11249863" y="548640"/>
+            <a:ext cx="256032" cy="64008"/>
+          </a:xfrm>
+          <a:prstGeom prst="roundRect">
+            <a:avLst>
+              <a:gd name="adj" fmla="val 50000"/>
+            </a:avLst>
+          </a:prstGeom>
+          <a:solidFill>
+            <a:srgbClr val="5AA3F0"/>
+          </a:solidFill>
+          <a:ln>
+            <a:noFill/>
+          </a:ln>
+          <a:effectLst/>
+        </p:spPr>
+        <p:style>
+          <a:lnRef idx="1">
+            <a:schemeClr val="accent1"/>
+          </a:lnRef>
+          <a:fillRef idx="3">
+            <a:schemeClr val="accent1"/>
+          </a:fillRef>
+          <a:effectRef idx="2">
+            <a:schemeClr val="accent1"/>
+          </a:effectRef>
+          <a:fontRef idx="minor">
+            <a:schemeClr val="lt1"/>
+          </a:fontRef>
+        </p:style>
+        <p:txBody>
+          <a:bodyPr rtlCol="0" anchor="ctr"/>
+          <a:lstStyle/>
+          <a:p>
+            <a:pPr algn="ctr"/>
+          </a:p>
+        </p:txBody>
+      </p:sp>
+      <p:sp>
+        <p:nvSpPr>
+          <p:cNvPr id="7" name="Rounded Rectangle 6"/>
+          <p:cNvSpPr/>
+          <p:nvPr/>
+        </p:nvSpPr>
+        <p:spPr>
+          <a:xfrm>
+            <a:off x="8387791" y="429768"/>
+            <a:ext cx="1600200" cy="310896"/>
+          </a:xfrm>
+          <a:prstGeom prst="roundRect">
+            <a:avLst>
+              <a:gd name="adj" fmla="val 50000"/>
+            </a:avLst>
+          </a:prstGeom>
+          <a:solidFill>
+            <a:srgbClr val="121212"/>
+          </a:solidFill>
+          <a:ln w="15875">
+            <a:solidFill>
+              <a:srgbClr val="B5B2AA"/>
+            </a:solidFill>
+          </a:ln>
+          <a:effectLst/>
+        </p:spPr>
+        <p:style>
+          <a:lnRef idx="1">
+            <a:schemeClr val="accent1"/>
+          </a:lnRef>
+          <a:fillRef idx="3">
+            <a:schemeClr val="accent1"/>
+          </a:fillRef>
+          <a:effectRef idx="2">
+            <a:schemeClr val="accent1"/>
+          </a:effectRef>
+          <a:fontRef idx="minor">
+            <a:schemeClr val="lt1"/>
+          </a:fontRef>
+        </p:style>
+        <p:txBody>
+          <a:bodyPr rtlCol="0" anchor="ctr" lIns="0" rIns="0" tIns="0" bIns="0"/>
+          <a:lstStyle/>
+          <a:p>
+            <a:pPr algn="ctr"/>
+            <a:r>
+              <a:rPr sz="1200" b="1">
+                <a:solidFill>
+                  <a:srgbClr val="D7D5CE"/>
+                </a:solidFill>
+                <a:latin typeface="Aptos"/>
+              </a:rPr>
+              <a:t>EXAMPLE MODEL</a:t>
+            </a:r>
+          </a:p>
+        </p:txBody>
+      </p:sp>
+      <p:sp>
+        <p:nvSpPr>
+          <p:cNvPr id="8" name="TextBox 7"/>
+          <p:cNvSpPr txBox="1"/>
+          <p:nvPr/>
+        </p:nvSpPr>
+        <p:spPr>
+          <a:xfrm>
+            <a:off x="685800" y="841248"/>
+            <a:ext cx="10820095" cy="914400"/>
+          </a:xfrm>
+          <a:prstGeom prst="rect">
+            <a:avLst/>
+          </a:prstGeom>
+          <a:noFill/>
+        </p:spPr>
+        <p:txBody>
+          <a:bodyPr wrap="square" lIns="0" rIns="0" tIns="0" bIns="0" anchor="t">
+            <a:spAutoFit/>
+          </a:bodyPr>
+          <a:lstStyle/>
+          <a:p>
+            <a:pPr algn="l">
+              <a:lnSpc>
+                <a:spcPct val="95000"/>
+              </a:lnSpc>
+              <a:spcAft>
+                <a:spcPts val="0"/>
+              </a:spcAft>
+            </a:pPr>
+            <a:r>
+              <a:rPr sz="4000" b="1">
+                <a:solidFill>
+                  <a:srgbClr val="FFFFFF"/>
+                </a:solidFill>
+                <a:latin typeface="Aptos Display"/>
+              </a:rPr>
+              <a:t>Ranked by what it saves, in our example agent</a:t>
+            </a:r>
+          </a:p>
+        </p:txBody>
+      </p:sp>
+      <p:sp>
+        <p:nvSpPr>
+          <p:cNvPr id="9" name="TextBox 8"/>
+          <p:cNvSpPr txBox="1"/>
+          <p:nvPr/>
+        </p:nvSpPr>
+        <p:spPr>
+          <a:xfrm>
+            <a:off x="685800" y="1371600"/>
+            <a:ext cx="10789920" cy="274320"/>
+          </a:xfrm>
+          <a:prstGeom prst="rect">
+            <a:avLst/>
+          </a:prstGeom>
+          <a:noFill/>
+        </p:spPr>
+        <p:txBody>
+          <a:bodyPr wrap="square" lIns="0" rIns="0" tIns="0" bIns="0" anchor="t">
+            <a:spAutoFit/>
+          </a:bodyPr>
+          <a:lstStyle/>
+          <a:p>
+            <a:pPr algn="l">
+              <a:lnSpc>
+                <a:spcPct val="108000"/>
+              </a:lnSpc>
+              <a:spcAft>
+                <a:spcPts val="0"/>
+              </a:spcAft>
+            </a:pPr>
+            <a:r>
+              <a:rPr sz="1300" b="0">
+                <a:solidFill>
+                  <a:srgbClr val="B5B2AA"/>
+                </a:solidFill>
+                <a:latin typeface="Aptos"/>
+              </a:rPr>
+              <a:t>400-token prompt, 20 turns, uncached; ranked by tokens saved, not by what survives your task. At 4,000 tokens the prompt fix saves 12%.</a:t>
+            </a:r>
+          </a:p>
+        </p:txBody>
+      </p:sp>
+      <p:pic>
+        <p:nvPicPr>
+          <p:cNvPr id="10" name="Picture 9" descr="leaderboard_dark.png"/>
+          <p:cNvPicPr>
+            <a:picLocks noChangeAspect="1"/>
+          </p:cNvPicPr>
+          <p:nvPr/>
+        </p:nvPicPr>
+        <p:blipFill>
+          <a:blip r:embed="rId2"/>
+          <a:stretch>
+            <a:fillRect/>
+          </a:stretch>
+        </p:blipFill>
+        <p:spPr>
+          <a:xfrm>
+            <a:off x="411480" y="1554480"/>
+            <a:ext cx="11247120" cy="4686300"/>
+          </a:xfrm>
+          <a:prstGeom prst="rect">
+            <a:avLst/>
+          </a:prstGeom>
+        </p:spPr>
+      </p:pic>
+      <p:sp>
+        <p:nvSpPr>
+          <p:cNvPr id="11" name="Rounded Rectangle 10"/>
+          <p:cNvSpPr/>
+          <p:nvPr/>
+        </p:nvSpPr>
+        <p:spPr>
+          <a:xfrm>
+            <a:off x="685800" y="6336792"/>
+            <a:ext cx="182880" cy="182880"/>
+          </a:xfrm>
+          <a:prstGeom prst="roundRect">
+            <a:avLst>
+              <a:gd name="adj" fmla="val 20000"/>
+            </a:avLst>
+          </a:prstGeom>
+          <a:solidFill>
+            <a:srgbClr val="5AA3F0"/>
+          </a:solidFill>
+          <a:ln>
+            <a:noFill/>
+          </a:ln>
+          <a:effectLst/>
+        </p:spPr>
+        <p:style>
+          <a:lnRef idx="1">
+            <a:schemeClr val="accent1"/>
+          </a:lnRef>
+          <a:fillRef idx="3">
+            <a:schemeClr val="accent1"/>
+          </a:fillRef>
+          <a:effectRef idx="2">
+            <a:schemeClr val="accent1"/>
+          </a:effectRef>
+          <a:fontRef idx="minor">
+            <a:schemeClr val="lt1"/>
+          </a:fontRef>
+        </p:style>
+        <p:txBody>
+          <a:bodyPr rtlCol="0" anchor="ctr"/>
+          <a:lstStyle/>
+          <a:p>
+            <a:pPr algn="ctr"/>
+          </a:p>
+        </p:txBody>
+      </p:sp>
+      <p:sp>
+        <p:nvSpPr>
+          <p:cNvPr id="12" name="TextBox 11"/>
+          <p:cNvSpPr txBox="1"/>
+          <p:nvPr/>
+        </p:nvSpPr>
+        <p:spPr>
+          <a:xfrm>
+            <a:off x="996696" y="6254496"/>
+            <a:ext cx="2560320" cy="320040"/>
+          </a:xfrm>
+          <a:prstGeom prst="rect">
+            <a:avLst/>
+          </a:prstGeom>
+          <a:noFill/>
+        </p:spPr>
+        <p:txBody>
+          <a:bodyPr wrap="square" lIns="0" rIns="0" tIns="0" bIns="0" anchor="t">
+            <a:spAutoFit/>
+          </a:bodyPr>
+          <a:lstStyle/>
+          <a:p>
+            <a:pPr algn="l">
+              <a:lnSpc>
+                <a:spcPct val="108000"/>
+              </a:lnSpc>
+              <a:spcAft>
+                <a:spcPts val="0"/>
+              </a:spcAft>
+            </a:pPr>
+            <a:r>
+              <a:rPr sz="1600" b="0">
+                <a:solidFill>
+                  <a:srgbClr val="D7D5CE"/>
+                </a:solidFill>
+                <a:latin typeface="Aptos"/>
+              </a:rPr>
+              <a:t>Make it smaller</a:t>
+            </a:r>
+          </a:p>
+        </p:txBody>
+      </p:sp>
+      <p:sp>
+        <p:nvSpPr>
+          <p:cNvPr id="13" name="Rounded Rectangle 12"/>
+          <p:cNvSpPr/>
+          <p:nvPr/>
+        </p:nvSpPr>
+        <p:spPr>
+          <a:xfrm>
+            <a:off x="3291840" y="6336792"/>
+            <a:ext cx="182880" cy="182880"/>
+          </a:xfrm>
+          <a:prstGeom prst="roundRect">
+            <a:avLst>
+              <a:gd name="adj" fmla="val 20000"/>
+            </a:avLst>
+          </a:prstGeom>
+          <a:solidFill>
+            <a:srgbClr val="F0834E"/>
+          </a:solidFill>
+          <a:ln>
+            <a:noFill/>
+          </a:ln>
+          <a:effectLst/>
+        </p:spPr>
+        <p:style>
+          <a:lnRef idx="1">
+            <a:schemeClr val="accent1"/>
+          </a:lnRef>
+          <a:fillRef idx="3">
+            <a:schemeClr val="accent1"/>
+          </a:fillRef>
+          <a:effectRef idx="2">
+            <a:schemeClr val="accent1"/>
+          </a:effectRef>
+          <a:fontRef idx="minor">
+            <a:schemeClr val="lt1"/>
+          </a:fontRef>
+        </p:style>
+        <p:txBody>
+          <a:bodyPr rtlCol="0" anchor="ctr"/>
+          <a:lstStyle/>
+          <a:p>
+            <a:pPr algn="ctr"/>
+          </a:p>
+        </p:txBody>
+      </p:sp>
+      <p:sp>
+        <p:nvSpPr>
+          <p:cNvPr id="14" name="TextBox 13"/>
+          <p:cNvSpPr txBox="1"/>
+          <p:nvPr/>
+        </p:nvSpPr>
+        <p:spPr>
+          <a:xfrm>
+            <a:off x="3602736" y="6254496"/>
+            <a:ext cx="2560320" cy="320040"/>
+          </a:xfrm>
+          <a:prstGeom prst="rect">
+            <a:avLst/>
+          </a:prstGeom>
+          <a:noFill/>
+        </p:spPr>
+        <p:txBody>
+          <a:bodyPr wrap="square" lIns="0" rIns="0" tIns="0" bIns="0" anchor="t">
+            <a:spAutoFit/>
+          </a:bodyPr>
+          <a:lstStyle/>
+          <a:p>
+            <a:pPr algn="l">
+              <a:lnSpc>
+                <a:spcPct val="108000"/>
+              </a:lnSpc>
+              <a:spcAft>
+                <a:spcPts val="0"/>
+              </a:spcAft>
+            </a:pPr>
+            <a:r>
+              <a:rPr sz="1600" b="0">
+                <a:solidFill>
+                  <a:srgbClr val="D7D5CE"/>
+                </a:solidFill>
+                <a:latin typeface="Aptos"/>
+              </a:rPr>
+              <a:t>Send it again less</a:t>
+            </a:r>
+          </a:p>
+        </p:txBody>
+      </p:sp>
+      <p:sp>
+        <p:nvSpPr>
+          <p:cNvPr id="15" name="Rounded Rectangle 14"/>
+          <p:cNvSpPr/>
+          <p:nvPr/>
+        </p:nvSpPr>
+        <p:spPr>
+          <a:xfrm>
+            <a:off x="5897880" y="6336792"/>
+            <a:ext cx="182880" cy="182880"/>
+          </a:xfrm>
+          <a:prstGeom prst="roundRect">
+            <a:avLst>
+              <a:gd name="adj" fmla="val 20000"/>
+            </a:avLst>
+          </a:prstGeom>
+          <a:solidFill>
+            <a:srgbClr val="9A978F"/>
+          </a:solidFill>
+          <a:ln>
+            <a:noFill/>
+          </a:ln>
+          <a:effectLst/>
+        </p:spPr>
+        <p:style>
+          <a:lnRef idx="1">
+            <a:schemeClr val="accent1"/>
+          </a:lnRef>
+          <a:fillRef idx="3">
+            <a:schemeClr val="accent1"/>
+          </a:fillRef>
+          <a:effectRef idx="2">
+            <a:schemeClr val="accent1"/>
+          </a:effectRef>
+          <a:fontRef idx="minor">
+            <a:schemeClr val="lt1"/>
+          </a:fontRef>
+        </p:style>
+        <p:txBody>
+          <a:bodyPr rtlCol="0" anchor="ctr"/>
+          <a:lstStyle/>
+          <a:p>
+            <a:pPr algn="ctr"/>
+          </a:p>
+        </p:txBody>
+      </p:sp>
+      <p:sp>
+        <p:nvSpPr>
+          <p:cNvPr id="16" name="TextBox 15"/>
+          <p:cNvSpPr txBox="1"/>
+          <p:nvPr/>
+        </p:nvSpPr>
+        <p:spPr>
+          <a:xfrm>
+            <a:off x="6208776" y="6254496"/>
+            <a:ext cx="2560320" cy="320040"/>
+          </a:xfrm>
+          <a:prstGeom prst="rect">
+            <a:avLst/>
+          </a:prstGeom>
+          <a:noFill/>
+        </p:spPr>
+        <p:txBody>
+          <a:bodyPr wrap="square" lIns="0" rIns="0" tIns="0" bIns="0" anchor="t">
+            <a:spAutoFit/>
+          </a:bodyPr>
+          <a:lstStyle/>
+          <a:p>
+            <a:pPr algn="l">
+              <a:lnSpc>
+                <a:spcPct val="108000"/>
+              </a:lnSpc>
+              <a:spcAft>
+                <a:spcPts val="0"/>
+              </a:spcAft>
+            </a:pPr>
+            <a:r>
+              <a:rPr sz="1600" b="0">
+                <a:solidFill>
+                  <a:srgbClr val="D7D5CE"/>
+                </a:solidFill>
+                <a:latin typeface="Aptos"/>
+              </a:rPr>
+              <a:t>Cheaper per send (caching)</a:t>
+            </a:r>
+          </a:p>
+        </p:txBody>
+      </p:sp>
+      <p:sp>
+        <p:nvSpPr>
+          <p:cNvPr id="17" name="TextBox 16"/>
+          <p:cNvSpPr txBox="1"/>
+          <p:nvPr/>
+        </p:nvSpPr>
+        <p:spPr>
+          <a:xfrm>
+            <a:off x="8778240" y="6254496"/>
+            <a:ext cx="2743200" cy="320040"/>
+          </a:xfrm>
+          <a:prstGeom prst="rect">
+            <a:avLst/>
+          </a:prstGeom>
+          <a:noFill/>
+        </p:spPr>
+        <p:txBody>
+          <a:bodyPr wrap="square" lIns="0" rIns="0" tIns="0" bIns="0" anchor="t">
+            <a:spAutoFit/>
+          </a:bodyPr>
+          <a:lstStyle/>
+          <a:p>
+            <a:pPr algn="r">
+              <a:lnSpc>
+                <a:spcPct val="108000"/>
+              </a:lnSpc>
+              <a:spcAft>
+                <a:spcPts val="0"/>
+              </a:spcAft>
+            </a:pPr>
+            <a:r>
+              <a:rPr sz="1400" b="0">
+                <a:solidFill>
+                  <a:srgbClr val="B5B2AA"/>
+                </a:solidFill>
+                <a:latin typeface="Aptos"/>
+              </a:rPr>
+              <a:t>slide 18: when it changes</a:t>
+            </a:r>
+          </a:p>
+        </p:txBody>
+      </p:sp>
+    </p:spTree>
+  </p:cSld>
+  <p:clrMapOvr>
+    <a:masterClrMapping/>
+  </p:clrMapOvr>
+</p:sld>
+</file>
+
+<file path=ppt/slides/slide16.xml><?xml version="1.0" encoding="utf-8"?>
 <p:sld xmlns:a="http://schemas.openxmlformats.org/drawingml/2006/main" xmlns:p="http://schemas.openxmlformats.org/presentationml/2006/main" xmlns:r="http://schemas.openxmlformats.org/officeDocument/2006/relationships">
   <p:cSld>
     <p:bg>
@@ -6473,7 +7609,7 @@
                 </a:solidFill>
                 <a:latin typeface="Aptos"/>
               </a:rPr>
-              <a:t>EXERCISE 3</a:t>
+              <a:t>FIX IT</a:t>
             </a:r>
           </a:p>
         </p:txBody>
@@ -6664,7 +7800,64 @@
       </p:sp>
       <p:sp>
         <p:nvSpPr>
-          <p:cNvPr id="7" name="TextBox 6"/>
+          <p:cNvPr id="7" name="Rounded Rectangle 6"/>
+          <p:cNvSpPr/>
+          <p:nvPr/>
+        </p:nvSpPr>
+        <p:spPr>
+          <a:xfrm>
+            <a:off x="8387791" y="429768"/>
+            <a:ext cx="1600200" cy="310896"/>
+          </a:xfrm>
+          <a:prstGeom prst="roundRect">
+            <a:avLst>
+              <a:gd name="adj" fmla="val 50000"/>
+            </a:avLst>
+          </a:prstGeom>
+          <a:solidFill>
+            <a:srgbClr val="FFFFFF"/>
+          </a:solidFill>
+          <a:ln w="15875">
+            <a:solidFill>
+              <a:srgbClr val="6B6963"/>
+            </a:solidFill>
+          </a:ln>
+          <a:effectLst/>
+        </p:spPr>
+        <p:style>
+          <a:lnRef idx="1">
+            <a:schemeClr val="accent1"/>
+          </a:lnRef>
+          <a:fillRef idx="3">
+            <a:schemeClr val="accent1"/>
+          </a:fillRef>
+          <a:effectRef idx="2">
+            <a:schemeClr val="accent1"/>
+          </a:effectRef>
+          <a:fontRef idx="minor">
+            <a:schemeClr val="lt1"/>
+          </a:fontRef>
+        </p:style>
+        <p:txBody>
+          <a:bodyPr rtlCol="0" anchor="ctr" lIns="0" rIns="0" tIns="0" bIns="0"/>
+          <a:lstStyle/>
+          <a:p>
+            <a:pPr algn="ctr"/>
+            <a:r>
+              <a:rPr sz="1200" b="1">
+                <a:solidFill>
+                  <a:srgbClr val="3C3B38"/>
+                </a:solidFill>
+                <a:latin typeface="Aptos"/>
+              </a:rPr>
+              <a:t>EXAMPLE MODEL</a:t>
+            </a:r>
+          </a:p>
+        </p:txBody>
+      </p:sp>
+      <p:sp>
+        <p:nvSpPr>
+          <p:cNvPr id="8" name="TextBox 7"/>
           <p:cNvSpPr txBox="1"/>
           <p:nvPr/>
         </p:nvSpPr>
@@ -6699,21 +7892,21 @@
                 </a:solidFill>
                 <a:latin typeface="Aptos Display"/>
               </a:rPr>
-              <a:t>Ten ways to cut the bill. Which wins?</a:t>
-            </a:r>
-          </a:p>
-        </p:txBody>
-      </p:sp>
-      <p:sp>
-        <p:nvSpPr>
-          <p:cNvPr id="8" name="TextBox 7"/>
+              <a:t>Your bill is a multiplication</a:t>
+            </a:r>
+          </a:p>
+        </p:txBody>
+      </p:sp>
+      <p:sp>
+        <p:nvSpPr>
+          <p:cNvPr id="9" name="TextBox 8"/>
           <p:cNvSpPr txBox="1"/>
           <p:nvPr/>
         </p:nvSpPr>
         <p:spPr>
           <a:xfrm>
-            <a:off x="685800" y="1371600"/>
-            <a:ext cx="10820095" cy="457200"/>
+            <a:off x="685800" y="1645920"/>
+            <a:ext cx="10789920" cy="822960"/>
           </a:xfrm>
           <a:prstGeom prst="rect">
             <a:avLst/>
@@ -6735,20 +7928,149 @@
               </a:spcAft>
             </a:pPr>
             <a:r>
-              <a:rPr sz="2000" b="0">
+              <a:rPr sz="2200" b="0">
+                <a:solidFill>
+                  <a:srgbClr val="0B0B0B"/>
+                </a:solidFill>
+                <a:latin typeface="Aptos"/>
+              </a:rPr>
+              <a:t>how </a:t>
+            </a:r>
+            <a:r>
+              <a:rPr sz="2200" b="1">
+                <a:solidFill>
+                  <a:srgbClr val="1C66C2"/>
+                </a:solidFill>
+                <a:latin typeface="Aptos"/>
+              </a:rPr>
+              <a:t>big</a:t>
+            </a:r>
+            <a:r>
+              <a:rPr sz="2200" b="0">
+                <a:solidFill>
+                  <a:srgbClr val="0B0B0B"/>
+                </a:solidFill>
+                <a:latin typeface="Aptos"/>
+              </a:rPr>
+              <a:t> each thing is  ×  how many times you </a:t>
+            </a:r>
+            <a:r>
+              <a:rPr sz="2200" b="1">
+                <a:solidFill>
+                  <a:srgbClr val="BF4C1C"/>
+                </a:solidFill>
+                <a:latin typeface="Aptos"/>
+              </a:rPr>
+              <a:t>send it</a:t>
+            </a:r>
+            <a:r>
+              <a:rPr sz="2200" b="0">
+                <a:solidFill>
+                  <a:srgbClr val="0B0B0B"/>
+                </a:solidFill>
+                <a:latin typeface="Aptos"/>
+              </a:rPr>
+              <a:t>  ×  what each send </a:t>
+            </a:r>
+            <a:r>
+              <a:rPr sz="2200" b="1">
+                <a:solidFill>
+                  <a:srgbClr val="6F6C66"/>
+                </a:solidFill>
+                <a:latin typeface="Aptos"/>
+              </a:rPr>
+              <a:t>costs</a:t>
+            </a:r>
+          </a:p>
+        </p:txBody>
+      </p:sp>
+      <p:sp>
+        <p:nvSpPr>
+          <p:cNvPr id="10" name="TextBox 9"/>
+          <p:cNvSpPr txBox="1"/>
+          <p:nvPr/>
+        </p:nvSpPr>
+        <p:spPr>
+          <a:xfrm>
+            <a:off x="685800" y="2331720"/>
+            <a:ext cx="10789920" cy="457200"/>
+          </a:xfrm>
+          <a:prstGeom prst="rect">
+            <a:avLst/>
+          </a:prstGeom>
+          <a:noFill/>
+        </p:spPr>
+        <p:txBody>
+          <a:bodyPr wrap="square" lIns="0" rIns="0" tIns="0" bIns="0" anchor="t">
+            <a:spAutoFit/>
+          </a:bodyPr>
+          <a:lstStyle/>
+          <a:p>
+            <a:pPr algn="l">
+              <a:lnSpc>
+                <a:spcPct val="108000"/>
+              </a:lnSpc>
+              <a:spcAft>
+                <a:spcPts val="0"/>
+              </a:spcAft>
+            </a:pPr>
+            <a:r>
+              <a:rPr sz="1800" b="0">
                 <a:solidFill>
                   <a:srgbClr val="3C3B38"/>
                 </a:solidFill>
                 <a:latin typeface="Aptos"/>
               </a:rPr>
-              <a:t>For a voice agent that watches the screen, 20 turns</a:t>
+              <a:t>Shrinking acts on the first, pruning (dropping old items) on the second, caching on the third.</a:t>
+            </a:r>
+          </a:p>
+        </p:txBody>
+      </p:sp>
+      <p:sp>
+        <p:nvSpPr>
+          <p:cNvPr id="11" name="TextBox 10"/>
+          <p:cNvSpPr txBox="1"/>
+          <p:nvPr/>
+        </p:nvSpPr>
+        <p:spPr>
+          <a:xfrm>
+            <a:off x="685800" y="2926080"/>
+            <a:ext cx="10789920" cy="457200"/>
+          </a:xfrm>
+          <a:prstGeom prst="rect">
+            <a:avLst/>
+          </a:prstGeom>
+          <a:noFill/>
+        </p:spPr>
+        <p:txBody>
+          <a:bodyPr wrap="square" lIns="0" rIns="0" tIns="0" bIns="0" anchor="t">
+            <a:spAutoFit/>
+          </a:bodyPr>
+          <a:lstStyle/>
+          <a:p>
+            <a:pPr algn="l">
+              <a:lnSpc>
+                <a:spcPct val="108000"/>
+              </a:lnSpc>
+              <a:spcAft>
+                <a:spcPts val="0"/>
+              </a:spcAft>
+            </a:pPr>
+            <a:r>
+              <a:rPr sz="1700" b="1">
+                <a:solidFill>
+                  <a:srgbClr val="6B6963"/>
+                </a:solidFill>
+                <a:latin typeface="Aptos"/>
+              </a:rPr>
+              <a:t>Share of the input tokens, one 20-turn session. The ranking you just saw follows these shares.</a:t>
             </a:r>
           </a:p>
         </p:txBody>
       </p:sp>
       <p:pic>
         <p:nvPicPr>
-          <p:cNvPr id="9" name="Picture 8" descr="lever_tiles.png"/>
+          <p:cNvPr id="12" name="Picture 11" descr="composition.png"/>
           <p:cNvPicPr>
             <a:picLocks noChangeAspect="1"/>
           </p:cNvPicPr>
@@ -6762,8 +8084,8 @@
         </p:blipFill>
         <p:spPr>
           <a:xfrm>
-            <a:off x="685800" y="1920240"/>
-            <a:ext cx="6766560" cy="4297680"/>
+            <a:off x="685800" y="3429000"/>
+            <a:ext cx="10820095" cy="2118935"/>
           </a:xfrm>
           <a:prstGeom prst="rect">
             <a:avLst/>
@@ -6772,60 +8094,14 @@
       </p:pic>
       <p:sp>
         <p:nvSpPr>
-          <p:cNvPr id="10" name="Rounded Rectangle 9"/>
-          <p:cNvSpPr/>
-          <p:nvPr/>
-        </p:nvSpPr>
-        <p:spPr>
-          <a:xfrm>
-            <a:off x="7909560" y="1920240"/>
-            <a:ext cx="3593592" cy="4206240"/>
-          </a:xfrm>
-          <a:prstGeom prst="roundRect">
-            <a:avLst>
-              <a:gd name="adj" fmla="val 7000"/>
-            </a:avLst>
-          </a:prstGeom>
-          <a:solidFill>
-            <a:srgbClr val="E6EFFA"/>
-          </a:solidFill>
-          <a:ln>
-            <a:noFill/>
-          </a:ln>
-          <a:effectLst/>
-        </p:spPr>
-        <p:style>
-          <a:lnRef idx="1">
-            <a:schemeClr val="accent1"/>
-          </a:lnRef>
-          <a:fillRef idx="3">
-            <a:schemeClr val="accent1"/>
-          </a:fillRef>
-          <a:effectRef idx="2">
-            <a:schemeClr val="accent1"/>
-          </a:effectRef>
-          <a:fontRef idx="minor">
-            <a:schemeClr val="lt1"/>
-          </a:fontRef>
-        </p:style>
-        <p:txBody>
-          <a:bodyPr rtlCol="0" anchor="ctr"/>
-          <a:lstStyle/>
-          <a:p>
-            <a:pPr algn="ctr"/>
-          </a:p>
-        </p:txBody>
-      </p:sp>
-      <p:sp>
-        <p:nvSpPr>
-          <p:cNvPr id="11" name="TextBox 10"/>
+          <p:cNvPr id="13" name="TextBox 12"/>
           <p:cNvSpPr txBox="1"/>
           <p:nvPr/>
         </p:nvSpPr>
         <p:spPr>
           <a:xfrm>
-            <a:off x="8229600" y="2194560"/>
-            <a:ext cx="3017520" cy="2926080"/>
+            <a:off x="685800" y="5989320"/>
+            <a:ext cx="10789920" cy="365760"/>
           </a:xfrm>
           <a:prstGeom prst="rect">
             <a:avLst/>
@@ -6847,122 +8123,63 @@
               </a:spcAft>
             </a:pPr>
             <a:r>
+              <a:rPr sz="1500" b="0">
+                <a:solidFill>
+                  <a:srgbClr val="6B6963"/>
+                </a:solidFill>
+                <a:latin typeface="Aptos"/>
+              </a:rPr>
+              <a:t>About </a:t>
+            </a:r>
+            <a:r>
               <a:rPr sz="1500" b="1">
                 <a:solidFill>
-                  <a:srgbClr val="1C66C2"/>
-                </a:solidFill>
-                <a:latin typeface="Aptos"/>
-              </a:rPr>
-              <a:t>ON PAPER, NOW</a:t>
-            </a:r>
-          </a:p>
-          <a:p>
-            <a:pPr algn="l">
-              <a:lnSpc>
-                <a:spcPct val="108000"/>
-              </a:lnSpc>
-              <a:spcAft>
-                <a:spcPts val="0"/>
-              </a:spcAft>
-            </a:pPr>
-            <a:r>
-              <a:rPr sz="2400" b="0">
-                <a:solidFill>
-                  <a:srgbClr val="0B0B0B"/>
-                </a:solidFill>
-                <a:latin typeface="Aptos"/>
-              </a:rPr>
-              <a:t/>
-            </a:r>
-          </a:p>
-          <a:p>
-            <a:pPr algn="l">
-              <a:lnSpc>
-                <a:spcPct val="108000"/>
-              </a:lnSpc>
-              <a:spcAft>
-                <a:spcPts val="0"/>
-              </a:spcAft>
-            </a:pPr>
-            <a:r>
-              <a:rPr sz="4000" b="1">
-                <a:solidFill>
-                  <a:srgbClr val="0B0B0B"/>
-                </a:solidFill>
-                <a:latin typeface="Aptos Display"/>
-              </a:rPr>
-              <a:t>Most?</a:t>
-            </a:r>
-          </a:p>
-          <a:p>
-            <a:pPr algn="l">
-              <a:lnSpc>
-                <a:spcPct val="108000"/>
-              </a:lnSpc>
-              <a:spcAft>
-                <a:spcPts val="0"/>
-              </a:spcAft>
-            </a:pPr>
-            <a:r>
-              <a:rPr sz="4000" b="1">
-                <a:solidFill>
-                  <a:srgbClr val="0B0B0B"/>
-                </a:solidFill>
-                <a:latin typeface="Aptos Display"/>
-              </a:rPr>
-              <a:t>Least?</a:t>
-            </a:r>
-          </a:p>
-          <a:p>
-            <a:pPr algn="l">
-              <a:lnSpc>
-                <a:spcPct val="108000"/>
-              </a:lnSpc>
-              <a:spcAft>
-                <a:spcPts val="0"/>
-              </a:spcAft>
-            </a:pPr>
-            <a:r>
-              <a:rPr sz="2400" b="0">
-                <a:solidFill>
-                  <a:srgbClr val="0B0B0B"/>
-                </a:solidFill>
-                <a:latin typeface="Aptos"/>
-              </a:rPr>
-              <a:t/>
-            </a:r>
-          </a:p>
-          <a:p>
-            <a:pPr algn="l">
-              <a:lnSpc>
-                <a:spcPct val="108000"/>
-              </a:lnSpc>
-              <a:spcAft>
-                <a:spcPts val="0"/>
-              </a:spcAft>
-            </a:pPr>
-            <a:r>
-              <a:rPr sz="1800" b="0">
-                <a:solidFill>
-                  <a:srgbClr val="3C3B38"/>
-                </a:solidFill>
-                <a:latin typeface="Aptos"/>
-              </a:rPr>
-              <a:t>90 seconds. Then run:</a:t>
-            </a:r>
-          </a:p>
-        </p:txBody>
-      </p:sp>
-      <p:sp>
-        <p:nvSpPr>
-          <p:cNvPr id="12" name="TextBox 11"/>
+                  <a:srgbClr val="6B6963"/>
+                </a:solidFill>
+                <a:latin typeface="Aptos"/>
+              </a:rPr>
+              <a:t>$1.02</a:t>
+            </a:r>
+            <a:r>
+              <a:rPr sz="1500" b="0">
+                <a:solidFill>
+                  <a:srgbClr val="6B6963"/>
+                </a:solidFill>
+                <a:latin typeface="Aptos"/>
+              </a:rPr>
+              <a:t> a session and about </a:t>
+            </a:r>
+            <a:r>
+              <a:rPr sz="1500" b="1">
+                <a:solidFill>
+                  <a:srgbClr val="6B6963"/>
+                </a:solidFill>
+                <a:latin typeface="Aptos"/>
+              </a:rPr>
+              <a:t>$307,000</a:t>
+            </a:r>
+            <a:r>
+              <a:rPr sz="1500" b="0">
+                <a:solidFill>
+                  <a:srgbClr val="6B6963"/>
+                </a:solidFill>
+                <a:latin typeface="Aptos"/>
+              </a:rPr>
+              <a:t> a month at 10,000 sessions a day, 30 days. Assumed $3.00 per million input tokens.</a:t>
+            </a:r>
+          </a:p>
+        </p:txBody>
+      </p:sp>
+      <p:sp>
+        <p:nvSpPr>
+          <p:cNvPr id="14" name="TextBox 13"/>
           <p:cNvSpPr txBox="1"/>
           <p:nvPr/>
         </p:nvSpPr>
         <p:spPr>
           <a:xfrm>
-            <a:off x="8229600" y="5349240"/>
-            <a:ext cx="3108960" cy="457200"/>
+            <a:off x="685800" y="6473952"/>
+            <a:ext cx="5486400" cy="274320"/>
           </a:xfrm>
           <a:prstGeom prst="rect">
             <a:avLst/>
@@ -6984,27 +8201,27 @@
               </a:spcAft>
             </a:pPr>
             <a:r>
-              <a:rPr sz="1900" b="1">
-                <a:solidFill>
-                  <a:srgbClr val="1C66C2"/>
-                </a:solidFill>
-                <a:latin typeface="Consolas"/>
-              </a:rPr>
-              <a:t>python3 ex3_budget.py</a:t>
-            </a:r>
-          </a:p>
-        </p:txBody>
-      </p:sp>
-      <p:sp>
-        <p:nvSpPr>
-          <p:cNvPr id="13" name="TextBox 12"/>
+              <a:rPr sz="1100" b="0">
+                <a:solidFill>
+                  <a:srgbClr val="6B6963"/>
+                </a:solidFill>
+                <a:latin typeface="Aptos"/>
+              </a:rPr>
+              <a:t>Saving the Tokens  ·  Shyamji Tiwari</a:t>
+            </a:r>
+          </a:p>
+        </p:txBody>
+      </p:sp>
+      <p:sp>
+        <p:nvSpPr>
+          <p:cNvPr id="15" name="TextBox 14"/>
           <p:cNvSpPr txBox="1"/>
           <p:nvPr/>
         </p:nvSpPr>
         <p:spPr>
           <a:xfrm>
-            <a:off x="685800" y="6473952"/>
-            <a:ext cx="5486400" cy="274320"/>
+            <a:off x="5760720" y="6473952"/>
+            <a:ext cx="5745175" cy="274320"/>
           </a:xfrm>
           <a:prstGeom prst="rect">
             <a:avLst/>
@@ -7017,7 +8234,7 @@
           </a:bodyPr>
           <a:lstStyle/>
           <a:p>
-            <a:pPr algn="l">
+            <a:pPr algn="r">
               <a:lnSpc>
                 <a:spcPct val="108000"/>
               </a:lnSpc>
@@ -7032,673 +8249,7 @@
                 </a:solidFill>
                 <a:latin typeface="Aptos"/>
               </a:rPr>
-              <a:t>Saving the Tokens  ·  Shyamji Tiwari</a:t>
-            </a:r>
-          </a:p>
-        </p:txBody>
-      </p:sp>
-    </p:spTree>
-  </p:cSld>
-  <p:clrMapOvr>
-    <a:masterClrMapping/>
-  </p:clrMapOvr>
-</p:sld>
-</file>
-
-<file path=ppt/slides/slide16.xml><?xml version="1.0" encoding="utf-8"?>
-<p:sld xmlns:a="http://schemas.openxmlformats.org/drawingml/2006/main" xmlns:p="http://schemas.openxmlformats.org/presentationml/2006/main" xmlns:r="http://schemas.openxmlformats.org/officeDocument/2006/relationships">
-  <p:cSld>
-    <p:bg>
-      <p:bgPr>
-        <a:solidFill>
-          <a:srgbClr val="121212"/>
-        </a:solidFill>
-        <a:effectLst/>
-      </p:bgPr>
-    </p:bg>
-    <p:spTree>
-      <p:nvGrpSpPr>
-        <p:cNvPr id="1" name=""/>
-        <p:cNvGrpSpPr/>
-        <p:nvPr/>
-      </p:nvGrpSpPr>
-      <p:grpSpPr/>
-      <p:sp>
-        <p:nvSpPr>
-          <p:cNvPr id="2" name="TextBox 1"/>
-          <p:cNvSpPr txBox="1"/>
-          <p:nvPr/>
-        </p:nvSpPr>
-        <p:spPr>
-          <a:xfrm>
-            <a:off x="685800" y="457200"/>
-            <a:ext cx="5486400" cy="320040"/>
-          </a:xfrm>
-          <a:prstGeom prst="rect">
-            <a:avLst/>
-          </a:prstGeom>
-          <a:noFill/>
-        </p:spPr>
-        <p:txBody>
-          <a:bodyPr wrap="square" lIns="0" rIns="0" tIns="0" bIns="0" anchor="t">
-            <a:spAutoFit/>
-          </a:bodyPr>
-          <a:lstStyle/>
-          <a:p>
-            <a:pPr algn="l">
-              <a:lnSpc>
-                <a:spcPct val="108000"/>
-              </a:lnSpc>
-              <a:spcAft>
-                <a:spcPts val="0"/>
-              </a:spcAft>
-            </a:pPr>
-            <a:r>
-              <a:rPr sz="1400" b="1">
-                <a:solidFill>
-                  <a:srgbClr val="B5B2AA"/>
-                </a:solidFill>
-                <a:latin typeface="Aptos"/>
-              </a:rPr>
-              <a:t>EXERCISE 3 · THE ANSWER</a:t>
-            </a:r>
-          </a:p>
-        </p:txBody>
-      </p:sp>
-      <p:sp>
-        <p:nvSpPr>
-          <p:cNvPr id="3" name="Rounded Rectangle 2"/>
-          <p:cNvSpPr/>
-          <p:nvPr/>
-        </p:nvSpPr>
-        <p:spPr>
-          <a:xfrm>
-            <a:off x="10262311" y="548640"/>
-            <a:ext cx="256032" cy="64008"/>
-          </a:xfrm>
-          <a:prstGeom prst="roundRect">
-            <a:avLst>
-              <a:gd name="adj" fmla="val 50000"/>
-            </a:avLst>
-          </a:prstGeom>
-          <a:solidFill>
-            <a:srgbClr val="3A3A38"/>
-          </a:solidFill>
-          <a:ln>
-            <a:noFill/>
-          </a:ln>
-          <a:effectLst/>
-        </p:spPr>
-        <p:style>
-          <a:lnRef idx="1">
-            <a:schemeClr val="accent1"/>
-          </a:lnRef>
-          <a:fillRef idx="3">
-            <a:schemeClr val="accent1"/>
-          </a:fillRef>
-          <a:effectRef idx="2">
-            <a:schemeClr val="accent1"/>
-          </a:effectRef>
-          <a:fontRef idx="minor">
-            <a:schemeClr val="lt1"/>
-          </a:fontRef>
-        </p:style>
-        <p:txBody>
-          <a:bodyPr rtlCol="0" anchor="ctr"/>
-          <a:lstStyle/>
-          <a:p>
-            <a:pPr algn="ctr"/>
-          </a:p>
-        </p:txBody>
-      </p:sp>
-      <p:sp>
-        <p:nvSpPr>
-          <p:cNvPr id="4" name="Rounded Rectangle 3"/>
-          <p:cNvSpPr/>
-          <p:nvPr/>
-        </p:nvSpPr>
-        <p:spPr>
-          <a:xfrm>
-            <a:off x="10591495" y="548640"/>
-            <a:ext cx="256032" cy="64008"/>
-          </a:xfrm>
-          <a:prstGeom prst="roundRect">
-            <a:avLst>
-              <a:gd name="adj" fmla="val 50000"/>
-            </a:avLst>
-          </a:prstGeom>
-          <a:solidFill>
-            <a:srgbClr val="3A3A38"/>
-          </a:solidFill>
-          <a:ln>
-            <a:noFill/>
-          </a:ln>
-          <a:effectLst/>
-        </p:spPr>
-        <p:style>
-          <a:lnRef idx="1">
-            <a:schemeClr val="accent1"/>
-          </a:lnRef>
-          <a:fillRef idx="3">
-            <a:schemeClr val="accent1"/>
-          </a:fillRef>
-          <a:effectRef idx="2">
-            <a:schemeClr val="accent1"/>
-          </a:effectRef>
-          <a:fontRef idx="minor">
-            <a:schemeClr val="lt1"/>
-          </a:fontRef>
-        </p:style>
-        <p:txBody>
-          <a:bodyPr rtlCol="0" anchor="ctr"/>
-          <a:lstStyle/>
-          <a:p>
-            <a:pPr algn="ctr"/>
-          </a:p>
-        </p:txBody>
-      </p:sp>
-      <p:sp>
-        <p:nvSpPr>
-          <p:cNvPr id="5" name="Rounded Rectangle 4"/>
-          <p:cNvSpPr/>
-          <p:nvPr/>
-        </p:nvSpPr>
-        <p:spPr>
-          <a:xfrm>
-            <a:off x="10920679" y="548640"/>
-            <a:ext cx="256032" cy="64008"/>
-          </a:xfrm>
-          <a:prstGeom prst="roundRect">
-            <a:avLst>
-              <a:gd name="adj" fmla="val 50000"/>
-            </a:avLst>
-          </a:prstGeom>
-          <a:solidFill>
-            <a:srgbClr val="3A3A38"/>
-          </a:solidFill>
-          <a:ln>
-            <a:noFill/>
-          </a:ln>
-          <a:effectLst/>
-        </p:spPr>
-        <p:style>
-          <a:lnRef idx="1">
-            <a:schemeClr val="accent1"/>
-          </a:lnRef>
-          <a:fillRef idx="3">
-            <a:schemeClr val="accent1"/>
-          </a:fillRef>
-          <a:effectRef idx="2">
-            <a:schemeClr val="accent1"/>
-          </a:effectRef>
-          <a:fontRef idx="minor">
-            <a:schemeClr val="lt1"/>
-          </a:fontRef>
-        </p:style>
-        <p:txBody>
-          <a:bodyPr rtlCol="0" anchor="ctr"/>
-          <a:lstStyle/>
-          <a:p>
-            <a:pPr algn="ctr"/>
-          </a:p>
-        </p:txBody>
-      </p:sp>
-      <p:sp>
-        <p:nvSpPr>
-          <p:cNvPr id="6" name="Rounded Rectangle 5"/>
-          <p:cNvSpPr/>
-          <p:nvPr/>
-        </p:nvSpPr>
-        <p:spPr>
-          <a:xfrm>
-            <a:off x="11249863" y="548640"/>
-            <a:ext cx="256032" cy="64008"/>
-          </a:xfrm>
-          <a:prstGeom prst="roundRect">
-            <a:avLst>
-              <a:gd name="adj" fmla="val 50000"/>
-            </a:avLst>
-          </a:prstGeom>
-          <a:solidFill>
-            <a:srgbClr val="5AA3F0"/>
-          </a:solidFill>
-          <a:ln>
-            <a:noFill/>
-          </a:ln>
-          <a:effectLst/>
-        </p:spPr>
-        <p:style>
-          <a:lnRef idx="1">
-            <a:schemeClr val="accent1"/>
-          </a:lnRef>
-          <a:fillRef idx="3">
-            <a:schemeClr val="accent1"/>
-          </a:fillRef>
-          <a:effectRef idx="2">
-            <a:schemeClr val="accent1"/>
-          </a:effectRef>
-          <a:fontRef idx="minor">
-            <a:schemeClr val="lt1"/>
-          </a:fontRef>
-        </p:style>
-        <p:txBody>
-          <a:bodyPr rtlCol="0" anchor="ctr"/>
-          <a:lstStyle/>
-          <a:p>
-            <a:pPr algn="ctr"/>
-          </a:p>
-        </p:txBody>
-      </p:sp>
-      <p:sp>
-        <p:nvSpPr>
-          <p:cNvPr id="7" name="TextBox 6"/>
-          <p:cNvSpPr txBox="1"/>
-          <p:nvPr/>
-        </p:nvSpPr>
-        <p:spPr>
-          <a:xfrm>
-            <a:off x="685800" y="841248"/>
-            <a:ext cx="10820095" cy="914400"/>
-          </a:xfrm>
-          <a:prstGeom prst="rect">
-            <a:avLst/>
-          </a:prstGeom>
-          <a:noFill/>
-        </p:spPr>
-        <p:txBody>
-          <a:bodyPr wrap="square" lIns="0" rIns="0" tIns="0" bIns="0" anchor="t">
-            <a:spAutoFit/>
-          </a:bodyPr>
-          <a:lstStyle/>
-          <a:p>
-            <a:pPr algn="l">
-              <a:lnSpc>
-                <a:spcPct val="95000"/>
-              </a:lnSpc>
-              <a:spcAft>
-                <a:spcPts val="0"/>
-              </a:spcAft>
-            </a:pPr>
-            <a:r>
-              <a:rPr sz="4000" b="1">
-                <a:solidFill>
-                  <a:srgbClr val="FFFFFF"/>
-                </a:solidFill>
-                <a:latin typeface="Aptos Display"/>
-              </a:rPr>
-              <a:t>Ranked by what it actually saves</a:t>
-            </a:r>
-          </a:p>
-        </p:txBody>
-      </p:sp>
-      <p:sp>
-        <p:nvSpPr>
-          <p:cNvPr id="8" name="TextBox 7"/>
-          <p:cNvSpPr txBox="1"/>
-          <p:nvPr/>
-        </p:nvSpPr>
-        <p:spPr>
-          <a:xfrm>
-            <a:off x="685800" y="1325880"/>
-            <a:ext cx="10789920" cy="320040"/>
-          </a:xfrm>
-          <a:prstGeom prst="rect">
-            <a:avLst/>
-          </a:prstGeom>
-          <a:noFill/>
-        </p:spPr>
-        <p:txBody>
-          <a:bodyPr wrap="square" lIns="0" rIns="0" tIns="0" bIns="0" anchor="t">
-            <a:spAutoFit/>
-          </a:bodyPr>
-          <a:lstStyle/>
-          <a:p>
-            <a:pPr algn="l">
-              <a:lnSpc>
-                <a:spcPct val="108000"/>
-              </a:lnSpc>
-              <a:spcAft>
-                <a:spcPts val="0"/>
-              </a:spcAft>
-            </a:pPr>
-            <a:r>
-              <a:rPr sz="1500" b="0">
-                <a:solidFill>
-                  <a:srgbClr val="B5B2AA"/>
-                </a:solidFill>
-                <a:latin typeface="Aptos"/>
-              </a:rPr>
-              <a:t>With a 400-token prompt. At 4,000 tokens the prompt fix saves 12% (slide 18).</a:t>
-            </a:r>
-          </a:p>
-        </p:txBody>
-      </p:sp>
-      <p:pic>
-        <p:nvPicPr>
-          <p:cNvPr id="9" name="Picture 8" descr="leaderboard_dark.png"/>
-          <p:cNvPicPr>
-            <a:picLocks noChangeAspect="1"/>
-          </p:cNvPicPr>
-          <p:nvPr/>
-        </p:nvPicPr>
-        <p:blipFill>
-          <a:blip r:embed="rId2"/>
-          <a:stretch>
-            <a:fillRect/>
-          </a:stretch>
-        </p:blipFill>
-        <p:spPr>
-          <a:xfrm>
-            <a:off x="411480" y="1463040"/>
-            <a:ext cx="11247120" cy="4686300"/>
-          </a:xfrm>
-          <a:prstGeom prst="rect">
-            <a:avLst/>
-          </a:prstGeom>
-        </p:spPr>
-      </p:pic>
-      <p:sp>
-        <p:nvSpPr>
-          <p:cNvPr id="10" name="Rounded Rectangle 9"/>
-          <p:cNvSpPr/>
-          <p:nvPr/>
-        </p:nvSpPr>
-        <p:spPr>
-          <a:xfrm>
-            <a:off x="685800" y="6336792"/>
-            <a:ext cx="182880" cy="182880"/>
-          </a:xfrm>
-          <a:prstGeom prst="roundRect">
-            <a:avLst>
-              <a:gd name="adj" fmla="val 20000"/>
-            </a:avLst>
-          </a:prstGeom>
-          <a:solidFill>
-            <a:srgbClr val="5AA3F0"/>
-          </a:solidFill>
-          <a:ln>
-            <a:noFill/>
-          </a:ln>
-          <a:effectLst/>
-        </p:spPr>
-        <p:style>
-          <a:lnRef idx="1">
-            <a:schemeClr val="accent1"/>
-          </a:lnRef>
-          <a:fillRef idx="3">
-            <a:schemeClr val="accent1"/>
-          </a:fillRef>
-          <a:effectRef idx="2">
-            <a:schemeClr val="accent1"/>
-          </a:effectRef>
-          <a:fontRef idx="minor">
-            <a:schemeClr val="lt1"/>
-          </a:fontRef>
-        </p:style>
-        <p:txBody>
-          <a:bodyPr rtlCol="0" anchor="ctr"/>
-          <a:lstStyle/>
-          <a:p>
-            <a:pPr algn="ctr"/>
-          </a:p>
-        </p:txBody>
-      </p:sp>
-      <p:sp>
-        <p:nvSpPr>
-          <p:cNvPr id="11" name="TextBox 10"/>
-          <p:cNvSpPr txBox="1"/>
-          <p:nvPr/>
-        </p:nvSpPr>
-        <p:spPr>
-          <a:xfrm>
-            <a:off x="996696" y="6254496"/>
-            <a:ext cx="2560320" cy="320040"/>
-          </a:xfrm>
-          <a:prstGeom prst="rect">
-            <a:avLst/>
-          </a:prstGeom>
-          <a:noFill/>
-        </p:spPr>
-        <p:txBody>
-          <a:bodyPr wrap="square" lIns="0" rIns="0" tIns="0" bIns="0" anchor="t">
-            <a:spAutoFit/>
-          </a:bodyPr>
-          <a:lstStyle/>
-          <a:p>
-            <a:pPr algn="l">
-              <a:lnSpc>
-                <a:spcPct val="108000"/>
-              </a:lnSpc>
-              <a:spcAft>
-                <a:spcPts val="0"/>
-              </a:spcAft>
-            </a:pPr>
-            <a:r>
-              <a:rPr sz="1700" b="0">
-                <a:solidFill>
-                  <a:srgbClr val="D7D5CE"/>
-                </a:solidFill>
-                <a:latin typeface="Aptos"/>
-              </a:rPr>
-              <a:t>Make it smaller</a:t>
-            </a:r>
-          </a:p>
-        </p:txBody>
-      </p:sp>
-      <p:sp>
-        <p:nvSpPr>
-          <p:cNvPr id="12" name="Rounded Rectangle 11"/>
-          <p:cNvSpPr/>
-          <p:nvPr/>
-        </p:nvSpPr>
-        <p:spPr>
-          <a:xfrm>
-            <a:off x="3291840" y="6336792"/>
-            <a:ext cx="182880" cy="182880"/>
-          </a:xfrm>
-          <a:prstGeom prst="roundRect">
-            <a:avLst>
-              <a:gd name="adj" fmla="val 20000"/>
-            </a:avLst>
-          </a:prstGeom>
-          <a:solidFill>
-            <a:srgbClr val="F0834E"/>
-          </a:solidFill>
-          <a:ln>
-            <a:noFill/>
-          </a:ln>
-          <a:effectLst/>
-        </p:spPr>
-        <p:style>
-          <a:lnRef idx="1">
-            <a:schemeClr val="accent1"/>
-          </a:lnRef>
-          <a:fillRef idx="3">
-            <a:schemeClr val="accent1"/>
-          </a:fillRef>
-          <a:effectRef idx="2">
-            <a:schemeClr val="accent1"/>
-          </a:effectRef>
-          <a:fontRef idx="minor">
-            <a:schemeClr val="lt1"/>
-          </a:fontRef>
-        </p:style>
-        <p:txBody>
-          <a:bodyPr rtlCol="0" anchor="ctr"/>
-          <a:lstStyle/>
-          <a:p>
-            <a:pPr algn="ctr"/>
-          </a:p>
-        </p:txBody>
-      </p:sp>
-      <p:sp>
-        <p:nvSpPr>
-          <p:cNvPr id="13" name="TextBox 12"/>
-          <p:cNvSpPr txBox="1"/>
-          <p:nvPr/>
-        </p:nvSpPr>
-        <p:spPr>
-          <a:xfrm>
-            <a:off x="3602736" y="6254496"/>
-            <a:ext cx="2560320" cy="320040"/>
-          </a:xfrm>
-          <a:prstGeom prst="rect">
-            <a:avLst/>
-          </a:prstGeom>
-          <a:noFill/>
-        </p:spPr>
-        <p:txBody>
-          <a:bodyPr wrap="square" lIns="0" rIns="0" tIns="0" bIns="0" anchor="t">
-            <a:spAutoFit/>
-          </a:bodyPr>
-          <a:lstStyle/>
-          <a:p>
-            <a:pPr algn="l">
-              <a:lnSpc>
-                <a:spcPct val="108000"/>
-              </a:lnSpc>
-              <a:spcAft>
-                <a:spcPts val="0"/>
-              </a:spcAft>
-            </a:pPr>
-            <a:r>
-              <a:rPr sz="1700" b="0">
-                <a:solidFill>
-                  <a:srgbClr val="D7D5CE"/>
-                </a:solidFill>
-                <a:latin typeface="Aptos"/>
-              </a:rPr>
-              <a:t>Send it again less</a:t>
-            </a:r>
-          </a:p>
-        </p:txBody>
-      </p:sp>
-      <p:sp>
-        <p:nvSpPr>
-          <p:cNvPr id="14" name="Rounded Rectangle 13"/>
-          <p:cNvSpPr/>
-          <p:nvPr/>
-        </p:nvSpPr>
-        <p:spPr>
-          <a:xfrm>
-            <a:off x="5897880" y="6336792"/>
-            <a:ext cx="182880" cy="182880"/>
-          </a:xfrm>
-          <a:prstGeom prst="roundRect">
-            <a:avLst>
-              <a:gd name="adj" fmla="val 20000"/>
-            </a:avLst>
-          </a:prstGeom>
-          <a:solidFill>
-            <a:srgbClr val="9A978F"/>
-          </a:solidFill>
-          <a:ln>
-            <a:noFill/>
-          </a:ln>
-          <a:effectLst/>
-        </p:spPr>
-        <p:style>
-          <a:lnRef idx="1">
-            <a:schemeClr val="accent1"/>
-          </a:lnRef>
-          <a:fillRef idx="3">
-            <a:schemeClr val="accent1"/>
-          </a:fillRef>
-          <a:effectRef idx="2">
-            <a:schemeClr val="accent1"/>
-          </a:effectRef>
-          <a:fontRef idx="minor">
-            <a:schemeClr val="lt1"/>
-          </a:fontRef>
-        </p:style>
-        <p:txBody>
-          <a:bodyPr rtlCol="0" anchor="ctr"/>
-          <a:lstStyle/>
-          <a:p>
-            <a:pPr algn="ctr"/>
-          </a:p>
-        </p:txBody>
-      </p:sp>
-      <p:sp>
-        <p:nvSpPr>
-          <p:cNvPr id="15" name="TextBox 14"/>
-          <p:cNvSpPr txBox="1"/>
-          <p:nvPr/>
-        </p:nvSpPr>
-        <p:spPr>
-          <a:xfrm>
-            <a:off x="6208776" y="6254496"/>
-            <a:ext cx="2560320" cy="320040"/>
-          </a:xfrm>
-          <a:prstGeom prst="rect">
-            <a:avLst/>
-          </a:prstGeom>
-          <a:noFill/>
-        </p:spPr>
-        <p:txBody>
-          <a:bodyPr wrap="square" lIns="0" rIns="0" tIns="0" bIns="0" anchor="t">
-            <a:spAutoFit/>
-          </a:bodyPr>
-          <a:lstStyle/>
-          <a:p>
-            <a:pPr algn="l">
-              <a:lnSpc>
-                <a:spcPct val="108000"/>
-              </a:lnSpc>
-              <a:spcAft>
-                <a:spcPts val="0"/>
-              </a:spcAft>
-            </a:pPr>
-            <a:r>
-              <a:rPr sz="1700" b="0">
-                <a:solidFill>
-                  <a:srgbClr val="D7D5CE"/>
-                </a:solidFill>
-                <a:latin typeface="Aptos"/>
-              </a:rPr>
-              <a:t>Not a design change</a:t>
-            </a:r>
-          </a:p>
-        </p:txBody>
-      </p:sp>
-      <p:sp>
-        <p:nvSpPr>
-          <p:cNvPr id="16" name="TextBox 15"/>
-          <p:cNvSpPr txBox="1"/>
-          <p:nvPr/>
-        </p:nvSpPr>
-        <p:spPr>
-          <a:xfrm>
-            <a:off x="8321040" y="6254496"/>
-            <a:ext cx="3200400" cy="320040"/>
-          </a:xfrm>
-          <a:prstGeom prst="rect">
-            <a:avLst/>
-          </a:prstGeom>
-          <a:noFill/>
-        </p:spPr>
-        <p:txBody>
-          <a:bodyPr wrap="square" lIns="0" rIns="0" tIns="0" bIns="0" anchor="t">
-            <a:spAutoFit/>
-          </a:bodyPr>
-          <a:lstStyle/>
-          <a:p>
-            <a:pPr algn="r">
-              <a:lnSpc>
-                <a:spcPct val="108000"/>
-              </a:lnSpc>
-              <a:spcAft>
-                <a:spcPts val="0"/>
-              </a:spcAft>
-            </a:pPr>
-            <a:r>
-              <a:rPr sz="1700" b="0">
-                <a:solidFill>
-                  <a:srgbClr val="D7D5CE"/>
-                </a:solidFill>
-                <a:latin typeface="Aptos"/>
-              </a:rPr>
-              <a:t>best 70%  ·  worst 1.5%</a:t>
+              <a:t>Simulated 20-turn session · illustrative settings · input tokens only</a:t>
             </a:r>
           </a:p>
         </p:txBody>
@@ -7957,7 +8508,64 @@
       </p:sp>
       <p:sp>
         <p:nvSpPr>
-          <p:cNvPr id="7" name="TextBox 6"/>
+          <p:cNvPr id="7" name="Rounded Rectangle 6"/>
+          <p:cNvSpPr/>
+          <p:nvPr/>
+        </p:nvSpPr>
+        <p:spPr>
+          <a:xfrm>
+            <a:off x="8387791" y="429768"/>
+            <a:ext cx="1600200" cy="310896"/>
+          </a:xfrm>
+          <a:prstGeom prst="roundRect">
+            <a:avLst>
+              <a:gd name="adj" fmla="val 50000"/>
+            </a:avLst>
+          </a:prstGeom>
+          <a:solidFill>
+            <a:srgbClr val="FFFFFF"/>
+          </a:solidFill>
+          <a:ln w="15875">
+            <a:solidFill>
+              <a:srgbClr val="6B6963"/>
+            </a:solidFill>
+          </a:ln>
+          <a:effectLst/>
+        </p:spPr>
+        <p:style>
+          <a:lnRef idx="1">
+            <a:schemeClr val="accent1"/>
+          </a:lnRef>
+          <a:fillRef idx="3">
+            <a:schemeClr val="accent1"/>
+          </a:fillRef>
+          <a:effectRef idx="2">
+            <a:schemeClr val="accent1"/>
+          </a:effectRef>
+          <a:fontRef idx="minor">
+            <a:schemeClr val="lt1"/>
+          </a:fontRef>
+        </p:style>
+        <p:txBody>
+          <a:bodyPr rtlCol="0" anchor="ctr" lIns="0" rIns="0" tIns="0" bIns="0"/>
+          <a:lstStyle/>
+          <a:p>
+            <a:pPr algn="ctr"/>
+            <a:r>
+              <a:rPr sz="1200" b="1">
+                <a:solidFill>
+                  <a:srgbClr val="3C3B38"/>
+                </a:solidFill>
+                <a:latin typeface="Aptos"/>
+              </a:rPr>
+              <a:t>EXAMPLE MODEL</a:t>
+            </a:r>
+          </a:p>
+        </p:txBody>
+      </p:sp>
+      <p:sp>
+        <p:nvSpPr>
+          <p:cNvPr id="8" name="TextBox 7"/>
           <p:cNvSpPr txBox="1"/>
           <p:nvPr/>
         </p:nvSpPr>
@@ -7986,20 +8594,20 @@
               </a:spcAft>
             </a:pPr>
             <a:r>
-              <a:rPr sz="4000" b="1">
+              <a:rPr sz="3400" b="1">
                 <a:solidFill>
                   <a:srgbClr val="0B0B0B"/>
                 </a:solidFill>
                 <a:latin typeface="Aptos Display"/>
               </a:rPr>
-              <a:t>Run it on a different agent. The ranking flips.</a:t>
-            </a:r>
-          </a:p>
-        </p:txBody>
-      </p:sp>
-      <p:sp>
-        <p:nvSpPr>
-          <p:cNvPr id="8" name="TextBox 7"/>
+              <a:t>No pictures: now the prompt is the big item</a:t>
+            </a:r>
+          </a:p>
+        </p:txBody>
+      </p:sp>
+      <p:sp>
+        <p:nvSpPr>
+          <p:cNvPr id="9" name="TextBox 8"/>
           <p:cNvSpPr txBox="1"/>
           <p:nvPr/>
         </p:nvSpPr>
@@ -8034,14 +8642,14 @@
                 </a:solidFill>
                 <a:latin typeface="Aptos"/>
               </a:rPr>
-              <a:t>Same ten fixes. A chat agent: 6,000-token system prompt, no pictures</a:t>
+              <a:t>Chat agent bill: prompt 55%, replies 35%, messages 10%. Six of the ten fixes do not apply.</a:t>
             </a:r>
           </a:p>
         </p:txBody>
       </p:sp>
       <p:pic>
         <p:nvPicPr>
-          <p:cNvPr id="9" name="Picture 8" descr="flip.png"/>
+          <p:cNvPr id="10" name="Picture 9" descr="flip.png"/>
           <p:cNvPicPr>
             <a:picLocks noChangeAspect="1"/>
           </p:cNvPicPr>
@@ -8065,14 +8673,14 @@
       </p:pic>
       <p:sp>
         <p:nvSpPr>
-          <p:cNvPr id="10" name="TextBox 9"/>
+          <p:cNvPr id="11" name="TextBox 10"/>
           <p:cNvSpPr txBox="1"/>
           <p:nvPr/>
         </p:nvSpPr>
         <p:spPr>
           <a:xfrm>
             <a:off x="685800" y="5760720"/>
-            <a:ext cx="6035040" cy="457200"/>
+            <a:ext cx="6949440" cy="640080"/>
           </a:xfrm>
           <a:prstGeom prst="rect">
             <a:avLst/>
@@ -8094,63 +8702,36 @@
               </a:spcAft>
             </a:pPr>
             <a:r>
-              <a:rPr sz="2000" b="0">
+              <a:rPr sz="1500" b="1">
                 <a:solidFill>
                   <a:srgbClr val="3C3B38"/>
                 </a:solidFill>
                 <a:latin typeface="Aptos"/>
               </a:rPr>
-              <a:t>Prompt cut: </a:t>
-            </a:r>
-            <a:r>
-              <a:rPr sz="2000" b="1">
+              <a:t>Control: </a:t>
+            </a:r>
+            <a:r>
+              <a:rPr sz="1500" b="0">
                 <a:solidFill>
                   <a:srgbClr val="3C3B38"/>
                 </a:solidFill>
                 <a:latin typeface="Aptos"/>
               </a:rPr>
-              <a:t>last</a:t>
-            </a:r>
-            <a:r>
-              <a:rPr sz="2000" b="0">
-                <a:solidFill>
-                  <a:srgbClr val="3C3B38"/>
-                </a:solidFill>
-                <a:latin typeface="Aptos"/>
-              </a:rPr>
-              <a:t> at 1.5%, then </a:t>
-            </a:r>
-            <a:r>
-              <a:rPr sz="2000" b="1">
-                <a:solidFill>
-                  <a:srgbClr val="1C66C2"/>
-                </a:solidFill>
-                <a:latin typeface="Aptos"/>
-              </a:rPr>
-              <a:t>#2</a:t>
-            </a:r>
-            <a:r>
-              <a:rPr sz="2000" b="0">
-                <a:solidFill>
-                  <a:srgbClr val="3C3B38"/>
-                </a:solidFill>
-                <a:latin typeface="Aptos"/>
-              </a:rPr>
-              <a:t> at 33.2%</a:t>
-            </a:r>
-          </a:p>
-        </p:txBody>
-      </p:sp>
-      <p:sp>
-        <p:nvSpPr>
-          <p:cNvPr id="11" name="TextBox 10"/>
+              <a:t>the screen agent with the same 6,000-token prompt ranks the prompt fix only 6 of 9 design fixes (16%). It takes the pictures being gone, not just a long prompt.</a:t>
+            </a:r>
+          </a:p>
+        </p:txBody>
+      </p:sp>
+      <p:sp>
+        <p:nvSpPr>
+          <p:cNvPr id="12" name="TextBox 11"/>
           <p:cNvSpPr txBox="1"/>
           <p:nvPr/>
         </p:nvSpPr>
         <p:spPr>
           <a:xfrm>
-            <a:off x="6400800" y="5788152"/>
-            <a:ext cx="5120640" cy="457200"/>
+            <a:off x="7315200" y="5669280"/>
+            <a:ext cx="4206240" cy="365760"/>
           </a:xfrm>
           <a:prstGeom prst="rect">
             <a:avLst/>
@@ -8172,27 +8753,27 @@
               </a:spcAft>
             </a:pPr>
             <a:r>
-              <a:rPr sz="1500" b="1">
+              <a:rPr sz="1400" b="1">
                 <a:solidFill>
                   <a:srgbClr val="1C66C2"/>
                 </a:solidFill>
-                <a:latin typeface="Consolas"/>
-              </a:rPr>
-              <a:t>python3 ex3_budget.py --agent both</a:t>
-            </a:r>
-          </a:p>
-        </p:txBody>
-      </p:sp>
-      <p:sp>
-        <p:nvSpPr>
-          <p:cNvPr id="12" name="TextBox 11"/>
+                <a:latin typeface="Aptos"/>
+              </a:rPr>
+              <a:t>Press Play on “Two agents side by side”</a:t>
+            </a:r>
+          </a:p>
+        </p:txBody>
+      </p:sp>
+      <p:sp>
+        <p:nvSpPr>
+          <p:cNvPr id="13" name="TextBox 12"/>
           <p:cNvSpPr txBox="1"/>
           <p:nvPr/>
         </p:nvSpPr>
         <p:spPr>
           <a:xfrm>
-            <a:off x="685800" y="6473952"/>
-            <a:ext cx="5486400" cy="274320"/>
+            <a:off x="7315200" y="5989320"/>
+            <a:ext cx="4206240" cy="365760"/>
           </a:xfrm>
           <a:prstGeom prst="rect">
             <a:avLst/>
@@ -8205,7 +8786,7 @@
           </a:bodyPr>
           <a:lstStyle/>
           <a:p>
-            <a:pPr algn="l">
+            <a:pPr algn="r">
               <a:lnSpc>
                 <a:spcPct val="108000"/>
               </a:lnSpc>
@@ -8218,6 +8799,48 @@
                 <a:solidFill>
                   <a:srgbClr val="6B6963"/>
                 </a:solidFill>
+                <a:latin typeface="Consolas"/>
+              </a:rPr>
+              <a:t>terminal: python3 ex3_budget.py --agent both</a:t>
+            </a:r>
+          </a:p>
+        </p:txBody>
+      </p:sp>
+      <p:sp>
+        <p:nvSpPr>
+          <p:cNvPr id="14" name="TextBox 13"/>
+          <p:cNvSpPr txBox="1"/>
+          <p:nvPr/>
+        </p:nvSpPr>
+        <p:spPr>
+          <a:xfrm>
+            <a:off x="685800" y="6473952"/>
+            <a:ext cx="5486400" cy="274320"/>
+          </a:xfrm>
+          <a:prstGeom prst="rect">
+            <a:avLst/>
+          </a:prstGeom>
+          <a:noFill/>
+        </p:spPr>
+        <p:txBody>
+          <a:bodyPr wrap="square" lIns="0" rIns="0" tIns="0" bIns="0" anchor="t">
+            <a:spAutoFit/>
+          </a:bodyPr>
+          <a:lstStyle/>
+          <a:p>
+            <a:pPr algn="l">
+              <a:lnSpc>
+                <a:spcPct val="108000"/>
+              </a:lnSpc>
+              <a:spcAft>
+                <a:spcPts val="0"/>
+              </a:spcAft>
+            </a:pPr>
+            <a:r>
+              <a:rPr sz="1100" b="0">
+                <a:solidFill>
+                  <a:srgbClr val="6B6963"/>
+                </a:solidFill>
                 <a:latin typeface="Aptos"/>
               </a:rPr>
               <a:t>Saving the Tokens  ·  Shyamji Tiwari</a:t>
@@ -8227,7 +8850,7 @@
       </p:sp>
       <p:sp>
         <p:nvSpPr>
-          <p:cNvPr id="13" name="TextBox 12"/>
+          <p:cNvPr id="15" name="TextBox 14"/>
           <p:cNvSpPr txBox="1"/>
           <p:nvPr/>
         </p:nvSpPr>
@@ -8521,7 +9144,64 @@
       </p:sp>
       <p:sp>
         <p:nvSpPr>
-          <p:cNvPr id="7" name="TextBox 6"/>
+          <p:cNvPr id="7" name="Rounded Rectangle 6"/>
+          <p:cNvSpPr/>
+          <p:nvPr/>
+        </p:nvSpPr>
+        <p:spPr>
+          <a:xfrm>
+            <a:off x="8387791" y="429768"/>
+            <a:ext cx="1600200" cy="310896"/>
+          </a:xfrm>
+          <a:prstGeom prst="roundRect">
+            <a:avLst>
+              <a:gd name="adj" fmla="val 50000"/>
+            </a:avLst>
+          </a:prstGeom>
+          <a:solidFill>
+            <a:srgbClr val="FFFFFF"/>
+          </a:solidFill>
+          <a:ln w="15875">
+            <a:solidFill>
+              <a:srgbClr val="6B6963"/>
+            </a:solidFill>
+          </a:ln>
+          <a:effectLst/>
+        </p:spPr>
+        <p:style>
+          <a:lnRef idx="1">
+            <a:schemeClr val="accent1"/>
+          </a:lnRef>
+          <a:fillRef idx="3">
+            <a:schemeClr val="accent1"/>
+          </a:fillRef>
+          <a:effectRef idx="2">
+            <a:schemeClr val="accent1"/>
+          </a:effectRef>
+          <a:fontRef idx="minor">
+            <a:schemeClr val="lt1"/>
+          </a:fontRef>
+        </p:style>
+        <p:txBody>
+          <a:bodyPr rtlCol="0" anchor="ctr" lIns="0" rIns="0" tIns="0" bIns="0"/>
+          <a:lstStyle/>
+          <a:p>
+            <a:pPr algn="ctr"/>
+            <a:r>
+              <a:rPr sz="1200" b="1">
+                <a:solidFill>
+                  <a:srgbClr val="3C3B38"/>
+                </a:solidFill>
+                <a:latin typeface="Aptos"/>
+              </a:rPr>
+              <a:t>EXAMPLE MODEL</a:t>
+            </a:r>
+          </a:p>
+        </p:txBody>
+      </p:sp>
+      <p:sp>
+        <p:nvSpPr>
+          <p:cNvPr id="8" name="TextBox 7"/>
           <p:cNvSpPr txBox="1"/>
           <p:nvPr/>
         </p:nvSpPr>
@@ -8563,7 +9243,7 @@
       </p:sp>
       <p:sp>
         <p:nvSpPr>
-          <p:cNvPr id="8" name="TextBox 7"/>
+          <p:cNvPr id="9" name="TextBox 8"/>
           <p:cNvSpPr txBox="1"/>
           <p:nvPr/>
         </p:nvSpPr>
@@ -8605,7 +9285,7 @@
       </p:sp>
       <p:pic>
         <p:nvPicPr>
-          <p:cNvPr id="9" name="Picture 8" descr="dumbbell.png"/>
+          <p:cNvPr id="10" name="Picture 9" descr="dumbbell.png"/>
           <p:cNvPicPr>
             <a:picLocks noChangeAspect="1"/>
           </p:cNvPicPr>
@@ -8619,8 +9299,8 @@
         </p:blipFill>
         <p:spPr>
           <a:xfrm>
-            <a:off x="411480" y="1920240"/>
-            <a:ext cx="11247120" cy="4193841"/>
+            <a:off x="731520" y="1874519"/>
+            <a:ext cx="10424160" cy="4063656"/>
           </a:xfrm>
           <a:prstGeom prst="rect">
             <a:avLst/>
@@ -8629,13 +9309,13 @@
       </p:pic>
       <p:sp>
         <p:nvSpPr>
-          <p:cNvPr id="10" name="TextBox 9"/>
+          <p:cNvPr id="11" name="TextBox 10"/>
           <p:cNvSpPr txBox="1"/>
           <p:nvPr/>
         </p:nvSpPr>
         <p:spPr>
           <a:xfrm>
-            <a:off x="685800" y="5897880"/>
+            <a:off x="685800" y="5943600"/>
             <a:ext cx="10789920" cy="457200"/>
           </a:xfrm>
           <a:prstGeom prst="rect">
@@ -8658,29 +9338,29 @@
               </a:spcAft>
             </a:pPr>
             <a:r>
-              <a:rPr sz="2000" b="1">
+              <a:rPr sz="1500" b="1">
                 <a:solidFill>
                   <a:srgbClr val="0B0B0B"/>
                 </a:solidFill>
                 <a:latin typeface="Aptos"/>
               </a:rPr>
-              <a:t>Measure your own setup. </a:t>
-            </a:r>
-            <a:r>
-              <a:rPr sz="2000" b="0">
+              <a:t>Not modelled: </a:t>
+            </a:r>
+            <a:r>
+              <a:rPr sz="1500" b="0">
                 <a:solidFill>
                   <a:srgbClr val="3C3B38"/>
                 </a:solidFill>
                 <a:latin typeface="Aptos"/>
               </a:rPr>
-              <a:t>These settings are illustrative, not any one model's.</a:t>
-            </a:r>
-          </a:p>
-        </p:txBody>
-      </p:sp>
-      <p:sp>
-        <p:nvSpPr>
-          <p:cNvPr id="11" name="TextBox 10"/>
+              <a:t>tool results and schemas · cache write fees and expiry · output tokens in the bill · accuracy</a:t>
+            </a:r>
+          </a:p>
+        </p:txBody>
+      </p:sp>
+      <p:sp>
+        <p:nvSpPr>
+          <p:cNvPr id="12" name="TextBox 11"/>
           <p:cNvSpPr txBox="1"/>
           <p:nvPr/>
         </p:nvSpPr>
@@ -9565,13 +10245,13 @@
               </a:spcAft>
             </a:pPr>
             <a:r>
-              <a:rPr sz="2100" b="1">
+              <a:rPr sz="2200" b="1">
                 <a:solidFill>
                   <a:srgbClr val="FFFFFF"/>
                 </a:solidFill>
                 <a:latin typeface="Aptos"/>
               </a:rPr>
-              <a:t>Your bill = how big each item is  ×  how often you re-send it</a:t>
+              <a:t>Your bill = size  ×  sends  ×  price per send</a:t>
             </a:r>
           </a:p>
           <a:p>
@@ -9584,93 +10264,58 @@
               </a:spcAft>
             </a:pPr>
             <a:r>
-              <a:rPr sz="2100" b="0">
+              <a:rPr sz="2000" b="0">
                 <a:solidFill>
                   <a:srgbClr val="B5B2AA"/>
                 </a:solidFill>
                 <a:latin typeface="Aptos"/>
               </a:rPr>
-              <a:t>Dropping old screenshots saved </a:t>
-            </a:r>
-            <a:r>
-              <a:rPr sz="2100" b="1">
+              <a:t>The best fix changes with:</a:t>
+            </a:r>
+          </a:p>
+          <a:p>
+            <a:pPr algn="l">
+              <a:lnSpc>
+                <a:spcPct val="130000"/>
+              </a:lnSpc>
+              <a:spcAft>
+                <a:spcPts val="0"/>
+              </a:spcAft>
+            </a:pPr>
+            <a:r>
+              <a:rPr sz="2000" b="1">
                 <a:solidFill>
                   <a:srgbClr val="5AA3F0"/>
                 </a:solidFill>
                 <a:latin typeface="Aptos"/>
               </a:rPr>
-              <a:t>70%</a:t>
-            </a:r>
-            <a:r>
-              <a:rPr sz="1700" b="0">
+              <a:t>caching · session length · prompt size · pictures</a:t>
+            </a:r>
+          </a:p>
+          <a:p>
+            <a:pPr algn="l">
+              <a:lnSpc>
+                <a:spcPct val="130000"/>
+              </a:lnSpc>
+              <a:spcAft>
+                <a:spcPts val="0"/>
+              </a:spcAft>
+            </a:pPr>
+            <a:r>
+              <a:rPr sz="1800" b="0">
                 <a:solidFill>
                   <a:srgbClr val="B5B2AA"/>
                 </a:solidFill>
                 <a:latin typeface="Aptos"/>
               </a:rPr>
-              <a:t> (38% with caching)</a:t>
-            </a:r>
-          </a:p>
-          <a:p>
-            <a:pPr algn="l">
-              <a:lnSpc>
-                <a:spcPct val="130000"/>
-              </a:lnSpc>
-              <a:spcAft>
-                <a:spcPts val="0"/>
-              </a:spcAft>
-            </a:pPr>
-            <a:r>
-              <a:rPr sz="2100" b="0">
-                <a:solidFill>
-                  <a:srgbClr val="B5B2AA"/>
-                </a:solidFill>
-                <a:latin typeface="Aptos"/>
-              </a:rPr>
-              <a:t>Cutting the prompt: </a:t>
-            </a:r>
-            <a:r>
-              <a:rPr sz="2100" b="1">
-                <a:solidFill>
-                  <a:srgbClr val="9A978F"/>
-                </a:solidFill>
-                <a:latin typeface="Aptos"/>
-              </a:rPr>
-              <a:t>1.5%</a:t>
-            </a:r>
-            <a:r>
-              <a:rPr sz="2100" b="0">
-                <a:solidFill>
-                  <a:srgbClr val="B5B2AA"/>
-                </a:solidFill>
-                <a:latin typeface="Aptos"/>
-              </a:rPr>
-              <a:t> vs </a:t>
-            </a:r>
-            <a:r>
-              <a:rPr sz="2100" b="1">
-                <a:solidFill>
-                  <a:srgbClr val="5AA3F0"/>
-                </a:solidFill>
-                <a:latin typeface="Aptos"/>
-              </a:rPr>
-              <a:t>33%</a:t>
-            </a:r>
-            <a:r>
-              <a:rPr sz="2100" b="0">
-                <a:solidFill>
-                  <a:srgbClr val="B5B2AA"/>
-                </a:solidFill>
-                <a:latin typeface="Aptos"/>
-              </a:rPr>
-              <a:t> on a chat agent</a:t>
+              <a:t>So measure yours first.</a:t>
             </a:r>
           </a:p>
         </p:txBody>
       </p:sp>
       <p:pic>
         <p:nvPicPr>
-          <p:cNvPr id="21" name="Picture 20" descr="qr_light.png"/>
+          <p:cNvPr id="21" name="Picture 20" descr="qr_dark.png"/>
           <p:cNvPicPr>
             <a:picLocks noChangeAspect="1"/>
           </p:cNvPicPr>
@@ -10148,7 +10793,64 @@
       </p:sp>
       <p:sp>
         <p:nvSpPr>
-          <p:cNvPr id="7" name="TextBox 6"/>
+          <p:cNvPr id="7" name="Rounded Rectangle 6"/>
+          <p:cNvSpPr/>
+          <p:nvPr/>
+        </p:nvSpPr>
+        <p:spPr>
+          <a:xfrm>
+            <a:off x="8387791" y="429768"/>
+            <a:ext cx="1600200" cy="310896"/>
+          </a:xfrm>
+          <a:prstGeom prst="roundRect">
+            <a:avLst>
+              <a:gd name="adj" fmla="val 50000"/>
+            </a:avLst>
+          </a:prstGeom>
+          <a:solidFill>
+            <a:srgbClr val="FFFFFF"/>
+          </a:solidFill>
+          <a:ln w="15875">
+            <a:solidFill>
+              <a:srgbClr val="6B6963"/>
+            </a:solidFill>
+          </a:ln>
+          <a:effectLst/>
+        </p:spPr>
+        <p:style>
+          <a:lnRef idx="1">
+            <a:schemeClr val="accent1"/>
+          </a:lnRef>
+          <a:fillRef idx="3">
+            <a:schemeClr val="accent1"/>
+          </a:fillRef>
+          <a:effectRef idx="2">
+            <a:schemeClr val="accent1"/>
+          </a:effectRef>
+          <a:fontRef idx="minor">
+            <a:schemeClr val="lt1"/>
+          </a:fontRef>
+        </p:style>
+        <p:txBody>
+          <a:bodyPr rtlCol="0" anchor="ctr" lIns="0" rIns="0" tIns="0" bIns="0"/>
+          <a:lstStyle/>
+          <a:p>
+            <a:pPr algn="ctr"/>
+            <a:r>
+              <a:rPr sz="1200" b="1">
+                <a:solidFill>
+                  <a:srgbClr val="3C3B38"/>
+                </a:solidFill>
+                <a:latin typeface="Aptos"/>
+              </a:rPr>
+              <a:t>EXAMPLE MODEL</a:t>
+            </a:r>
+          </a:p>
+        </p:txBody>
+      </p:sp>
+      <p:sp>
+        <p:nvSpPr>
+          <p:cNvPr id="8" name="TextBox 7"/>
           <p:cNvSpPr txBox="1"/>
           <p:nvPr/>
         </p:nvSpPr>
@@ -10183,21 +10885,63 @@
                 </a:solidFill>
                 <a:latin typeface="Aptos Display"/>
               </a:rPr>
-              <a:t>Which costs more to send to your AI agent?</a:t>
-            </a:r>
-          </a:p>
-        </p:txBody>
-      </p:sp>
-      <p:sp>
-        <p:nvSpPr>
-          <p:cNvPr id="8" name="Rounded Rectangle 7"/>
+              <a:t>Which is the bigger part of the bill?</a:t>
+            </a:r>
+          </a:p>
+        </p:txBody>
+      </p:sp>
+      <p:sp>
+        <p:nvSpPr>
+          <p:cNvPr id="9" name="TextBox 8"/>
+          <p:cNvSpPr txBox="1"/>
+          <p:nvPr/>
+        </p:nvSpPr>
+        <p:spPr>
+          <a:xfrm>
+            <a:off x="685800" y="1481328"/>
+            <a:ext cx="10820095" cy="457200"/>
+          </a:xfrm>
+          <a:prstGeom prst="rect">
+            <a:avLst/>
+          </a:prstGeom>
+          <a:noFill/>
+        </p:spPr>
+        <p:txBody>
+          <a:bodyPr wrap="square" lIns="0" rIns="0" tIns="0" bIns="0" anchor="t">
+            <a:spAutoFit/>
+          </a:bodyPr>
+          <a:lstStyle/>
+          <a:p>
+            <a:pPr algn="l">
+              <a:lnSpc>
+                <a:spcPct val="108000"/>
+              </a:lnSpc>
+              <a:spcAft>
+                <a:spcPts val="0"/>
+              </a:spcAft>
+            </a:pPr>
+            <a:r>
+              <a:rPr sz="2000" b="0">
+                <a:solidFill>
+                  <a:srgbClr val="3C3B38"/>
+                </a:solidFill>
+                <a:latin typeface="Aptos"/>
+              </a:rPr>
+              <a:t>A 20-turn session with an AI agent that reads your screen</a:t>
+            </a:r>
+          </a:p>
+        </p:txBody>
+      </p:sp>
+      <p:sp>
+        <p:nvSpPr>
+          <p:cNvPr id="10" name="Rounded Rectangle 9"/>
           <p:cNvSpPr/>
           <p:nvPr/>
         </p:nvSpPr>
         <p:spPr>
           <a:xfrm>
-            <a:off x="685800" y="1783080"/>
-            <a:ext cx="5257800" cy="3886200"/>
+            <a:off x="685800" y="2011680"/>
+            <a:ext cx="5257800" cy="3657600"/>
           </a:xfrm>
           <a:prstGeom prst="roundRect">
             <a:avLst>
@@ -10236,13 +10980,13 @@
       </p:sp>
       <p:sp>
         <p:nvSpPr>
-          <p:cNvPr id="9" name="TextBox 8"/>
+          <p:cNvPr id="11" name="TextBox 10"/>
           <p:cNvSpPr txBox="1"/>
           <p:nvPr/>
         </p:nvSpPr>
         <p:spPr>
           <a:xfrm>
-            <a:off x="1097280" y="1965960"/>
+            <a:off x="1097280" y="2148840"/>
             <a:ext cx="1097280" cy="1097280"/>
           </a:xfrm>
           <a:prstGeom prst="rect">
@@ -10278,7 +11022,7 @@
       </p:sp>
       <p:pic>
         <p:nvPicPr>
-          <p:cNvPr id="10" name="Picture 9" descr="screen_light.png"/>
+          <p:cNvPr id="12" name="Picture 11" descr="screen_light.png"/>
           <p:cNvPicPr>
             <a:picLocks noChangeAspect="1"/>
           </p:cNvPicPr>
@@ -10292,8 +11036,8 @@
         </p:blipFill>
         <p:spPr>
           <a:xfrm>
-            <a:off x="2880360" y="2103120"/>
-            <a:ext cx="2869809" cy="2194560"/>
+            <a:off x="2880360" y="2286000"/>
+            <a:ext cx="2630658" cy="2011680"/>
           </a:xfrm>
           <a:prstGeom prst="rect">
             <a:avLst/>
@@ -10302,7 +11046,7 @@
       </p:pic>
       <p:sp>
         <p:nvSpPr>
-          <p:cNvPr id="11" name="TextBox 10"/>
+          <p:cNvPr id="13" name="TextBox 12"/>
           <p:cNvSpPr txBox="1"/>
           <p:nvPr/>
         </p:nvSpPr>
@@ -10337,14 +11081,14 @@
                 </a:solidFill>
                 <a:latin typeface="Aptos"/>
               </a:rPr>
-              <a:t>One screenshot</a:t>
-            </a:r>
-          </a:p>
-        </p:txBody>
-      </p:sp>
-      <p:sp>
-        <p:nvSpPr>
-          <p:cNvPr id="12" name="TextBox 11"/>
+              <a:t>The screenshots</a:t>
+            </a:r>
+          </a:p>
+        </p:txBody>
+      </p:sp>
+      <p:sp>
+        <p:nvSpPr>
+          <p:cNvPr id="14" name="TextBox 13"/>
           <p:cNvSpPr txBox="1"/>
           <p:nvPr/>
         </p:nvSpPr>
@@ -10379,21 +11123,21 @@
                 </a:solidFill>
                 <a:latin typeface="Aptos"/>
               </a:rPr>
-              <a:t>of your screen</a:t>
-            </a:r>
-          </a:p>
-        </p:txBody>
-      </p:sp>
-      <p:sp>
-        <p:nvSpPr>
-          <p:cNvPr id="13" name="Rounded Rectangle 12"/>
+              <a:t>a new one every turn (~1,200 tokens)</a:t>
+            </a:r>
+          </a:p>
+        </p:txBody>
+      </p:sp>
+      <p:sp>
+        <p:nvSpPr>
+          <p:cNvPr id="15" name="Rounded Rectangle 14"/>
           <p:cNvSpPr/>
           <p:nvPr/>
         </p:nvSpPr>
         <p:spPr>
           <a:xfrm>
-            <a:off x="6217920" y="1783080"/>
-            <a:ext cx="5257800" cy="3886200"/>
+            <a:off x="6217920" y="2011680"/>
+            <a:ext cx="5257800" cy="3657600"/>
           </a:xfrm>
           <a:prstGeom prst="roundRect">
             <a:avLst>
@@ -10432,13 +11176,13 @@
       </p:sp>
       <p:sp>
         <p:nvSpPr>
-          <p:cNvPr id="14" name="TextBox 13"/>
+          <p:cNvPr id="16" name="TextBox 15"/>
           <p:cNvSpPr txBox="1"/>
           <p:nvPr/>
         </p:nvSpPr>
         <p:spPr>
           <a:xfrm>
-            <a:off x="6629400" y="1965960"/>
+            <a:off x="6629400" y="2148840"/>
             <a:ext cx="1097280" cy="1097280"/>
           </a:xfrm>
           <a:prstGeom prst="rect">
@@ -10474,7 +11218,7 @@
       </p:sp>
       <p:pic>
         <p:nvPicPr>
-          <p:cNvPr id="15" name="Picture 14" descr="doc_light.png"/>
+          <p:cNvPr id="17" name="Picture 16" descr="doc_light.png"/>
           <p:cNvPicPr>
             <a:picLocks noChangeAspect="1"/>
           </p:cNvPicPr>
@@ -10488,8 +11232,8 @@
         </p:blipFill>
         <p:spPr>
           <a:xfrm>
-            <a:off x="8412480" y="2103120"/>
-            <a:ext cx="1856935" cy="2194560"/>
+            <a:off x="8412480" y="2286000"/>
+            <a:ext cx="1702191" cy="2011680"/>
           </a:xfrm>
           <a:prstGeom prst="rect">
             <a:avLst/>
@@ -10498,7 +11242,7 @@
       </p:pic>
       <p:sp>
         <p:nvSpPr>
-          <p:cNvPr id="16" name="TextBox 15"/>
+          <p:cNvPr id="18" name="TextBox 17"/>
           <p:cNvSpPr txBox="1"/>
           <p:nvPr/>
         </p:nvSpPr>
@@ -10540,7 +11284,7 @@
       </p:sp>
       <p:sp>
         <p:nvSpPr>
-          <p:cNvPr id="17" name="TextBox 16"/>
+          <p:cNvPr id="19" name="TextBox 18"/>
           <p:cNvSpPr txBox="1"/>
           <p:nvPr/>
         </p:nvSpPr>
@@ -10575,20 +11319,20 @@
                 </a:solidFill>
                 <a:latin typeface="Aptos"/>
               </a:rPr>
-              <a:t>instructions sent every message (a short one)</a:t>
-            </a:r>
-          </a:p>
-        </p:txBody>
-      </p:sp>
-      <p:sp>
-        <p:nvSpPr>
-          <p:cNvPr id="18" name="Oval 17"/>
+              <a:t>the same instructions every turn (400 tokens)</a:t>
+            </a:r>
+          </a:p>
+        </p:txBody>
+      </p:sp>
+      <p:sp>
+        <p:nvSpPr>
+          <p:cNvPr id="20" name="Oval 19"/>
           <p:cNvSpPr/>
           <p:nvPr/>
         </p:nvSpPr>
         <p:spPr>
           <a:xfrm>
-            <a:off x="5769864" y="3401568"/>
+            <a:off x="5769864" y="3566160"/>
             <a:ext cx="658368" cy="658368"/>
           </a:xfrm>
           <a:prstGeom prst="ellipse">
@@ -10635,7 +11379,7 @@
       </p:sp>
       <p:sp>
         <p:nvSpPr>
-          <p:cNvPr id="19" name="TextBox 18"/>
+          <p:cNvPr id="21" name="TextBox 20"/>
           <p:cNvSpPr txBox="1"/>
           <p:nvPr/>
         </p:nvSpPr>
@@ -10664,7 +11408,7 @@
               </a:spcAft>
             </a:pPr>
             <a:r>
-              <a:rPr sz="1700" b="1">
+              <a:rPr sz="1600" b="1">
                 <a:solidFill>
                   <a:srgbClr val="3C3B38"/>
                 </a:solidFill>
@@ -10673,7 +11417,7 @@
               <a:t>Agent</a:t>
             </a:r>
             <a:r>
-              <a:rPr sz="1700" b="0">
+              <a:rPr sz="1600" b="0">
                 <a:solidFill>
                   <a:srgbClr val="3C3B38"/>
                 </a:solidFill>
@@ -10682,7 +11426,7 @@
               <a:t> = an AI that reads your screen and acts.   </a:t>
             </a:r>
             <a:r>
-              <a:rPr sz="1700" b="1">
+              <a:rPr sz="1600" b="1">
                 <a:solidFill>
                   <a:srgbClr val="3C3B38"/>
                 </a:solidFill>
@@ -10691,20 +11435,38 @@
               <a:t>Turn</a:t>
             </a:r>
             <a:r>
-              <a:rPr sz="1700" b="0">
+              <a:rPr sz="1600" b="0">
                 <a:solidFill>
                   <a:srgbClr val="3C3B38"/>
                 </a:solidFill>
                 <a:latin typeface="Aptos"/>
               </a:rPr>
-              <a:t> = one message to it, and its reply.</a:t>
-            </a:r>
-          </a:p>
-        </p:txBody>
-      </p:sp>
-      <p:sp>
-        <p:nvSpPr>
-          <p:cNvPr id="20" name="TextBox 19"/>
+              <a:t> = one message to it, and its reply.   </a:t>
+            </a:r>
+            <a:r>
+              <a:rPr sz="1600" b="1">
+                <a:solidFill>
+                  <a:srgbClr val="3C3B38"/>
+                </a:solidFill>
+                <a:latin typeface="Aptos"/>
+              </a:rPr>
+              <a:t>Token</a:t>
+            </a:r>
+            <a:r>
+              <a:rPr sz="1600" b="0">
+                <a:solidFill>
+                  <a:srgbClr val="3C3B38"/>
+                </a:solidFill>
+                <a:latin typeface="Aptos"/>
+              </a:rPr>
+              <a:t> = the unit you are billed in.</a:t>
+            </a:r>
+          </a:p>
+        </p:txBody>
+      </p:sp>
+      <p:sp>
+        <p:nvSpPr>
+          <p:cNvPr id="22" name="TextBox 21"/>
           <p:cNvSpPr txBox="1"/>
           <p:nvPr/>
         </p:nvSpPr>
@@ -10998,14 +11760,71 @@
       </p:sp>
       <p:sp>
         <p:nvSpPr>
-          <p:cNvPr id="7" name="TextBox 6"/>
+          <p:cNvPr id="7" name="Rounded Rectangle 6"/>
+          <p:cNvSpPr/>
+          <p:nvPr/>
+        </p:nvSpPr>
+        <p:spPr>
+          <a:xfrm>
+            <a:off x="8387791" y="429768"/>
+            <a:ext cx="1600200" cy="310896"/>
+          </a:xfrm>
+          <a:prstGeom prst="roundRect">
+            <a:avLst>
+              <a:gd name="adj" fmla="val 50000"/>
+            </a:avLst>
+          </a:prstGeom>
+          <a:solidFill>
+            <a:srgbClr val="121212"/>
+          </a:solidFill>
+          <a:ln w="15875">
+            <a:solidFill>
+              <a:srgbClr val="B5B2AA"/>
+            </a:solidFill>
+          </a:ln>
+          <a:effectLst/>
+        </p:spPr>
+        <p:style>
+          <a:lnRef idx="1">
+            <a:schemeClr val="accent1"/>
+          </a:lnRef>
+          <a:fillRef idx="3">
+            <a:schemeClr val="accent1"/>
+          </a:fillRef>
+          <a:effectRef idx="2">
+            <a:schemeClr val="accent1"/>
+          </a:effectRef>
+          <a:fontRef idx="minor">
+            <a:schemeClr val="lt1"/>
+          </a:fontRef>
+        </p:style>
+        <p:txBody>
+          <a:bodyPr rtlCol="0" anchor="ctr" lIns="0" rIns="0" tIns="0" bIns="0"/>
+          <a:lstStyle/>
+          <a:p>
+            <a:pPr algn="ctr"/>
+            <a:r>
+              <a:rPr sz="1200" b="1">
+                <a:solidFill>
+                  <a:srgbClr val="D7D5CE"/>
+                </a:solidFill>
+                <a:latin typeface="Aptos"/>
+              </a:rPr>
+              <a:t>EXAMPLE MODEL</a:t>
+            </a:r>
+          </a:p>
+        </p:txBody>
+      </p:sp>
+      <p:sp>
+        <p:nvSpPr>
+          <p:cNvPr id="8" name="TextBox 7"/>
           <p:cNvSpPr txBox="1"/>
           <p:nvPr/>
         </p:nvSpPr>
         <p:spPr>
           <a:xfrm>
-            <a:off x="685800" y="1188720"/>
-            <a:ext cx="4754880" cy="2011680"/>
+            <a:off x="685800" y="1005840"/>
+            <a:ext cx="5120640" cy="1737360"/>
           </a:xfrm>
           <a:prstGeom prst="rect">
             <a:avLst/>
@@ -11027,27 +11846,27 @@
               </a:spcAft>
             </a:pPr>
             <a:r>
-              <a:rPr sz="15000" b="1">
+              <a:rPr sz="12000" b="1">
                 <a:solidFill>
                   <a:srgbClr val="5AA3F0"/>
                 </a:solidFill>
                 <a:latin typeface="Aptos Display"/>
               </a:rPr>
-              <a:t>3.1×</a:t>
-            </a:r>
-          </a:p>
-        </p:txBody>
-      </p:sp>
-      <p:sp>
-        <p:nvSpPr>
-          <p:cNvPr id="8" name="TextBox 7"/>
+              <a:t>75%</a:t>
+            </a:r>
+          </a:p>
+        </p:txBody>
+      </p:sp>
+      <p:sp>
+        <p:nvSpPr>
+          <p:cNvPr id="9" name="TextBox 8"/>
           <p:cNvSpPr txBox="1"/>
           <p:nvPr/>
         </p:nvSpPr>
         <p:spPr>
           <a:xfrm>
-            <a:off x="685800" y="3383280"/>
-            <a:ext cx="4572000" cy="1280160"/>
+            <a:off x="685800" y="2697480"/>
+            <a:ext cx="4937760" cy="1005840"/>
           </a:xfrm>
           <a:prstGeom prst="rect">
             <a:avLst/>
@@ -11069,13 +11888,13 @@
               </a:spcAft>
             </a:pPr>
             <a:r>
-              <a:rPr sz="3200" b="1">
+              <a:rPr sz="3000" b="1">
                 <a:solidFill>
                   <a:srgbClr val="FFFFFF"/>
                 </a:solidFill>
                 <a:latin typeface="Aptos"/>
               </a:rPr>
-              <a:t>One screenshot is</a:t>
+              <a:t>of the bill is</a:t>
             </a:r>
           </a:p>
           <a:p>
@@ -11088,27 +11907,27 @@
               </a:spcAft>
             </a:pPr>
             <a:r>
-              <a:rPr sz="3200" b="1">
+              <a:rPr sz="3000" b="1">
                 <a:solidFill>
                   <a:srgbClr val="FFFFFF"/>
                 </a:solidFill>
                 <a:latin typeface="Aptos"/>
               </a:rPr>
-              <a:t>three short prompts.</a:t>
-            </a:r>
-          </a:p>
-        </p:txBody>
-      </p:sp>
-      <p:sp>
-        <p:nvSpPr>
-          <p:cNvPr id="9" name="TextBox 8"/>
+              <a:t>the screenshots.</a:t>
+            </a:r>
+          </a:p>
+        </p:txBody>
+      </p:sp>
+      <p:sp>
+        <p:nvSpPr>
+          <p:cNvPr id="10" name="TextBox 9"/>
           <p:cNvSpPr txBox="1"/>
           <p:nvPr/>
         </p:nvSpPr>
         <p:spPr>
           <a:xfrm>
-            <a:off x="685800" y="4754880"/>
-            <a:ext cx="4572000" cy="822960"/>
+            <a:off x="685800" y="3840480"/>
+            <a:ext cx="4937760" cy="365760"/>
           </a:xfrm>
           <a:prstGeom prst="rect">
             <a:avLst/>
@@ -11130,29 +11949,122 @@
               </a:spcAft>
             </a:pPr>
             <a:r>
-              <a:rPr sz="2200" b="0">
+              <a:rPr sz="2000" b="0">
                 <a:solidFill>
                   <a:srgbClr val="D7D5CE"/>
                 </a:solidFill>
                 <a:latin typeface="Aptos"/>
               </a:rPr>
-              <a:t>And it sends a new one </a:t>
-            </a:r>
-            <a:r>
-              <a:rPr sz="2200" b="1">
-                <a:solidFill>
-                  <a:srgbClr val="5AA3F0"/>
-                </a:solidFill>
-                <a:latin typeface="Aptos"/>
-              </a:rPr>
-              <a:t>every turn.</a:t>
+              <a:t>System prompt (400 tokens): </a:t>
+            </a:r>
+            <a:r>
+              <a:rPr sz="2000" b="1">
+                <a:solidFill>
+                  <a:srgbClr val="9A978F"/>
+                </a:solidFill>
+                <a:latin typeface="Aptos"/>
+              </a:rPr>
+              <a:t>2.3%</a:t>
+            </a:r>
+          </a:p>
+        </p:txBody>
+      </p:sp>
+      <p:sp>
+        <p:nvSpPr>
+          <p:cNvPr id="11" name="TextBox 10"/>
+          <p:cNvSpPr txBox="1"/>
+          <p:nvPr/>
+        </p:nvSpPr>
+        <p:spPr>
+          <a:xfrm>
+            <a:off x="685800" y="4297680"/>
+            <a:ext cx="4937760" cy="822960"/>
+          </a:xfrm>
+          <a:prstGeom prst="rect">
+            <a:avLst/>
+          </a:prstGeom>
+          <a:noFill/>
+        </p:spPr>
+        <p:txBody>
+          <a:bodyPr wrap="square" lIns="0" rIns="0" tIns="0" bIns="0" anchor="t">
+            <a:spAutoFit/>
+          </a:bodyPr>
+          <a:lstStyle/>
+          <a:p>
+            <a:pPr algn="l">
+              <a:lnSpc>
+                <a:spcPct val="108000"/>
+              </a:lnSpc>
+              <a:spcAft>
+                <a:spcPts val="0"/>
+              </a:spcAft>
+            </a:pPr>
+            <a:r>
+              <a:rPr sz="2000" b="0">
+                <a:solidFill>
+                  <a:srgbClr val="D7D5CE"/>
+                </a:solidFill>
+                <a:latin typeface="Aptos"/>
+              </a:rPr>
+              <a:t>A new screenshot every turn, and each one is </a:t>
+            </a:r>
+            <a:r>
+              <a:rPr sz="2000" b="1">
+                <a:solidFill>
+                  <a:srgbClr val="F0834E"/>
+                </a:solidFill>
+                <a:latin typeface="Aptos"/>
+              </a:rPr>
+              <a:t>sent again.</a:t>
+            </a:r>
+          </a:p>
+        </p:txBody>
+      </p:sp>
+      <p:sp>
+        <p:nvSpPr>
+          <p:cNvPr id="12" name="TextBox 11"/>
+          <p:cNvSpPr txBox="1"/>
+          <p:nvPr/>
+        </p:nvSpPr>
+        <p:spPr>
+          <a:xfrm>
+            <a:off x="685800" y="5212080"/>
+            <a:ext cx="4937760" cy="1005840"/>
+          </a:xfrm>
+          <a:prstGeom prst="rect">
+            <a:avLst/>
+          </a:prstGeom>
+          <a:noFill/>
+        </p:spPr>
+        <p:txBody>
+          <a:bodyPr wrap="square" lIns="0" rIns="0" tIns="0" bIns="0" anchor="t">
+            <a:spAutoFit/>
+          </a:bodyPr>
+          <a:lstStyle/>
+          <a:p>
+            <a:pPr algn="l">
+              <a:lnSpc>
+                <a:spcPct val="108000"/>
+              </a:lnSpc>
+              <a:spcAft>
+                <a:spcPts val="0"/>
+              </a:spcAft>
+            </a:pPr>
+            <a:r>
+              <a:rPr sz="1400" b="0">
+                <a:solidFill>
+                  <a:srgbClr val="B5B2AA"/>
+                </a:solidFill>
+                <a:latin typeface="Aptos"/>
+              </a:rPr>
+              <a:t>A long prompt can win: it never grows, but per turn it can cost more than one screenshot. Break-even prompt is about 610 × (turns + 1) tokens: 6,700 at 10 turns, 12,800 at 20, 25,000 at 40.</a:t>
             </a:r>
           </a:p>
         </p:txBody>
       </p:sp>
       <p:pic>
         <p:nvPicPr>
-          <p:cNvPr id="10" name="Picture 9" descr="blocks_dark.png"/>
+          <p:cNvPr id="13" name="Picture 12" descr="prompt_sweep_dark.png"/>
           <p:cNvPicPr>
             <a:picLocks noChangeAspect="1"/>
           </p:cNvPicPr>
@@ -11166,8 +12078,8 @@
         </p:blipFill>
         <p:spPr>
           <a:xfrm>
-            <a:off x="6035040" y="1280160"/>
-            <a:ext cx="5486400" cy="2563996"/>
+            <a:off x="6035040" y="1234440"/>
+            <a:ext cx="5486400" cy="3823855"/>
           </a:xfrm>
           <a:prstGeom prst="rect">
             <a:avLst/>
@@ -11176,14 +12088,14 @@
       </p:pic>
       <p:sp>
         <p:nvSpPr>
-          <p:cNvPr id="11" name="TextBox 10"/>
+          <p:cNvPr id="14" name="TextBox 13"/>
           <p:cNvSpPr txBox="1"/>
           <p:nvPr/>
         </p:nvSpPr>
         <p:spPr>
           <a:xfrm>
-            <a:off x="6035040" y="3981316"/>
-            <a:ext cx="2651760" cy="822960"/>
+            <a:off x="6035040" y="5212080"/>
+            <a:ext cx="5486400" cy="1005840"/>
           </a:xfrm>
           <a:prstGeom prst="rect">
             <a:avLst/>
@@ -11205,47 +12117,36 @@
               </a:spcAft>
             </a:pPr>
             <a:r>
-              <a:rPr sz="3000" b="1">
-                <a:solidFill>
-                  <a:srgbClr val="5AA3F0"/>
-                </a:solidFill>
-                <a:latin typeface="Aptos"/>
-              </a:rPr>
-              <a:t>1,222</a:t>
-            </a:r>
-          </a:p>
-          <a:p>
-            <a:pPr algn="l">
-              <a:lnSpc>
-                <a:spcPct val="108000"/>
-              </a:lnSpc>
-              <a:spcAft>
-                <a:spcPts val="0"/>
-              </a:spcAft>
-            </a:pPr>
-            <a:r>
-              <a:rPr sz="1600" b="0">
+              <a:rPr sz="1300" b="1">
                 <a:solidFill>
                   <a:srgbClr val="D7D5CE"/>
                 </a:solidFill>
                 <a:latin typeface="Aptos"/>
               </a:rPr>
-              <a:t>one 1920×1080 screenshot,
-1,280-token cap</a:t>
-            </a:r>
-          </a:p>
-        </p:txBody>
-      </p:sp>
-      <p:sp>
-        <p:nvSpPr>
-          <p:cNvPr id="12" name="TextBox 11"/>
+              <a:t>An example agent, not a measurement. </a:t>
+            </a:r>
+            <a:r>
+              <a:rPr sz="1300" b="0">
+                <a:solidFill>
+                  <a:srgbClr val="B5B2AA"/>
+                </a:solidFill>
+                <a:latin typeface="Aptos"/>
+              </a:rPr>
+              <a:t>20 turns. Each turn: 8 s of speech (256 tokens, Gemini's published 32 a second), one 1,222-token screenshot (modelled), a 120-token reply. 400-token prompt, no caching. Change a setting and the percentages move.</a:t>
+            </a:r>
+          </a:p>
+        </p:txBody>
+      </p:sp>
+      <p:sp>
+        <p:nvSpPr>
+          <p:cNvPr id="15" name="TextBox 14"/>
           <p:cNvSpPr txBox="1"/>
           <p:nvPr/>
         </p:nvSpPr>
         <p:spPr>
           <a:xfrm>
-            <a:off x="8942832" y="3981316"/>
-            <a:ext cx="2651760" cy="822960"/>
+            <a:off x="685800" y="6473952"/>
+            <a:ext cx="5486400" cy="274320"/>
           </a:xfrm>
           <a:prstGeom prst="rect">
             <a:avLst/>
@@ -11267,46 +12168,27 @@
               </a:spcAft>
             </a:pPr>
             <a:r>
-              <a:rPr sz="3000" b="1">
-                <a:solidFill>
-                  <a:srgbClr val="9A978F"/>
-                </a:solidFill>
-                <a:latin typeface="Aptos"/>
-              </a:rPr>
-              <a:t>400</a:t>
-            </a:r>
-          </a:p>
-          <a:p>
-            <a:pPr algn="l">
-              <a:lnSpc>
-                <a:spcPct val="108000"/>
-              </a:lnSpc>
-              <a:spcAft>
-                <a:spcPts val="0"/>
-              </a:spcAft>
-            </a:pPr>
-            <a:r>
-              <a:rPr sz="1600" b="0">
-                <a:solidFill>
-                  <a:srgbClr val="D7D5CE"/>
-                </a:solidFill>
-                <a:latin typeface="Aptos"/>
-              </a:rPr>
-              <a:t>a short system prompt</a:t>
-            </a:r>
-          </a:p>
-        </p:txBody>
-      </p:sp>
-      <p:sp>
-        <p:nvSpPr>
-          <p:cNvPr id="13" name="TextBox 12"/>
+              <a:rPr sz="1100" b="0">
+                <a:solidFill>
+                  <a:srgbClr val="B5B2AA"/>
+                </a:solidFill>
+                <a:latin typeface="Aptos"/>
+              </a:rPr>
+              <a:t>Saving the Tokens  ·  Shyamji Tiwari</a:t>
+            </a:r>
+          </a:p>
+        </p:txBody>
+      </p:sp>
+      <p:sp>
+        <p:nvSpPr>
+          <p:cNvPr id="16" name="TextBox 15"/>
           <p:cNvSpPr txBox="1"/>
           <p:nvPr/>
         </p:nvSpPr>
         <p:spPr>
           <a:xfrm>
-            <a:off x="685800" y="6473952"/>
-            <a:ext cx="5486400" cy="274320"/>
+            <a:off x="5760720" y="6473952"/>
+            <a:ext cx="5745175" cy="274320"/>
           </a:xfrm>
           <a:prstGeom prst="rect">
             <a:avLst/>
@@ -11319,7 +12201,7 @@
           </a:bodyPr>
           <a:lstStyle/>
           <a:p>
-            <a:pPr algn="l">
+            <a:pPr algn="r">
               <a:lnSpc>
                 <a:spcPct val="108000"/>
               </a:lnSpc>
@@ -11334,49 +12216,7 @@
                 </a:solidFill>
                 <a:latin typeface="Aptos"/>
               </a:rPr>
-              <a:t>Saving the Tokens  ·  Shyamji Tiwari</a:t>
-            </a:r>
-          </a:p>
-        </p:txBody>
-      </p:sp>
-      <p:sp>
-        <p:nvSpPr>
-          <p:cNvPr id="14" name="TextBox 13"/>
-          <p:cNvSpPr txBox="1"/>
-          <p:nvPr/>
-        </p:nvSpPr>
-        <p:spPr>
-          <a:xfrm>
-            <a:off x="5760720" y="6473952"/>
-            <a:ext cx="5745175" cy="274320"/>
-          </a:xfrm>
-          <a:prstGeom prst="rect">
-            <a:avLst/>
-          </a:prstGeom>
-          <a:noFill/>
-        </p:spPr>
-        <p:txBody>
-          <a:bodyPr wrap="square" lIns="0" rIns="0" tIns="0" bIns="0" anchor="t">
-            <a:spAutoFit/>
-          </a:bodyPr>
-          <a:lstStyle/>
-          <a:p>
-            <a:pPr algn="r">
-              <a:lnSpc>
-                <a:spcPct val="108000"/>
-              </a:lnSpc>
-              <a:spcAft>
-                <a:spcPts val="0"/>
-              </a:spcAft>
-            </a:pPr>
-            <a:r>
-              <a:rPr sz="1100" b="0">
-                <a:solidFill>
-                  <a:srgbClr val="B5B2AA"/>
-                </a:solidFill>
-                <a:latin typeface="Aptos"/>
-              </a:rPr>
-              <a:t>1,280-token image cap · 400 tokens is a short prompt; real ones often run 2,000+</a:t>
+              <a:t>numbers come from a model you can run and edit: ex3_budget.py</a:t>
             </a:r>
           </a:p>
         </p:txBody>
@@ -11797,8 +12637,8 @@
         </p:blipFill>
         <p:spPr>
           <a:xfrm>
-            <a:off x="1143000" y="2514600"/>
-            <a:ext cx="1431388" cy="1691640"/>
+            <a:off x="1143000" y="2468880"/>
+            <a:ext cx="1315329" cy="1554480"/>
           </a:xfrm>
           <a:prstGeom prst="rect">
             <a:avLst/>
@@ -11813,7 +12653,7 @@
         </p:nvSpPr>
         <p:spPr>
           <a:xfrm>
-            <a:off x="1051560" y="4434840"/>
+            <a:off x="1051560" y="4206240"/>
             <a:ext cx="2834640" cy="1188720"/>
           </a:xfrm>
           <a:prstGeom prst="rect">
@@ -11842,7 +12682,7 @@
                 </a:solidFill>
                 <a:latin typeface="Aptos Display"/>
               </a:rPr>
-              <a:t>750</a:t>
+              <a:t>≈ 750</a:t>
             </a:r>
           </a:p>
         </p:txBody>
@@ -11855,7 +12695,7 @@
         </p:nvSpPr>
         <p:spPr>
           <a:xfrm>
-            <a:off x="1051560" y="5217160"/>
+            <a:off x="1051560" y="4988560"/>
             <a:ext cx="2834640" cy="822960"/>
           </a:xfrm>
           <a:prstGeom prst="rect">
@@ -11891,7 +12731,49 @@
       </p:sp>
       <p:sp>
         <p:nvSpPr>
-          <p:cNvPr id="13" name="Rounded Rectangle 12"/>
+          <p:cNvPr id="13" name="TextBox 12"/>
+          <p:cNvSpPr txBox="1"/>
+          <p:nvPr/>
+        </p:nvSpPr>
+        <p:spPr>
+          <a:xfrm>
+            <a:off x="1051560" y="5394960"/>
+            <a:ext cx="2743200" cy="640080"/>
+          </a:xfrm>
+          <a:prstGeom prst="rect">
+            <a:avLst/>
+          </a:prstGeom>
+          <a:noFill/>
+        </p:spPr>
+        <p:txBody>
+          <a:bodyPr wrap="square" lIns="0" rIns="0" tIns="0" bIns="0" anchor="t">
+            <a:spAutoFit/>
+          </a:bodyPr>
+          <a:lstStyle/>
+          <a:p>
+            <a:pPr algn="l">
+              <a:lnSpc>
+                <a:spcPct val="108000"/>
+              </a:lnSpc>
+              <a:spcAft>
+                <a:spcPts val="0"/>
+              </a:spcAft>
+            </a:pPr>
+            <a:r>
+              <a:rPr sz="1300" b="0">
+                <a:solidFill>
+                  <a:srgbClr val="6B6963"/>
+                </a:solidFill>
+                <a:latin typeface="Aptos"/>
+              </a:rPr>
+              <a:t>rule of thumb: 1 token is about 4 characters, a page about 3,000</a:t>
+            </a:r>
+          </a:p>
+        </p:txBody>
+      </p:sp>
+      <p:sp>
+        <p:nvSpPr>
+          <p:cNvPr id="14" name="Rounded Rectangle 13"/>
           <p:cNvSpPr/>
           <p:nvPr/>
         </p:nvSpPr>
@@ -11937,7 +12819,7 @@
       </p:sp>
       <p:pic>
         <p:nvPicPr>
-          <p:cNvPr id="14" name="Picture 13" descr="screen_light.png"/>
+          <p:cNvPr id="15" name="Picture 14" descr="screen_light.png"/>
           <p:cNvPicPr>
             <a:picLocks noChangeAspect="1"/>
           </p:cNvPicPr>
@@ -11951,8 +12833,8 @@
         </p:blipFill>
         <p:spPr>
           <a:xfrm>
-            <a:off x="4800600" y="2514600"/>
-            <a:ext cx="2212145" cy="1691640"/>
+            <a:off x="4800600" y="2468880"/>
+            <a:ext cx="2032782" cy="1554480"/>
           </a:xfrm>
           <a:prstGeom prst="rect">
             <a:avLst/>
@@ -11961,13 +12843,13 @@
       </p:pic>
       <p:sp>
         <p:nvSpPr>
-          <p:cNvPr id="15" name="TextBox 14"/>
+          <p:cNvPr id="16" name="TextBox 15"/>
           <p:cNvSpPr txBox="1"/>
           <p:nvPr/>
         </p:nvSpPr>
         <p:spPr>
           <a:xfrm>
-            <a:off x="4709160" y="4434840"/>
+            <a:off x="4709160" y="4206240"/>
             <a:ext cx="2834640" cy="1188720"/>
           </a:xfrm>
           <a:prstGeom prst="rect">
@@ -11990,26 +12872,26 @@
               </a:spcAft>
             </a:pPr>
             <a:r>
-              <a:rPr sz="5600" b="1">
+              <a:rPr sz="3800" b="1">
                 <a:solidFill>
                   <a:srgbClr val="1C66C2"/>
                 </a:solidFill>
                 <a:latin typeface="Aptos Display"/>
               </a:rPr>
-              <a:t>1,222</a:t>
-            </a:r>
-          </a:p>
-        </p:txBody>
-      </p:sp>
-      <p:sp>
-        <p:nvSpPr>
-          <p:cNvPr id="16" name="TextBox 15"/>
+              <a:t>1,105–2,691</a:t>
+            </a:r>
+          </a:p>
+        </p:txBody>
+      </p:sp>
+      <p:sp>
+        <p:nvSpPr>
+          <p:cNvPr id="17" name="TextBox 16"/>
           <p:cNvSpPr txBox="1"/>
           <p:nvPr/>
         </p:nvSpPr>
         <p:spPr>
           <a:xfrm>
-            <a:off x="4709160" y="5217160"/>
+            <a:off x="4709160" y="4737100"/>
             <a:ext cx="2834640" cy="822960"/>
           </a:xfrm>
           <a:prstGeom prst="rect">
@@ -12038,14 +12920,56 @@
                 </a:solidFill>
                 <a:latin typeface="Aptos"/>
               </a:rPr>
-              <a:t>tokens · one capped screenshot</a:t>
-            </a:r>
-          </a:p>
-        </p:txBody>
-      </p:sp>
-      <p:sp>
-        <p:nvSpPr>
-          <p:cNvPr id="17" name="Rounded Rectangle 16"/>
+              <a:t>tokens · one 1920×1080 screenshot</a:t>
+            </a:r>
+          </a:p>
+        </p:txBody>
+      </p:sp>
+      <p:sp>
+        <p:nvSpPr>
+          <p:cNvPr id="18" name="TextBox 17"/>
+          <p:cNvSpPr txBox="1"/>
+          <p:nvPr/>
+        </p:nvSpPr>
+        <p:spPr>
+          <a:xfrm>
+            <a:off x="4709160" y="5394960"/>
+            <a:ext cx="2743200" cy="640080"/>
+          </a:xfrm>
+          <a:prstGeom prst="rect">
+            <a:avLst/>
+          </a:prstGeom>
+          <a:noFill/>
+        </p:spPr>
+        <p:txBody>
+          <a:bodyPr wrap="square" lIns="0" rIns="0" tIns="0" bIns="0" anchor="t">
+            <a:spAutoFit/>
+          </a:bodyPr>
+          <a:lstStyle/>
+          <a:p>
+            <a:pPr algn="l">
+              <a:lnSpc>
+                <a:spcPct val="108000"/>
+              </a:lnSpc>
+              <a:spcAft>
+                <a:spcPts val="0"/>
+              </a:spcAft>
+            </a:pPr>
+            <a:r>
+              <a:rPr sz="1300" b="0">
+                <a:solidFill>
+                  <a:srgbClr val="6B6963"/>
+                </a:solidFill>
+                <a:latin typeface="Aptos"/>
+              </a:rPr>
+              <a:t>published rules of OpenAI and Claude (next slides)</a:t>
+            </a:r>
+          </a:p>
+        </p:txBody>
+      </p:sp>
+      <p:sp>
+        <p:nvSpPr>
+          <p:cNvPr id="19" name="Rounded Rectangle 18"/>
           <p:cNvSpPr/>
           <p:nvPr/>
         </p:nvSpPr>
@@ -12091,7 +13015,7 @@
       </p:sp>
       <p:pic>
         <p:nvPicPr>
-          <p:cNvPr id="18" name="Picture 17" descr="speech_light.png"/>
+          <p:cNvPr id="20" name="Picture 19" descr="speech_light.png"/>
           <p:cNvPicPr>
             <a:picLocks noChangeAspect="1"/>
           </p:cNvPicPr>
@@ -12105,8 +13029,8 @@
         </p:blipFill>
         <p:spPr>
           <a:xfrm>
-            <a:off x="8458200" y="2514600"/>
-            <a:ext cx="2082018" cy="1691640"/>
+            <a:off x="8458200" y="2468880"/>
+            <a:ext cx="1913206" cy="1554480"/>
           </a:xfrm>
           <a:prstGeom prst="rect">
             <a:avLst/>
@@ -12115,13 +13039,13 @@
       </p:pic>
       <p:sp>
         <p:nvSpPr>
-          <p:cNvPr id="19" name="TextBox 18"/>
+          <p:cNvPr id="21" name="TextBox 20"/>
           <p:cNvSpPr txBox="1"/>
           <p:nvPr/>
         </p:nvSpPr>
         <p:spPr>
           <a:xfrm>
-            <a:off x="8366760" y="4434840"/>
+            <a:off x="8366760" y="4206240"/>
             <a:ext cx="2834640" cy="1188720"/>
           </a:xfrm>
           <a:prstGeom prst="rect">
@@ -12150,20 +13074,20 @@
                 </a:solidFill>
                 <a:latin typeface="Aptos Display"/>
               </a:rPr>
-              <a:t>200</a:t>
-            </a:r>
-          </a:p>
-        </p:txBody>
-      </p:sp>
-      <p:sp>
-        <p:nvSpPr>
-          <p:cNvPr id="20" name="TextBox 19"/>
+              <a:t>256</a:t>
+            </a:r>
+          </a:p>
+        </p:txBody>
+      </p:sp>
+      <p:sp>
+        <p:nvSpPr>
+          <p:cNvPr id="22" name="TextBox 21"/>
           <p:cNvSpPr txBox="1"/>
           <p:nvPr/>
         </p:nvSpPr>
         <p:spPr>
           <a:xfrm>
-            <a:off x="8366760" y="5217160"/>
+            <a:off x="8366760" y="4988560"/>
             <a:ext cx="2834640" cy="822960"/>
           </a:xfrm>
           <a:prstGeom prst="rect">
@@ -12199,14 +13123,14 @@
       </p:sp>
       <p:sp>
         <p:nvSpPr>
-          <p:cNvPr id="21" name="TextBox 20"/>
+          <p:cNvPr id="23" name="TextBox 22"/>
           <p:cNvSpPr txBox="1"/>
           <p:nvPr/>
         </p:nvSpPr>
         <p:spPr>
           <a:xfrm>
-            <a:off x="685800" y="6473952"/>
-            <a:ext cx="5486400" cy="274320"/>
+            <a:off x="8366760" y="5394960"/>
+            <a:ext cx="2743200" cy="640080"/>
           </a:xfrm>
           <a:prstGeom prst="rect">
             <a:avLst/>
@@ -12228,27 +13152,27 @@
               </a:spcAft>
             </a:pPr>
             <a:r>
-              <a:rPr sz="1100" b="0">
+              <a:rPr sz="1300" b="0">
                 <a:solidFill>
                   <a:srgbClr val="6B6963"/>
                 </a:solidFill>
                 <a:latin typeface="Aptos"/>
               </a:rPr>
-              <a:t>Saving the Tokens  ·  Shyamji Tiwari</a:t>
-            </a:r>
-          </a:p>
-        </p:txBody>
-      </p:sp>
-      <p:sp>
-        <p:nvSpPr>
-          <p:cNvPr id="22" name="TextBox 21"/>
+              <a:t>Gemini: 32 tokens a second, published (others differ)</a:t>
+            </a:r>
+          </a:p>
+        </p:txBody>
+      </p:sp>
+      <p:sp>
+        <p:nvSpPr>
+          <p:cNvPr id="24" name="TextBox 23"/>
           <p:cNvSpPr txBox="1"/>
           <p:nvPr/>
         </p:nvSpPr>
         <p:spPr>
           <a:xfrm>
-            <a:off x="5760720" y="6473952"/>
-            <a:ext cx="5745175" cy="274320"/>
+            <a:off x="685800" y="6473952"/>
+            <a:ext cx="5486400" cy="274320"/>
           </a:xfrm>
           <a:prstGeom prst="rect">
             <a:avLst/>
@@ -12261,7 +13185,7 @@
           </a:bodyPr>
           <a:lstStyle/>
           <a:p>
-            <a:pPr algn="r">
+            <a:pPr algn="l">
               <a:lnSpc>
                 <a:spcPct val="108000"/>
               </a:lnSpc>
@@ -12276,7 +13200,7 @@
                 </a:solidFill>
                 <a:latin typeface="Aptos"/>
               </a:rPr>
-              <a:t>screenshot at a 1,280-token cap · speech at 25 tokens per second</a:t>
+              <a:t>Saving the Tokens  ·  Shyamji Tiwari</a:t>
             </a:r>
           </a:p>
         </p:txBody>
@@ -12612,7 +13536,7 @@
                 </a:solidFill>
                 <a:latin typeface="Aptos"/>
               </a:rPr>
-              <a:t>Pseudo-code of almost every agent. The usage field is where the bill is read.</a:t>
+              <a:t>Pseudo-code of most agents. The usage field is where the bill is read.</a:t>
             </a:r>
           </a:p>
         </p:txBody>
@@ -12649,8 +13573,8 @@
         </p:nvSpPr>
         <p:spPr>
           <a:xfrm>
-            <a:off x="685800" y="5440680"/>
-            <a:ext cx="10789920" cy="548640"/>
+            <a:off x="685800" y="5349240"/>
+            <a:ext cx="10789920" cy="914400"/>
           </a:xfrm>
           <a:prstGeom prst="rect">
             <a:avLst/>
@@ -12668,7 +13592,7 @@
                 <a:spcPct val="108000"/>
               </a:lnSpc>
               <a:spcAft>
-                <a:spcPts val="0"/>
+                <a:spcPts val="600"/>
               </a:spcAft>
             </a:pPr>
             <a:r>
@@ -12706,6 +13630,43 @@
                 <a:latin typeface="Aptos"/>
               </a:rPr>
               <a:t> = where you read what it cost.</a:t>
+            </a:r>
+          </a:p>
+          <a:p>
+            <a:pPr algn="l">
+              <a:lnSpc>
+                <a:spcPct val="108000"/>
+              </a:lnSpc>
+              <a:spcAft>
+                <a:spcPts val="600"/>
+              </a:spcAft>
+            </a:pPr>
+            <a:r>
+              <a:rPr sz="1700" b="0">
+                <a:solidFill>
+                  <a:srgbClr val="6B6963"/>
+                </a:solidFill>
+                <a:latin typeface="Aptos"/>
+              </a:rPr>
+              <a:t>Orange is full price unless you cache it (slide 14). The model can only read so many tokens per call: that limit is the </a:t>
+            </a:r>
+            <a:r>
+              <a:rPr sz="1700" b="1">
+                <a:solidFill>
+                  <a:srgbClr val="3C3B38"/>
+                </a:solidFill>
+                <a:latin typeface="Aptos"/>
+              </a:rPr>
+              <a:t>context window</a:t>
+            </a:r>
+            <a:r>
+              <a:rPr sz="1700" b="0">
+                <a:solidFill>
+                  <a:srgbClr val="6B6963"/>
+                </a:solidFill>
+                <a:latin typeface="Aptos"/>
+              </a:rPr>
+              <a:t>.</a:t>
             </a:r>
           </a:p>
         </p:txBody>
@@ -13006,7 +13967,64 @@
       </p:sp>
       <p:sp>
         <p:nvSpPr>
-          <p:cNvPr id="7" name="TextBox 6"/>
+          <p:cNvPr id="7" name="Rounded Rectangle 6"/>
+          <p:cNvSpPr/>
+          <p:nvPr/>
+        </p:nvSpPr>
+        <p:spPr>
+          <a:xfrm>
+            <a:off x="8387791" y="429768"/>
+            <a:ext cx="1600200" cy="310896"/>
+          </a:xfrm>
+          <a:prstGeom prst="roundRect">
+            <a:avLst>
+              <a:gd name="adj" fmla="val 50000"/>
+            </a:avLst>
+          </a:prstGeom>
+          <a:solidFill>
+            <a:srgbClr val="FFFFFF"/>
+          </a:solidFill>
+          <a:ln w="15875">
+            <a:solidFill>
+              <a:srgbClr val="6B6963"/>
+            </a:solidFill>
+          </a:ln>
+          <a:effectLst/>
+        </p:spPr>
+        <p:style>
+          <a:lnRef idx="1">
+            <a:schemeClr val="accent1"/>
+          </a:lnRef>
+          <a:fillRef idx="3">
+            <a:schemeClr val="accent1"/>
+          </a:fillRef>
+          <a:effectRef idx="2">
+            <a:schemeClr val="accent1"/>
+          </a:effectRef>
+          <a:fontRef idx="minor">
+            <a:schemeClr val="lt1"/>
+          </a:fontRef>
+        </p:style>
+        <p:txBody>
+          <a:bodyPr rtlCol="0" anchor="ctr" lIns="0" rIns="0" tIns="0" bIns="0"/>
+          <a:lstStyle/>
+          <a:p>
+            <a:pPr algn="ctr"/>
+            <a:r>
+              <a:rPr sz="1200" b="1">
+                <a:solidFill>
+                  <a:srgbClr val="3C3B38"/>
+                </a:solidFill>
+                <a:latin typeface="Aptos"/>
+              </a:rPr>
+              <a:t>EXAMPLE MODEL</a:t>
+            </a:r>
+          </a:p>
+        </p:txBody>
+      </p:sp>
+      <p:sp>
+        <p:nvSpPr>
+          <p:cNvPr id="8" name="TextBox 7"/>
           <p:cNvSpPr txBox="1"/>
           <p:nvPr/>
         </p:nvSpPr>
@@ -13048,7 +14066,7 @@
       </p:sp>
       <p:sp>
         <p:nvSpPr>
-          <p:cNvPr id="8" name="TextBox 7"/>
+          <p:cNvPr id="9" name="TextBox 8"/>
           <p:cNvSpPr txBox="1"/>
           <p:nvPr/>
         </p:nvSpPr>
@@ -13083,14 +14101,14 @@
                 </a:solidFill>
                 <a:latin typeface="Aptos"/>
               </a:rPr>
-              <a:t>Using the “cut into tiles” strategy (slide 3 used a cap; next slide compares them)</a:t>
+              <a:t>A modelled tiler (InternVL-style). Real vendors work differently: slide 8.</a:t>
             </a:r>
           </a:p>
         </p:txBody>
       </p:sp>
       <p:pic>
         <p:nvPicPr>
-          <p:cNvPr id="9" name="Picture 8" descr="mechanism.png"/>
+          <p:cNvPr id="10" name="Picture 9" descr="mechanism.png"/>
           <p:cNvPicPr>
             <a:picLocks noChangeAspect="1"/>
           </p:cNvPicPr>
@@ -13114,7 +14132,7 @@
       </p:pic>
       <p:sp>
         <p:nvSpPr>
-          <p:cNvPr id="10" name="TextBox 9"/>
+          <p:cNvPr id="11" name="TextBox 10"/>
           <p:cNvSpPr txBox="1"/>
           <p:nvPr/>
         </p:nvSpPr>
@@ -13165,7 +14183,7 @@
       </p:sp>
       <p:sp>
         <p:nvSpPr>
-          <p:cNvPr id="11" name="TextBox 10"/>
+          <p:cNvPr id="12" name="TextBox 11"/>
           <p:cNvSpPr txBox="1"/>
           <p:nvPr/>
         </p:nvSpPr>
@@ -13459,7 +14477,64 @@
       </p:sp>
       <p:sp>
         <p:nvSpPr>
-          <p:cNvPr id="7" name="TextBox 6"/>
+          <p:cNvPr id="7" name="Rounded Rectangle 6"/>
+          <p:cNvSpPr/>
+          <p:nvPr/>
+        </p:nvSpPr>
+        <p:spPr>
+          <a:xfrm>
+            <a:off x="8387791" y="429768"/>
+            <a:ext cx="1600200" cy="310896"/>
+          </a:xfrm>
+          <a:prstGeom prst="roundRect">
+            <a:avLst>
+              <a:gd name="adj" fmla="val 50000"/>
+            </a:avLst>
+          </a:prstGeom>
+          <a:solidFill>
+            <a:srgbClr val="FFFFFF"/>
+          </a:solidFill>
+          <a:ln w="15875">
+            <a:solidFill>
+              <a:srgbClr val="6B6963"/>
+            </a:solidFill>
+          </a:ln>
+          <a:effectLst/>
+        </p:spPr>
+        <p:style>
+          <a:lnRef idx="1">
+            <a:schemeClr val="accent1"/>
+          </a:lnRef>
+          <a:fillRef idx="3">
+            <a:schemeClr val="accent1"/>
+          </a:fillRef>
+          <a:effectRef idx="2">
+            <a:schemeClr val="accent1"/>
+          </a:effectRef>
+          <a:fontRef idx="minor">
+            <a:schemeClr val="lt1"/>
+          </a:fontRef>
+        </p:style>
+        <p:txBody>
+          <a:bodyPr rtlCol="0" anchor="ctr" lIns="0" rIns="0" tIns="0" bIns="0"/>
+          <a:lstStyle/>
+          <a:p>
+            <a:pPr algn="ctr"/>
+            <a:r>
+              <a:rPr sz="1200" b="1">
+                <a:solidFill>
+                  <a:srgbClr val="3C3B38"/>
+                </a:solidFill>
+                <a:latin typeface="Aptos"/>
+              </a:rPr>
+              <a:t>EXAMPLE MODEL</a:t>
+            </a:r>
+          </a:p>
+        </p:txBody>
+      </p:sp>
+      <p:sp>
+        <p:nvSpPr>
+          <p:cNvPr id="8" name="TextBox 7"/>
           <p:cNvSpPr txBox="1"/>
           <p:nvPr/>
         </p:nvSpPr>
@@ -13494,14 +14569,14 @@
                 </a:solidFill>
                 <a:latin typeface="Aptos Display"/>
               </a:rPr>
-              <a:t>Vision models mostly use one of three strategies</a:t>
-            </a:r>
-          </a:p>
-        </p:txBody>
-      </p:sp>
-      <p:sp>
-        <p:nvSpPr>
-          <p:cNvPr id="8" name="TextBox 7"/>
+              <a:t>Three ways a model can turn a picture into tokens</a:t>
+            </a:r>
+          </a:p>
+        </p:txBody>
+      </p:sp>
+      <p:sp>
+        <p:nvSpPr>
+          <p:cNvPr id="9" name="TextBox 8"/>
           <p:cNvSpPr txBox="1"/>
           <p:nvPr/>
         </p:nvSpPr>
@@ -13536,14 +14611,14 @@
                 </a:solidFill>
                 <a:latin typeface="Aptos"/>
               </a:rPr>
-              <a:t>All three priced on the same 1920×1080 screenshot</a:t>
-            </a:r>
-          </a:p>
-        </p:txBody>
-      </p:sp>
-      <p:sp>
-        <p:nvSpPr>
-          <p:cNvPr id="9" name="Rounded Rectangle 8"/>
+              <a:t>Three modelled strategies, all priced on the same 1920×1080 screenshot</a:t>
+            </a:r>
+          </a:p>
+        </p:txBody>
+      </p:sp>
+      <p:sp>
+        <p:nvSpPr>
+          <p:cNvPr id="10" name="Rounded Rectangle 9"/>
           <p:cNvSpPr/>
           <p:nvPr/>
         </p:nvSpPr>
@@ -13589,7 +14664,7 @@
       </p:sp>
       <p:pic>
         <p:nvPicPr>
-          <p:cNvPr id="10" name="Picture 9" descr="strategy_squash.png"/>
+          <p:cNvPr id="11" name="Picture 10" descr="strategy_squash.png"/>
           <p:cNvPicPr>
             <a:picLocks noChangeAspect="1"/>
           </p:cNvPicPr>
@@ -13613,7 +14688,7 @@
       </p:pic>
       <p:sp>
         <p:nvSpPr>
-          <p:cNvPr id="11" name="TextBox 10"/>
+          <p:cNvPr id="12" name="TextBox 11"/>
           <p:cNvSpPr txBox="1"/>
           <p:nvPr/>
         </p:nvSpPr>
@@ -13655,7 +14730,7 @@
       </p:sp>
       <p:sp>
         <p:nvSpPr>
-          <p:cNvPr id="12" name="TextBox 11"/>
+          <p:cNvPr id="13" name="TextBox 12"/>
           <p:cNvSpPr txBox="1"/>
           <p:nvPr/>
         </p:nvSpPr>
@@ -13697,7 +14772,7 @@
       </p:sp>
       <p:sp>
         <p:nvSpPr>
-          <p:cNvPr id="13" name="TextBox 12"/>
+          <p:cNvPr id="14" name="TextBox 13"/>
           <p:cNvSpPr txBox="1"/>
           <p:nvPr/>
         </p:nvSpPr>
@@ -13739,7 +14814,7 @@
       </p:sp>
       <p:sp>
         <p:nvSpPr>
-          <p:cNvPr id="14" name="TextBox 13"/>
+          <p:cNvPr id="15" name="TextBox 14"/>
           <p:cNvSpPr txBox="1"/>
           <p:nvPr/>
         </p:nvSpPr>
@@ -13781,7 +14856,7 @@
       </p:sp>
       <p:sp>
         <p:nvSpPr>
-          <p:cNvPr id="15" name="Rounded Rectangle 14"/>
+          <p:cNvPr id="16" name="Rounded Rectangle 15"/>
           <p:cNvSpPr/>
           <p:nvPr/>
         </p:nvSpPr>
@@ -13827,7 +14902,7 @@
       </p:sp>
       <p:pic>
         <p:nvPicPr>
-          <p:cNvPr id="16" name="Picture 15" descr="strategy_tiles.png"/>
+          <p:cNvPr id="17" name="Picture 16" descr="strategy_tiles.png"/>
           <p:cNvPicPr>
             <a:picLocks noChangeAspect="1"/>
           </p:cNvPicPr>
@@ -13851,7 +14926,7 @@
       </p:pic>
       <p:sp>
         <p:nvSpPr>
-          <p:cNvPr id="17" name="TextBox 16"/>
+          <p:cNvPr id="18" name="TextBox 17"/>
           <p:cNvSpPr txBox="1"/>
           <p:nvPr/>
         </p:nvSpPr>
@@ -13893,7 +14968,7 @@
       </p:sp>
       <p:sp>
         <p:nvSpPr>
-          <p:cNvPr id="18" name="TextBox 17"/>
+          <p:cNvPr id="19" name="TextBox 18"/>
           <p:cNvSpPr txBox="1"/>
           <p:nvPr/>
         </p:nvSpPr>
@@ -13935,7 +15010,7 @@
       </p:sp>
       <p:sp>
         <p:nvSpPr>
-          <p:cNvPr id="19" name="TextBox 18"/>
+          <p:cNvPr id="20" name="TextBox 19"/>
           <p:cNvSpPr txBox="1"/>
           <p:nvPr/>
         </p:nvSpPr>
@@ -13977,7 +15052,7 @@
       </p:sp>
       <p:sp>
         <p:nvSpPr>
-          <p:cNvPr id="20" name="TextBox 19"/>
+          <p:cNvPr id="21" name="TextBox 20"/>
           <p:cNvSpPr txBox="1"/>
           <p:nvPr/>
         </p:nvSpPr>
@@ -14019,7 +15094,7 @@
       </p:sp>
       <p:sp>
         <p:nvSpPr>
-          <p:cNvPr id="21" name="Rounded Rectangle 20"/>
+          <p:cNvPr id="22" name="Rounded Rectangle 21"/>
           <p:cNvSpPr/>
           <p:nvPr/>
         </p:nvSpPr>
@@ -14065,7 +15140,7 @@
       </p:sp>
       <p:pic>
         <p:nvPicPr>
-          <p:cNvPr id="22" name="Picture 21" descr="strategy_budget.png"/>
+          <p:cNvPr id="23" name="Picture 22" descr="strategy_budget.png"/>
           <p:cNvPicPr>
             <a:picLocks noChangeAspect="1"/>
           </p:cNvPicPr>
@@ -14089,7 +15164,7 @@
       </p:pic>
       <p:sp>
         <p:nvSpPr>
-          <p:cNvPr id="23" name="TextBox 22"/>
+          <p:cNvPr id="24" name="TextBox 23"/>
           <p:cNvSpPr txBox="1"/>
           <p:nvPr/>
         </p:nvSpPr>
@@ -14131,7 +15206,7 @@
       </p:sp>
       <p:sp>
         <p:nvSpPr>
-          <p:cNvPr id="24" name="TextBox 23"/>
+          <p:cNvPr id="25" name="TextBox 24"/>
           <p:cNvSpPr txBox="1"/>
           <p:nvPr/>
         </p:nvSpPr>
@@ -14166,14 +15241,14 @@
                 </a:solidFill>
                 <a:latin typeface="Aptos"/>
               </a:rPr>
-              <a:t>You set the cap</a:t>
-            </a:r>
-          </a:p>
-        </p:txBody>
-      </p:sp>
-      <p:sp>
-        <p:nvSpPr>
-          <p:cNvPr id="25" name="TextBox 24"/>
+              <a:t>The cap is a setting</a:t>
+            </a:r>
+          </a:p>
+        </p:txBody>
+      </p:sp>
+      <p:sp>
+        <p:nvSpPr>
+          <p:cNvPr id="26" name="TextBox 25"/>
           <p:cNvSpPr txBox="1"/>
           <p:nvPr/>
         </p:nvSpPr>
@@ -14215,7 +15290,7 @@
       </p:sp>
       <p:sp>
         <p:nvSpPr>
-          <p:cNvPr id="26" name="TextBox 25"/>
+          <p:cNvPr id="27" name="TextBox 26"/>
           <p:cNvSpPr txBox="1"/>
           <p:nvPr/>
         </p:nvSpPr>
@@ -14257,7 +15332,7 @@
       </p:sp>
       <p:sp>
         <p:nvSpPr>
-          <p:cNvPr id="27" name="TextBox 26"/>
+          <p:cNvPr id="28" name="TextBox 27"/>
           <p:cNvSpPr txBox="1"/>
           <p:nvPr/>
         </p:nvSpPr>
@@ -14299,7 +15374,7 @@
       </p:sp>
       <p:sp>
         <p:nvSpPr>
-          <p:cNvPr id="28" name="TextBox 27"/>
+          <p:cNvPr id="29" name="TextBox 28"/>
           <p:cNvSpPr txBox="1"/>
           <p:nvPr/>
         </p:nvSpPr>
@@ -14334,7 +15409,7 @@
                 </a:solidFill>
                 <a:latin typeface="Aptos"/>
               </a:rPr>
-              <a:t>the rest of this talk uses “shrink to a budget”, capped at 1,280</a:t>
+              <a:t>the example agent uses “shrink to a budget”, capped at 1,280</a:t>
             </a:r>
           </a:p>
         </p:txBody>
@@ -14593,7 +15668,64 @@
       </p:sp>
       <p:sp>
         <p:nvSpPr>
-          <p:cNvPr id="7" name="TextBox 6"/>
+          <p:cNvPr id="7" name="Rounded Rectangle 6"/>
+          <p:cNvSpPr/>
+          <p:nvPr/>
+        </p:nvSpPr>
+        <p:spPr>
+          <a:xfrm>
+            <a:off x="8387791" y="429768"/>
+            <a:ext cx="1600200" cy="310896"/>
+          </a:xfrm>
+          <a:prstGeom prst="roundRect">
+            <a:avLst>
+              <a:gd name="adj" fmla="val 50000"/>
+            </a:avLst>
+          </a:prstGeom>
+          <a:solidFill>
+            <a:srgbClr val="0B0B0B"/>
+          </a:solidFill>
+          <a:ln w="15875">
+            <a:solidFill>
+              <a:srgbClr val="6B6963"/>
+            </a:solidFill>
+          </a:ln>
+          <a:effectLst/>
+        </p:spPr>
+        <p:style>
+          <a:lnRef idx="1">
+            <a:schemeClr val="accent1"/>
+          </a:lnRef>
+          <a:fillRef idx="3">
+            <a:schemeClr val="accent1"/>
+          </a:fillRef>
+          <a:effectRef idx="2">
+            <a:schemeClr val="accent1"/>
+          </a:effectRef>
+          <a:fontRef idx="minor">
+            <a:schemeClr val="lt1"/>
+          </a:fontRef>
+        </p:style>
+        <p:txBody>
+          <a:bodyPr rtlCol="0" anchor="ctr" lIns="0" rIns="0" tIns="0" bIns="0"/>
+          <a:lstStyle/>
+          <a:p>
+            <a:pPr algn="ctr"/>
+            <a:r>
+              <a:rPr sz="1200" b="1">
+                <a:solidFill>
+                  <a:srgbClr val="FFFFFF"/>
+                </a:solidFill>
+                <a:latin typeface="Aptos"/>
+              </a:rPr>
+              <a:t>PUBLISHED RULE</a:t>
+            </a:r>
+          </a:p>
+        </p:txBody>
+      </p:sp>
+      <p:sp>
+        <p:nvSpPr>
+          <p:cNvPr id="8" name="TextBox 7"/>
           <p:cNvSpPr txBox="1"/>
           <p:nvPr/>
         </p:nvSpPr>
@@ -14635,7 +15767,7 @@
       </p:sp>
       <p:sp>
         <p:nvSpPr>
-          <p:cNvPr id="8" name="TextBox 7"/>
+          <p:cNvPr id="9" name="TextBox 8"/>
           <p:cNvSpPr txBox="1"/>
           <p:nvPr/>
         </p:nvSpPr>
@@ -14677,7 +15809,7 @@
       </p:sp>
       <p:pic>
         <p:nvPicPr>
-          <p:cNvPr id="9" name="Picture 8" descr="real_products.png"/>
+          <p:cNvPr id="10" name="Picture 9" descr="real_products.png"/>
           <p:cNvPicPr>
             <a:picLocks noChangeAspect="1"/>
           </p:cNvPicPr>
@@ -14701,7 +15833,7 @@
       </p:pic>
       <p:sp>
         <p:nvSpPr>
-          <p:cNvPr id="10" name="TextBox 9"/>
+          <p:cNvPr id="11" name="TextBox 10"/>
           <p:cNvSpPr txBox="1"/>
           <p:nvPr/>
         </p:nvSpPr>
@@ -14780,7 +15912,7 @@
       </p:sp>
       <p:sp>
         <p:nvSpPr>
-          <p:cNvPr id="11" name="TextBox 10"/>
+          <p:cNvPr id="12" name="TextBox 11"/>
           <p:cNvSpPr txBox="1"/>
           <p:nvPr/>
         </p:nvSpPr>
@@ -14822,7 +15954,7 @@
       </p:sp>
       <p:sp>
         <p:nvSpPr>
-          <p:cNvPr id="12" name="TextBox 11"/>
+          <p:cNvPr id="13" name="TextBox 12"/>
           <p:cNvSpPr txBox="1"/>
           <p:nvPr/>
         </p:nvSpPr>
@@ -15151,14 +16283,14 @@
                 </a:solidFill>
                 <a:latin typeface="Aptos Display"/>
               </a:rPr>
-              <a:t>Open a terminal in the folder, run this</a:t>
+              <a:t>Open the notebook. Run two cells.</a:t>
             </a:r>
           </a:p>
         </p:txBody>
       </p:sp>
       <p:pic>
         <p:nvPicPr>
-          <p:cNvPr id="8" name="Picture 7" descr="term_setup.png"/>
+          <p:cNvPr id="8" name="Picture 7" descr="qr_colab_light.png"/>
           <p:cNvPicPr>
             <a:picLocks noChangeAspect="1"/>
           </p:cNvPicPr>
@@ -15172,8 +16304,8 @@
         </p:blipFill>
         <p:spPr>
           <a:xfrm>
-            <a:off x="5852160" y="1828800"/>
-            <a:ext cx="5669280" cy="2589414"/>
+            <a:off x="685800" y="1828800"/>
+            <a:ext cx="2286000" cy="2286000"/>
           </a:xfrm>
           <a:prstGeom prst="rect">
             <a:avLst/>
@@ -15188,8 +16320,8 @@
         </p:nvSpPr>
         <p:spPr>
           <a:xfrm>
-            <a:off x="5852160" y="4526280"/>
-            <a:ext cx="5669280" cy="1463040"/>
+            <a:off x="685800" y="4206240"/>
+            <a:ext cx="2286000" cy="822960"/>
           </a:xfrm>
           <a:prstGeom prst="rect">
             <a:avLst/>
@@ -15204,58 +16336,39 @@
           <a:p>
             <a:pPr algn="l">
               <a:lnSpc>
-                <a:spcPct val="120000"/>
-              </a:lnSpc>
-              <a:spcAft>
-                <a:spcPts val="400"/>
-              </a:spcAft>
-            </a:pPr>
-            <a:r>
-              <a:rPr sz="1800" b="1">
-                <a:solidFill>
-                  <a:srgbClr val="0B0B0B"/>
-                </a:solidFill>
-                <a:latin typeface="Aptos"/>
-              </a:rPr>
-              <a:t>How to get a terminal in the folder</a:t>
-            </a:r>
-          </a:p>
-          <a:p>
-            <a:pPr algn="l">
-              <a:lnSpc>
-                <a:spcPct val="120000"/>
-              </a:lnSpc>
-              <a:spcAft>
-                <a:spcPts val="400"/>
-              </a:spcAft>
-            </a:pPr>
-            <a:r>
-              <a:rPr sz="1600" b="0">
+                <a:spcPct val="115000"/>
+              </a:lnSpc>
+              <a:spcAft>
+                <a:spcPts val="0"/>
+              </a:spcAft>
+            </a:pPr>
+            <a:r>
+              <a:rPr sz="1500" b="1">
                 <a:solidFill>
                   <a:srgbClr val="3C3B38"/>
                 </a:solidFill>
                 <a:latin typeface="Aptos"/>
               </a:rPr>
-              <a:t>1  Mac: ⌘-Space, type Terminal.   Windows: Start, type PowerShell.</a:t>
-            </a:r>
-          </a:p>
-          <a:p>
-            <a:pPr algn="l">
-              <a:lnSpc>
-                <a:spcPct val="120000"/>
-              </a:lnSpc>
-              <a:spcAft>
-                <a:spcPts val="400"/>
-              </a:spcAft>
-            </a:pPr>
-            <a:r>
-              <a:rPr sz="1600" b="0">
-                <a:solidFill>
-                  <a:srgbClr val="3C3B38"/>
-                </a:solidFill>
-                <a:latin typeface="Aptos"/>
-              </a:rPr>
-              <a:t>2  Type  cd  and a space, drag the folder into the window, press Enter.</a:t>
+              <a:t>Scan: opens in Colab</a:t>
+            </a:r>
+          </a:p>
+          <a:p>
+            <a:pPr algn="l">
+              <a:lnSpc>
+                <a:spcPct val="115000"/>
+              </a:lnSpc>
+              <a:spcAft>
+                <a:spcPts val="0"/>
+              </a:spcAft>
+            </a:pPr>
+            <a:r>
+              <a:rPr sz="1400" b="0">
+                <a:solidFill>
+                  <a:srgbClr val="6B6963"/>
+                </a:solidFill>
+                <a:latin typeface="Aptos"/>
+              </a:rPr>
+              <a:t>Google account + wifi</a:t>
             </a:r>
           </a:p>
         </p:txBody>
@@ -15268,8 +16381,8 @@
         </p:nvSpPr>
         <p:spPr>
           <a:xfrm>
-            <a:off x="685800" y="1920240"/>
-            <a:ext cx="4937760" cy="2377440"/>
+            <a:off x="3429000" y="1828800"/>
+            <a:ext cx="3291840" cy="3108960"/>
           </a:xfrm>
           <a:prstGeom prst="rect">
             <a:avLst/>
@@ -15291,86 +16404,268 @@
               </a:spcAft>
             </a:pPr>
             <a:r>
-              <a:rPr sz="2600" b="0">
+              <a:rPr sz="2200" b="1">
+                <a:solidFill>
+                  <a:srgbClr val="1C66C2"/>
+                </a:solidFill>
+                <a:latin typeface="Aptos"/>
+              </a:rPr>
+              <a:t>1  </a:t>
+            </a:r>
+            <a:r>
+              <a:rPr sz="2200" b="0">
+                <a:solidFill>
+                  <a:srgbClr val="0B0B0B"/>
+                </a:solidFill>
+                <a:latin typeface="Aptos"/>
+              </a:rPr>
+              <a:t>Press Play on</a:t>
+            </a:r>
+          </a:p>
+          <a:p>
+            <a:pPr algn="l">
+              <a:lnSpc>
+                <a:spcPct val="105000"/>
+              </a:lnSpc>
+              <a:spcAft>
+                <a:spcPts val="0"/>
+              </a:spcAft>
+            </a:pPr>
+            <a:r>
+              <a:rPr sz="2200" b="1">
+                <a:solidFill>
+                  <a:srgbClr val="0B0B0B"/>
+                </a:solidFill>
+                <a:latin typeface="Aptos"/>
+              </a:rPr>
+              <a:t>    Run this first</a:t>
+            </a:r>
+          </a:p>
+          <a:p>
+            <a:pPr algn="l">
+              <a:lnSpc>
+                <a:spcPct val="105000"/>
+              </a:lnSpc>
+              <a:spcAft>
+                <a:spcPts val="0"/>
+              </a:spcAft>
+            </a:pPr>
+            <a:r>
+              <a:rPr sz="2200" b="0">
+                <a:solidFill>
+                  <a:srgbClr val="0B0B0B"/>
+                </a:solidFill>
+                <a:latin typeface="Aptos"/>
+              </a:rPr>
+              <a:t/>
+            </a:r>
+          </a:p>
+          <a:p>
+            <a:pPr algn="l">
+              <a:lnSpc>
+                <a:spcPct val="105000"/>
+              </a:lnSpc>
+              <a:spcAft>
+                <a:spcPts val="0"/>
+              </a:spcAft>
+            </a:pPr>
+            <a:r>
+              <a:rPr sz="2200" b="1">
+                <a:solidFill>
+                  <a:srgbClr val="1C66C2"/>
+                </a:solidFill>
+                <a:latin typeface="Aptos"/>
+              </a:rPr>
+              <a:t>2  </a:t>
+            </a:r>
+            <a:r>
+              <a:rPr sz="2200" b="0">
+                <a:solidFill>
+                  <a:srgbClr val="0B0B0B"/>
+                </a:solidFill>
+                <a:latin typeface="Aptos"/>
+              </a:rPr>
+              <a:t>Press Play on</a:t>
+            </a:r>
+          </a:p>
+          <a:p>
+            <a:pPr algn="l">
+              <a:lnSpc>
+                <a:spcPct val="105000"/>
+              </a:lnSpc>
+              <a:spcAft>
+                <a:spcPts val="0"/>
+              </a:spcAft>
+            </a:pPr>
+            <a:r>
+              <a:rPr sz="2200" b="1">
+                <a:solidFill>
+                  <a:srgbClr val="0B0B0B"/>
+                </a:solidFill>
+                <a:latin typeface="Aptos"/>
+              </a:rPr>
+              <a:t>    Check the setup</a:t>
+            </a:r>
+          </a:p>
+          <a:p>
+            <a:pPr algn="l">
+              <a:lnSpc>
+                <a:spcPct val="105000"/>
+              </a:lnSpc>
+              <a:spcAft>
+                <a:spcPts val="0"/>
+              </a:spcAft>
+            </a:pPr>
+            <a:r>
+              <a:rPr sz="2200" b="0">
+                <a:solidFill>
+                  <a:srgbClr val="0B0B0B"/>
+                </a:solidFill>
+                <a:latin typeface="Aptos"/>
+              </a:rPr>
+              <a:t/>
+            </a:r>
+          </a:p>
+          <a:p>
+            <a:pPr algn="l">
+              <a:lnSpc>
+                <a:spcPct val="105000"/>
+              </a:lnSpc>
+              <a:spcAft>
+                <a:spcPts val="0"/>
+              </a:spcAft>
+            </a:pPr>
+            <a:r>
+              <a:rPr sz="2200" b="0">
+                <a:solidFill>
+                  <a:srgbClr val="0B0B0B"/>
+                </a:solidFill>
+                <a:latin typeface="Aptos"/>
+              </a:rPr>
+              <a:t>3  Look for </a:t>
+            </a:r>
+            <a:r>
+              <a:rPr sz="2200" b="1">
+                <a:solidFill>
+                  <a:srgbClr val="1C66C2"/>
+                </a:solidFill>
+                <a:latin typeface="Aptos"/>
+              </a:rPr>
+              <a:t>PASS</a:t>
+            </a:r>
+          </a:p>
+        </p:txBody>
+      </p:sp>
+      <p:sp>
+        <p:nvSpPr>
+          <p:cNvPr id="11" name="TextBox 10"/>
+          <p:cNvSpPr txBox="1"/>
+          <p:nvPr/>
+        </p:nvSpPr>
+        <p:spPr>
+          <a:xfrm>
+            <a:off x="685800" y="5257800"/>
+            <a:ext cx="5852160" cy="914400"/>
+          </a:xfrm>
+          <a:prstGeom prst="rect">
+            <a:avLst/>
+          </a:prstGeom>
+          <a:noFill/>
+        </p:spPr>
+        <p:txBody>
+          <a:bodyPr wrap="square" lIns="0" rIns="0" tIns="0" bIns="0" anchor="t">
+            <a:spAutoFit/>
+          </a:bodyPr>
+          <a:lstStyle/>
+          <a:p>
+            <a:pPr algn="l">
+              <a:lnSpc>
+                <a:spcPct val="115000"/>
+              </a:lnSpc>
+              <a:spcAft>
+                <a:spcPts val="0"/>
+              </a:spcAft>
+            </a:pPr>
+            <a:r>
+              <a:rPr sz="2200" b="1">
                 <a:solidFill>
                   <a:srgbClr val="3C3B38"/>
                 </a:solidFill>
                 <a:latin typeface="Aptos"/>
               </a:rPr>
-              <a:t>Look for </a:t>
-            </a:r>
-            <a:r>
-              <a:rPr sz="2600" b="1">
-                <a:solidFill>
-                  <a:srgbClr val="1C66C2"/>
-                </a:solidFill>
-                <a:latin typeface="Aptos"/>
-              </a:rPr>
-              <a:t>PASS</a:t>
-            </a:r>
-          </a:p>
-          <a:p>
-            <a:pPr algn="l">
-              <a:lnSpc>
-                <a:spcPct val="105000"/>
-              </a:lnSpc>
-              <a:spcAft>
-                <a:spcPts val="0"/>
-              </a:spcAft>
-            </a:pPr>
-            <a:r>
-              <a:rPr sz="2600" b="0">
-                <a:solidFill>
-                  <a:srgbClr val="3C3B38"/>
-                </a:solidFill>
-                <a:latin typeface="Aptos"/>
-              </a:rPr>
-              <a:t/>
-            </a:r>
-          </a:p>
-          <a:p>
-            <a:pPr algn="l">
-              <a:lnSpc>
-                <a:spcPct val="105000"/>
-              </a:lnSpc>
-              <a:spcAft>
-                <a:spcPts val="0"/>
-              </a:spcAft>
-            </a:pPr>
-            <a:r>
-              <a:rPr sz="2600" b="1">
-                <a:solidFill>
-                  <a:srgbClr val="3C3B38"/>
-                </a:solidFill>
-                <a:latin typeface="Aptos"/>
-              </a:rPr>
-              <a:t>No installs.  No API key.</a:t>
-            </a:r>
-          </a:p>
-          <a:p>
-            <a:pPr algn="l">
-              <a:lnSpc>
-                <a:spcPct val="105000"/>
-              </a:lnSpc>
-              <a:spcAft>
-                <a:spcPts val="0"/>
-              </a:spcAft>
-            </a:pPr>
-            <a:r>
-              <a:rPr sz="2600" b="1">
-                <a:solidFill>
-                  <a:srgbClr val="3C3B38"/>
-                </a:solidFill>
-                <a:latin typeface="Aptos"/>
-              </a:rPr>
-              <a:t>No internet needed.</a:t>
-            </a:r>
+              <a:t>Nothing to install.  No API key.</a:t>
+            </a:r>
+          </a:p>
+          <a:p>
+            <a:pPr algn="l">
+              <a:lnSpc>
+                <a:spcPct val="115000"/>
+              </a:lnSpc>
+              <a:spcAft>
+                <a:spcPts val="0"/>
+              </a:spcAft>
+            </a:pPr>
+            <a:r>
+              <a:rPr sz="1800" b="0">
+                <a:solidFill>
+                  <a:srgbClr val="6B6963"/>
+                </a:solidFill>
+                <a:latin typeface="Aptos"/>
+              </a:rPr>
+              <a:t>No Google account? Pair with a neighbour.</a:t>
+            </a:r>
+          </a:p>
+        </p:txBody>
+      </p:sp>
+      <p:sp>
+        <p:nvSpPr>
+          <p:cNvPr id="12" name="Rounded Rectangle 11"/>
+          <p:cNvSpPr/>
+          <p:nvPr/>
+        </p:nvSpPr>
+        <p:spPr>
+          <a:xfrm>
+            <a:off x="6903720" y="1783080"/>
+            <a:ext cx="4617720" cy="4434840"/>
+          </a:xfrm>
+          <a:prstGeom prst="roundRect">
+            <a:avLst>
+              <a:gd name="adj" fmla="val 7000"/>
+            </a:avLst>
+          </a:prstGeom>
+          <a:solidFill>
+            <a:srgbClr val="E6EFFA"/>
+          </a:solidFill>
+          <a:ln>
+            <a:noFill/>
+          </a:ln>
+          <a:effectLst/>
+        </p:spPr>
+        <p:style>
+          <a:lnRef idx="1">
+            <a:schemeClr val="accent1"/>
+          </a:lnRef>
+          <a:fillRef idx="3">
+            <a:schemeClr val="accent1"/>
+          </a:fillRef>
+          <a:effectRef idx="2">
+            <a:schemeClr val="accent1"/>
+          </a:effectRef>
+          <a:fontRef idx="minor">
+            <a:schemeClr val="lt1"/>
+          </a:fontRef>
+        </p:style>
+        <p:txBody>
+          <a:bodyPr rtlCol="0" anchor="ctr"/>
+          <a:lstStyle/>
+          <a:p>
+            <a:pPr algn="ctr"/>
           </a:p>
         </p:txBody>
       </p:sp>
       <p:pic>
         <p:nvPicPr>
-          <p:cNvPr id="11" name="Picture 10" descr="qr_light.png"/>
+          <p:cNvPr id="13" name="Picture 12" descr="term_setup.png"/>
           <p:cNvPicPr>
             <a:picLocks noChangeAspect="1"/>
           </p:cNvPicPr>
@@ -15384,8 +16679,8 @@
         </p:blipFill>
         <p:spPr>
           <a:xfrm>
-            <a:off x="685800" y="4069080"/>
-            <a:ext cx="1737360" cy="1737360"/>
+            <a:off x="7132320" y="2011680"/>
+            <a:ext cx="4160520" cy="1900296"/>
           </a:xfrm>
           <a:prstGeom prst="rect">
             <a:avLst/>
@@ -15394,14 +16689,14 @@
       </p:pic>
       <p:sp>
         <p:nvSpPr>
-          <p:cNvPr id="12" name="TextBox 11"/>
+          <p:cNvPr id="14" name="TextBox 13"/>
           <p:cNvSpPr txBox="1"/>
           <p:nvPr/>
         </p:nvSpPr>
         <p:spPr>
           <a:xfrm>
-            <a:off x="2651760" y="4343400"/>
-            <a:ext cx="3108960" cy="1280160"/>
+            <a:off x="7132320" y="4069080"/>
+            <a:ext cx="4206240" cy="2103120"/>
           </a:xfrm>
           <a:prstGeom prst="rect">
             <a:avLst/>
@@ -15419,17 +16714,54 @@
                 <a:spcPct val="120000"/>
               </a:lnSpc>
               <a:spcAft>
-                <a:spcPts val="0"/>
+                <a:spcPts val="300"/>
               </a:spcAft>
             </a:pPr>
             <a:r>
               <a:rPr sz="1800" b="1">
                 <a:solidFill>
+                  <a:srgbClr val="0B0B0B"/>
+                </a:solidFill>
+                <a:latin typeface="Aptos"/>
+              </a:rPr>
+              <a:t>Have Python? Use a terminal.</a:t>
+            </a:r>
+            <a:r>
+              <a:rPr sz="1400" b="0">
+                <a:solidFill>
+                  <a:srgbClr val="6B6963"/>
+                </a:solidFill>
+                <a:latin typeface="Aptos"/>
+              </a:rPr>
+              <a:t>  works offline</a:t>
+            </a:r>
+          </a:p>
+          <a:p>
+            <a:pPr algn="l">
+              <a:lnSpc>
+                <a:spcPct val="120000"/>
+              </a:lnSpc>
+              <a:spcAft>
+                <a:spcPts val="300"/>
+              </a:spcAft>
+            </a:pPr>
+            <a:r>
+              <a:rPr sz="1500" b="0">
+                <a:solidFill>
                   <a:srgbClr val="3C3B38"/>
                 </a:solidFill>
                 <a:latin typeface="Aptos"/>
               </a:rPr>
-              <a:t>Get the files</a:t>
+              <a:t>Get the folder: </a:t>
+            </a:r>
+            <a:r>
+              <a:rPr sz="1500" b="1">
+                <a:solidFill>
+                  <a:srgbClr val="1C66C2"/>
+                </a:solidFill>
+                <a:latin typeface="Aptos"/>
+              </a:rPr>
+              <a:t>github.com/ieee-ai/agentic-ai-26</a:t>
             </a:r>
           </a:p>
           <a:p>
@@ -15438,17 +16770,17 @@
                 <a:spcPct val="120000"/>
               </a:lnSpc>
               <a:spcAft>
-                <a:spcPts val="0"/>
-              </a:spcAft>
-            </a:pPr>
-            <a:r>
-              <a:rPr sz="1500" b="1">
-                <a:solidFill>
-                  <a:srgbClr val="1C66C2"/>
-                </a:solidFill>
-                <a:latin typeface="Aptos"/>
-              </a:rPr>
-              <a:t>github.com/ieee-ai/agentic-ai-26</a:t>
+                <a:spcPts val="300"/>
+              </a:spcAft>
+            </a:pPr>
+            <a:r>
+              <a:rPr sz="1500" b="0">
+                <a:solidFill>
+                  <a:srgbClr val="3C3B38"/>
+                </a:solidFill>
+                <a:latin typeface="Aptos"/>
+              </a:rPr>
+              <a:t>1  Mac: ⌘-Space, type Terminal.</a:t>
             </a:r>
           </a:p>
           <a:p>
@@ -15457,17 +16789,17 @@
                 <a:spcPct val="120000"/>
               </a:lnSpc>
               <a:spcAft>
-                <a:spcPts val="0"/>
+                <a:spcPts val="300"/>
               </a:spcAft>
             </a:pPr>
             <a:r>
               <a:rPr sz="1500" b="0">
                 <a:solidFill>
-                  <a:srgbClr val="1C66C2"/>
-                </a:solidFill>
-                <a:latin typeface="Aptos"/>
-              </a:rPr>
-              <a:t>folder  Saving-the-Tokens</a:t>
+                  <a:srgbClr val="3C3B38"/>
+                </a:solidFill>
+                <a:latin typeface="Aptos"/>
+              </a:rPr>
+              <a:t>    Windows: Start, type PowerShell.</a:t>
             </a:r>
           </a:p>
           <a:p>
@@ -15476,43 +16808,43 @@
                 <a:spcPct val="120000"/>
               </a:lnSpc>
               <a:spcAft>
-                <a:spcPts val="0"/>
-              </a:spcAft>
-            </a:pPr>
-            <a:r>
-              <a:rPr sz="1800" b="0">
+                <a:spcPts val="300"/>
+              </a:spcAft>
+            </a:pPr>
+            <a:r>
+              <a:rPr sz="1500" b="0">
+                <a:solidFill>
+                  <a:srgbClr val="3C3B38"/>
+                </a:solidFill>
+                <a:latin typeface="Aptos"/>
+              </a:rPr>
+              <a:t>2  cd, a space, drag the folder in, Enter.</a:t>
+            </a:r>
+          </a:p>
+          <a:p>
+            <a:pPr algn="l">
+              <a:lnSpc>
+                <a:spcPct val="120000"/>
+              </a:lnSpc>
+              <a:spcAft>
+                <a:spcPts val="300"/>
+              </a:spcAft>
+            </a:pPr>
+            <a:r>
+              <a:rPr sz="1500" b="0">
                 <a:solidFill>
                   <a:srgbClr val="6B6963"/>
                 </a:solidFill>
                 <a:latin typeface="Aptos"/>
               </a:rPr>
-              <a:t>Windows: use py, not python3</a:t>
-            </a:r>
-          </a:p>
-          <a:p>
-            <a:pPr algn="l">
-              <a:lnSpc>
-                <a:spcPct val="120000"/>
-              </a:lnSpc>
-              <a:spcAft>
-                <a:spcPts val="0"/>
-              </a:spcAft>
-            </a:pPr>
-            <a:r>
-              <a:rPr sz="1800" b="0">
-                <a:solidFill>
-                  <a:srgbClr val="6B6963"/>
-                </a:solidFill>
-                <a:latin typeface="Aptos"/>
-              </a:rPr>
-              <a:t>No Python? Colab link in the README</a:t>
-            </a:r>
-          </a:p>
-        </p:txBody>
-      </p:sp>
-      <p:sp>
-        <p:nvSpPr>
-          <p:cNvPr id="13" name="TextBox 12"/>
+              <a:t>Windows: py, not python3</a:t>
+            </a:r>
+          </a:p>
+        </p:txBody>
+      </p:sp>
+      <p:sp>
+        <p:nvSpPr>
+          <p:cNvPr id="15" name="TextBox 14"/>
           <p:cNvSpPr txBox="1"/>
           <p:nvPr/>
         </p:nvSpPr>

--- a/Saving-the-Tokens/slides/Saving_the_Tokens.pptx
+++ b/Saving-the-Tokens/slides/Saving_the_Tokens.pptx
@@ -24,6 +24,7 @@
     <p:sldId id="272" r:id="rId23"/>
     <p:sldId id="273" r:id="rId24"/>
     <p:sldId id="274" r:id="rId25"/>
+    <p:sldId id="275" r:id="rId26"/>
   </p:sldIdLst>
   <p:sldSz cx="12191695" cy="6858000" type="screen4x3"/>
   <p:notesSz cx="6858000" cy="9144000"/>
@@ -9689,7 +9690,7 @@
                 </a:solidFill>
                 <a:latin typeface="Aptos Display"/>
               </a:rPr>
-              <a:t>Monday morning: find YOUR big number</a:t>
+              <a:t>Four things that are easy to get wrong</a:t>
             </a:r>
           </a:p>
         </p:txBody>
@@ -9703,7 +9704,7 @@
         <p:spPr>
           <a:xfrm>
             <a:off x="685800" y="1737360"/>
-            <a:ext cx="2514600" cy="1874519"/>
+            <a:ext cx="5272887" cy="2103120"/>
           </a:xfrm>
           <a:prstGeom prst="roundRect">
             <a:avLst>
@@ -9748,8 +9749,8 @@
         </p:nvSpPr>
         <p:spPr>
           <a:xfrm>
-            <a:off x="960120" y="1901952"/>
-            <a:ext cx="914400" cy="640080"/>
+            <a:off x="960120" y="1920240"/>
+            <a:ext cx="4724247" cy="731520"/>
           </a:xfrm>
           <a:prstGeom prst="rect">
             <a:avLst/>
@@ -9771,13 +9772,13 @@
               </a:spcAft>
             </a:pPr>
             <a:r>
-              <a:rPr sz="4000" b="1">
-                <a:solidFill>
-                  <a:srgbClr val="5AA3F0"/>
+              <a:rPr sz="3800" b="1">
+                <a:solidFill>
+                  <a:srgbClr val="F0834E"/>
                 </a:solidFill>
                 <a:latin typeface="Aptos Display"/>
               </a:rPr>
-              <a:t>1</a:t>
+              <a:t>2.0×</a:t>
             </a:r>
           </a:p>
         </p:txBody>
@@ -9790,8 +9791,8 @@
         </p:nvSpPr>
         <p:spPr>
           <a:xfrm>
-            <a:off x="960120" y="2651760"/>
-            <a:ext cx="2057400" cy="914400"/>
+            <a:off x="960120" y="2606040"/>
+            <a:ext cx="4724247" cy="365760"/>
           </a:xfrm>
           <a:prstGeom prst="rect">
             <a:avLst/>
@@ -9813,27 +9814,69 @@
               </a:spcAft>
             </a:pPr>
             <a:r>
-              <a:rPr sz="1700" b="0">
+              <a:rPr sz="1900" b="1">
+                <a:solidFill>
+                  <a:srgbClr val="FFFFFF"/>
+                </a:solidFill>
+                <a:latin typeface="Aptos"/>
+              </a:rPr>
+              <a:t>Caching + pruning is worse than caching</a:t>
+            </a:r>
+          </a:p>
+        </p:txBody>
+      </p:sp>
+      <p:sp>
+        <p:nvSpPr>
+          <p:cNvPr id="11" name="TextBox 10"/>
+          <p:cNvSpPr txBox="1"/>
+          <p:nvPr/>
+        </p:nvSpPr>
+        <p:spPr>
+          <a:xfrm>
+            <a:off x="960120" y="2999232"/>
+            <a:ext cx="4724247" cy="777240"/>
+          </a:xfrm>
+          <a:prstGeom prst="rect">
+            <a:avLst/>
+          </a:prstGeom>
+          <a:noFill/>
+        </p:spPr>
+        <p:txBody>
+          <a:bodyPr wrap="square" lIns="0" rIns="0" tIns="0" bIns="0" anchor="t">
+            <a:spAutoFit/>
+          </a:bodyPr>
+          <a:lstStyle/>
+          <a:p>
+            <a:pPr algn="l">
+              <a:lnSpc>
+                <a:spcPct val="112000"/>
+              </a:lnSpc>
+              <a:spcAft>
+                <a:spcPts val="0"/>
+              </a:spcAft>
+            </a:pPr>
+            <a:r>
+              <a:rPr sz="1400" b="0">
                 <a:solidFill>
                   <a:srgbClr val="D7D5CE"/>
                 </a:solidFill>
                 <a:latin typeface="Aptos"/>
               </a:rPr>
-              <a:t>Log input tokens on every model call.</a:t>
-            </a:r>
-          </a:p>
-        </p:txBody>
-      </p:sp>
-      <p:sp>
-        <p:nvSpPr>
-          <p:cNvPr id="11" name="Rounded Rectangle 10"/>
+              <a:t>128,630 vs 63,133 tokens. Sliding the window every turn changes the start of the prompt, so the cache misses. Prune in batches.</a:t>
+            </a:r>
+          </a:p>
+        </p:txBody>
+      </p:sp>
+      <p:sp>
+        <p:nvSpPr>
+          <p:cNvPr id="12" name="Rounded Rectangle 11"/>
           <p:cNvSpPr/>
           <p:nvPr/>
         </p:nvSpPr>
         <p:spPr>
           <a:xfrm>
-            <a:off x="3410712" y="1737360"/>
-            <a:ext cx="2514600" cy="1874519"/>
+            <a:off x="6233007" y="1737360"/>
+            <a:ext cx="5272887" cy="2103120"/>
           </a:xfrm>
           <a:prstGeom prst="roundRect">
             <a:avLst>
@@ -9872,14 +9915,14 @@
       </p:sp>
       <p:sp>
         <p:nvSpPr>
-          <p:cNvPr id="12" name="TextBox 11"/>
+          <p:cNvPr id="13" name="TextBox 12"/>
           <p:cNvSpPr txBox="1"/>
           <p:nvPr/>
         </p:nvSpPr>
         <p:spPr>
           <a:xfrm>
-            <a:off x="3685032" y="1901952"/>
-            <a:ext cx="914400" cy="640080"/>
+            <a:off x="6507327" y="1920240"/>
+            <a:ext cx="4724247" cy="731520"/>
           </a:xfrm>
           <a:prstGeom prst="rect">
             <a:avLst/>
@@ -9901,27 +9944,27 @@
               </a:spcAft>
             </a:pPr>
             <a:r>
-              <a:rPr sz="4000" b="1">
+              <a:rPr sz="3800" b="1">
                 <a:solidFill>
                   <a:srgbClr val="5AA3F0"/>
                 </a:solidFill>
                 <a:latin typeface="Aptos Display"/>
               </a:rPr>
-              <a:t>2</a:t>
-            </a:r>
-          </a:p>
-        </p:txBody>
-      </p:sp>
-      <p:sp>
-        <p:nvSpPr>
-          <p:cNvPr id="13" name="TextBox 12"/>
+              <a:t>turn 80</a:t>
+            </a:r>
+          </a:p>
+        </p:txBody>
+      </p:sp>
+      <p:sp>
+        <p:nvSpPr>
+          <p:cNvPr id="14" name="TextBox 13"/>
           <p:cNvSpPr txBox="1"/>
           <p:nvPr/>
         </p:nvSpPr>
         <p:spPr>
           <a:xfrm>
-            <a:off x="3685032" y="2651760"/>
-            <a:ext cx="2057400" cy="914400"/>
+            <a:off x="6507327" y="2606040"/>
+            <a:ext cx="4724247" cy="365760"/>
           </a:xfrm>
           <a:prstGeom prst="rect">
             <a:avLst/>
@@ -9943,27 +9986,69 @@
               </a:spcAft>
             </a:pPr>
             <a:r>
-              <a:rPr sz="1700" b="0">
+              <a:rPr sz="1900" b="1">
+                <a:solidFill>
+                  <a:srgbClr val="FFFFFF"/>
+                </a:solidFill>
+                <a:latin typeface="Aptos"/>
+              </a:rPr>
+              <a:t>Caching buys money, not room</a:t>
+            </a:r>
+          </a:p>
+        </p:txBody>
+      </p:sp>
+      <p:sp>
+        <p:nvSpPr>
+          <p:cNvPr id="15" name="TextBox 14"/>
+          <p:cNvSpPr txBox="1"/>
+          <p:nvPr/>
+        </p:nvSpPr>
+        <p:spPr>
+          <a:xfrm>
+            <a:off x="6507327" y="2999232"/>
+            <a:ext cx="4724247" cy="777240"/>
+          </a:xfrm>
+          <a:prstGeom prst="rect">
+            <a:avLst/>
+          </a:prstGeom>
+          <a:noFill/>
+        </p:spPr>
+        <p:txBody>
+          <a:bodyPr wrap="square" lIns="0" rIns="0" tIns="0" bIns="0" anchor="t">
+            <a:spAutoFit/>
+          </a:bodyPr>
+          <a:lstStyle/>
+          <a:p>
+            <a:pPr algn="l">
+              <a:lnSpc>
+                <a:spcPct val="112000"/>
+              </a:lnSpc>
+              <a:spcAft>
+                <a:spcPts val="0"/>
+              </a:spcAft>
+            </a:pPr>
+            <a:r>
+              <a:rPr sz="1400" b="0">
                 <a:solidFill>
                   <a:srgbClr val="D7D5CE"/>
                 </a:solidFill>
                 <a:latin typeface="Aptos"/>
               </a:rPr>
-              <a:t>Run  bill_report.py  on the log.</a:t>
-            </a:r>
-          </a:p>
-        </p:txBody>
-      </p:sp>
-      <p:sp>
-        <p:nvSpPr>
-          <p:cNvPr id="14" name="Rounded Rectangle 13"/>
+              <a:t>The 128,000-token window fills at turn 80 with or without caching. Only dropping content moves it: turn 337 with old screenshots dropped.</a:t>
+            </a:r>
+          </a:p>
+        </p:txBody>
+      </p:sp>
+      <p:sp>
+        <p:nvSpPr>
+          <p:cNvPr id="16" name="Rounded Rectangle 15"/>
           <p:cNvSpPr/>
           <p:nvPr/>
         </p:nvSpPr>
         <p:spPr>
           <a:xfrm>
-            <a:off x="6135624" y="1737360"/>
-            <a:ext cx="2514600" cy="1874519"/>
+            <a:off x="685800" y="4069080"/>
+            <a:ext cx="5272887" cy="2103120"/>
           </a:xfrm>
           <a:prstGeom prst="roundRect">
             <a:avLst>
@@ -10002,14 +10087,14 @@
       </p:sp>
       <p:sp>
         <p:nvSpPr>
-          <p:cNvPr id="15" name="TextBox 14"/>
+          <p:cNvPr id="17" name="TextBox 16"/>
           <p:cNvSpPr txBox="1"/>
           <p:nvPr/>
         </p:nvSpPr>
         <p:spPr>
           <a:xfrm>
-            <a:off x="6409944" y="1901952"/>
-            <a:ext cx="914400" cy="640080"/>
+            <a:off x="960120" y="4251960"/>
+            <a:ext cx="4724247" cy="731520"/>
           </a:xfrm>
           <a:prstGeom prst="rect">
             <a:avLst/>
@@ -10031,27 +10116,27 @@
               </a:spcAft>
             </a:pPr>
             <a:r>
-              <a:rPr sz="4000" b="1">
+              <a:rPr sz="3800" b="1">
                 <a:solidFill>
                   <a:srgbClr val="5AA3F0"/>
                 </a:solidFill>
                 <a:latin typeface="Aptos Display"/>
               </a:rPr>
-              <a:t>3</a:t>
-            </a:r>
-          </a:p>
-        </p:txBody>
-      </p:sp>
-      <p:sp>
-        <p:nvSpPr>
-          <p:cNvPr id="16" name="TextBox 15"/>
+              <a:t>1,105 to 4,784</a:t>
+            </a:r>
+          </a:p>
+        </p:txBody>
+      </p:sp>
+      <p:sp>
+        <p:nvSpPr>
+          <p:cNvPr id="18" name="TextBox 17"/>
           <p:cNvSpPr txBox="1"/>
           <p:nvPr/>
         </p:nvSpPr>
         <p:spPr>
           <a:xfrm>
-            <a:off x="6409944" y="2651760"/>
-            <a:ext cx="2057400" cy="914400"/>
+            <a:off x="960120" y="4937760"/>
+            <a:ext cx="4724247" cy="365760"/>
           </a:xfrm>
           <a:prstGeom prst="rect">
             <a:avLst/>
@@ -10073,27 +10158,69 @@
               </a:spcAft>
             </a:pPr>
             <a:r>
-              <a:rPr sz="1700" b="0">
+              <a:rPr sz="1900" b="1">
+                <a:solidFill>
+                  <a:srgbClr val="FFFFFF"/>
+                </a:solidFill>
+                <a:latin typeface="Aptos"/>
+              </a:rPr>
+              <a:t>Resolution is a choice, not a fact</a:t>
+            </a:r>
+          </a:p>
+        </p:txBody>
+      </p:sp>
+      <p:sp>
+        <p:nvSpPr>
+          <p:cNvPr id="19" name="TextBox 18"/>
+          <p:cNvSpPr txBox="1"/>
+          <p:nvPr/>
+        </p:nvSpPr>
+        <p:spPr>
+          <a:xfrm>
+            <a:off x="960120" y="5330952"/>
+            <a:ext cx="4724247" cy="777240"/>
+          </a:xfrm>
+          <a:prstGeom prst="rect">
+            <a:avLst/>
+          </a:prstGeom>
+          <a:noFill/>
+        </p:spPr>
+        <p:txBody>
+          <a:bodyPr wrap="square" lIns="0" rIns="0" tIns="0" bIns="0" anchor="t">
+            <a:spAutoFit/>
+          </a:bodyPr>
+          <a:lstStyle/>
+          <a:p>
+            <a:pPr algn="l">
+              <a:lnSpc>
+                <a:spcPct val="112000"/>
+              </a:lnSpc>
+              <a:spcAft>
+                <a:spcPts val="0"/>
+              </a:spcAft>
+            </a:pPr>
+            <a:r>
+              <a:rPr sz="1400" b="0">
                 <a:solidFill>
                   <a:srgbClr val="D7D5CE"/>
                 </a:solidFill>
                 <a:latin typeface="Aptos"/>
               </a:rPr>
-              <a:t>See what dominates: the prefix, or what each turn adds.</a:t>
-            </a:r>
-          </a:p>
-        </p:txBody>
-      </p:sp>
-      <p:sp>
-        <p:nvSpPr>
-          <p:cNvPr id="17" name="Rounded Rectangle 16"/>
+              <a:t>One 4K screenshot: 1,105 on OpenAI's rule, 1,560 on Claude standard, 4,784 on Claude high-resolution. Measure at the size you ship.</a:t>
+            </a:r>
+          </a:p>
+        </p:txBody>
+      </p:sp>
+      <p:sp>
+        <p:nvSpPr>
+          <p:cNvPr id="20" name="Rounded Rectangle 19"/>
           <p:cNvSpPr/>
           <p:nvPr/>
         </p:nvSpPr>
         <p:spPr>
           <a:xfrm>
-            <a:off x="8860536" y="1737360"/>
-            <a:ext cx="2514600" cy="1874519"/>
+            <a:off x="6233007" y="4069080"/>
+            <a:ext cx="5272887" cy="2103120"/>
           </a:xfrm>
           <a:prstGeom prst="roundRect">
             <a:avLst>
@@ -10132,14 +10259,14 @@
       </p:sp>
       <p:sp>
         <p:nvSpPr>
-          <p:cNvPr id="18" name="TextBox 17"/>
+          <p:cNvPr id="21" name="TextBox 20"/>
           <p:cNvSpPr txBox="1"/>
           <p:nvPr/>
         </p:nvSpPr>
         <p:spPr>
           <a:xfrm>
-            <a:off x="9134856" y="1901952"/>
-            <a:ext cx="914400" cy="640080"/>
+            <a:off x="6507327" y="4251960"/>
+            <a:ext cx="4724247" cy="731520"/>
           </a:xfrm>
           <a:prstGeom prst="rect">
             <a:avLst/>
@@ -10161,27 +10288,27 @@
               </a:spcAft>
             </a:pPr>
             <a:r>
-              <a:rPr sz="4000" b="1">
-                <a:solidFill>
-                  <a:srgbClr val="5AA3F0"/>
+              <a:rPr sz="3800" b="1">
+                <a:solidFill>
+                  <a:srgbClr val="F0834E"/>
                 </a:solidFill>
                 <a:latin typeface="Aptos Display"/>
               </a:rPr>
-              <a:t>4</a:t>
-            </a:r>
-          </a:p>
-        </p:txBody>
-      </p:sp>
-      <p:sp>
-        <p:nvSpPr>
-          <p:cNvPr id="19" name="TextBox 18"/>
+              <a:t>1.4% to 33.2%</a:t>
+            </a:r>
+          </a:p>
+        </p:txBody>
+      </p:sp>
+      <p:sp>
+        <p:nvSpPr>
+          <p:cNvPr id="22" name="TextBox 21"/>
           <p:cNvSpPr txBox="1"/>
           <p:nvPr/>
         </p:nvSpPr>
         <p:spPr>
           <a:xfrm>
-            <a:off x="9134856" y="2651760"/>
-            <a:ext cx="2057400" cy="914400"/>
+            <a:off x="6507327" y="4937760"/>
+            <a:ext cx="4724247" cy="365760"/>
           </a:xfrm>
           <a:prstGeom prst="rect">
             <a:avLst/>
@@ -10203,27 +10330,27 @@
               </a:spcAft>
             </a:pPr>
             <a:r>
-              <a:rPr sz="1700" b="0">
-                <a:solidFill>
-                  <a:srgbClr val="D7D5CE"/>
-                </a:solidFill>
-                <a:latin typeface="Aptos"/>
-              </a:rPr>
-              <a:t>Pick the fix aimed at that one.</a:t>
-            </a:r>
-          </a:p>
-        </p:txBody>
-      </p:sp>
-      <p:sp>
-        <p:nvSpPr>
-          <p:cNvPr id="20" name="TextBox 19"/>
+              <a:rPr sz="1900" b="1">
+                <a:solidFill>
+                  <a:srgbClr val="FFFFFF"/>
+                </a:solidFill>
+                <a:latin typeface="Aptos"/>
+              </a:rPr>
+              <a:t>The same fix, two agents</a:t>
+            </a:r>
+          </a:p>
+        </p:txBody>
+      </p:sp>
+      <p:sp>
+        <p:nvSpPr>
+          <p:cNvPr id="23" name="TextBox 22"/>
           <p:cNvSpPr txBox="1"/>
           <p:nvPr/>
         </p:nvSpPr>
         <p:spPr>
           <a:xfrm>
-            <a:off x="685800" y="3977639"/>
-            <a:ext cx="6949440" cy="2011680"/>
+            <a:off x="6507327" y="5330952"/>
+            <a:ext cx="4724247" cy="777240"/>
           </a:xfrm>
           <a:prstGeom prst="rect">
             <a:avLst/>
@@ -10238,115 +10365,34 @@
           <a:p>
             <a:pPr algn="l">
               <a:lnSpc>
-                <a:spcPct val="130000"/>
-              </a:lnSpc>
-              <a:spcAft>
-                <a:spcPts val="0"/>
-              </a:spcAft>
-            </a:pPr>
-            <a:r>
-              <a:rPr sz="2200" b="1">
-                <a:solidFill>
-                  <a:srgbClr val="FFFFFF"/>
-                </a:solidFill>
-                <a:latin typeface="Aptos"/>
-              </a:rPr>
-              <a:t>Your bill = size  ×  sends  ×  price per send</a:t>
-            </a:r>
-          </a:p>
-          <a:p>
-            <a:pPr algn="l">
-              <a:lnSpc>
-                <a:spcPct val="130000"/>
-              </a:lnSpc>
-              <a:spcAft>
-                <a:spcPts val="0"/>
-              </a:spcAft>
-            </a:pPr>
-            <a:r>
-              <a:rPr sz="2000" b="0">
-                <a:solidFill>
-                  <a:srgbClr val="B5B2AA"/>
-                </a:solidFill>
-                <a:latin typeface="Aptos"/>
-              </a:rPr>
-              <a:t>The best fix changes with:</a:t>
-            </a:r>
-          </a:p>
-          <a:p>
-            <a:pPr algn="l">
-              <a:lnSpc>
-                <a:spcPct val="130000"/>
-              </a:lnSpc>
-              <a:spcAft>
-                <a:spcPts val="0"/>
-              </a:spcAft>
-            </a:pPr>
-            <a:r>
-              <a:rPr sz="2000" b="1">
-                <a:solidFill>
-                  <a:srgbClr val="5AA3F0"/>
-                </a:solidFill>
-                <a:latin typeface="Aptos"/>
-              </a:rPr>
-              <a:t>caching · session length · prompt size · pictures</a:t>
-            </a:r>
-          </a:p>
-          <a:p>
-            <a:pPr algn="l">
-              <a:lnSpc>
-                <a:spcPct val="130000"/>
-              </a:lnSpc>
-              <a:spcAft>
-                <a:spcPts val="0"/>
-              </a:spcAft>
-            </a:pPr>
-            <a:r>
-              <a:rPr sz="1800" b="0">
-                <a:solidFill>
-                  <a:srgbClr val="B5B2AA"/>
-                </a:solidFill>
-                <a:latin typeface="Aptos"/>
-              </a:rPr>
-              <a:t>So measure yours first.</a:t>
-            </a:r>
-          </a:p>
-        </p:txBody>
-      </p:sp>
-      <p:pic>
-        <p:nvPicPr>
-          <p:cNvPr id="21" name="Picture 20" descr="qr_dark.png"/>
-          <p:cNvPicPr>
-            <a:picLocks noChangeAspect="1"/>
-          </p:cNvPicPr>
-          <p:nvPr/>
-        </p:nvPicPr>
-        <p:blipFill>
-          <a:blip r:embed="rId2"/>
-          <a:stretch>
-            <a:fillRect/>
-          </a:stretch>
-        </p:blipFill>
-        <p:spPr>
-          <a:xfrm>
-            <a:off x="9921240" y="3931920"/>
-            <a:ext cx="1600200" cy="1600200"/>
-          </a:xfrm>
-          <a:prstGeom prst="rect">
-            <a:avLst/>
-          </a:prstGeom>
-        </p:spPr>
-      </p:pic>
-      <p:sp>
-        <p:nvSpPr>
-          <p:cNvPr id="22" name="TextBox 21"/>
+                <a:spcPct val="112000"/>
+              </a:lnSpc>
+              <a:spcAft>
+                <a:spcPts val="0"/>
+              </a:spcAft>
+            </a:pPr>
+            <a:r>
+              <a:rPr sz="1400" b="0">
+                <a:solidFill>
+                  <a:srgbClr val="D7D5CE"/>
+                </a:solidFill>
+                <a:latin typeface="Aptos"/>
+              </a:rPr>
+              <a:t>Cutting the system prompt on a screen agent, then on a chat agent. The shape of your bill picks the fix.</a:t>
+            </a:r>
+          </a:p>
+        </p:txBody>
+      </p:sp>
+      <p:sp>
+        <p:nvSpPr>
+          <p:cNvPr id="24" name="TextBox 23"/>
           <p:cNvSpPr txBox="1"/>
           <p:nvPr/>
         </p:nvSpPr>
         <p:spPr>
           <a:xfrm>
-            <a:off x="7223760" y="4023360"/>
-            <a:ext cx="2514600" cy="1737360"/>
+            <a:off x="685800" y="6473952"/>
+            <a:ext cx="5486400" cy="274320"/>
           </a:xfrm>
           <a:prstGeom prst="rect">
             <a:avLst/>
@@ -10359,7 +10405,7 @@
           </a:bodyPr>
           <a:lstStyle/>
           <a:p>
-            <a:pPr algn="r">
+            <a:pPr algn="l">
               <a:lnSpc>
                 <a:spcPct val="108000"/>
               </a:lnSpc>
@@ -10368,103 +10414,27 @@
               </a:spcAft>
             </a:pPr>
             <a:r>
-              <a:rPr sz="3200" b="1">
-                <a:solidFill>
-                  <a:srgbClr val="FFFFFF"/>
-                </a:solidFill>
-                <a:latin typeface="Aptos Display"/>
-              </a:rPr>
-              <a:t>Thank you</a:t>
-            </a:r>
-          </a:p>
-          <a:p>
-            <a:pPr algn="r">
-              <a:lnSpc>
-                <a:spcPct val="108000"/>
-              </a:lnSpc>
-              <a:spcAft>
-                <a:spcPts val="0"/>
-              </a:spcAft>
-            </a:pPr>
-            <a:r>
-              <a:rPr sz="1700" b="1">
-                <a:solidFill>
-                  <a:srgbClr val="FFFFFF"/>
-                </a:solidFill>
-                <a:latin typeface="Aptos"/>
-              </a:rPr>
-              <a:t>Shyamji Tiwari</a:t>
-            </a:r>
-          </a:p>
-          <a:p>
-            <a:pPr algn="r">
-              <a:lnSpc>
-                <a:spcPct val="108000"/>
-              </a:lnSpc>
-              <a:spcAft>
-                <a:spcPts val="0"/>
-              </a:spcAft>
-            </a:pPr>
-            <a:r>
-              <a:rPr sz="1400" b="0">
-                <a:solidFill>
-                  <a:srgbClr val="D7D5CE"/>
-                </a:solidFill>
-                <a:latin typeface="Aptos"/>
-              </a:rPr>
-              <a:t>Applied Scientist, Amazon</a:t>
-            </a:r>
-          </a:p>
-          <a:p>
-            <a:pPr algn="r">
-              <a:lnSpc>
-                <a:spcPct val="108000"/>
-              </a:lnSpc>
-              <a:spcAft>
-                <a:spcPts val="0"/>
-              </a:spcAft>
-            </a:pPr>
-            <a:r>
-              <a:rPr sz="1200" b="0">
-                <a:solidFill>
-                  <a:srgbClr val="5AA3F0"/>
-                </a:solidFill>
-                <a:latin typeface="Aptos"/>
-              </a:rPr>
-              <a:t>github.com/ieee-ai/agentic-ai-26</a:t>
-            </a:r>
-          </a:p>
-          <a:p>
-            <a:pPr algn="r">
-              <a:lnSpc>
-                <a:spcPct val="108000"/>
-              </a:lnSpc>
-              <a:spcAft>
-                <a:spcPts val="0"/>
-              </a:spcAft>
-            </a:pPr>
-            <a:r>
-              <a:rPr sz="1200" b="0">
-                <a:solidFill>
-                  <a:srgbClr val="5AA3F0"/>
-                </a:solidFill>
-                <a:latin typeface="Aptos"/>
-              </a:rPr>
-              <a:t>/Saving-the-Tokens</a:t>
-            </a:r>
-          </a:p>
-        </p:txBody>
-      </p:sp>
-      <p:sp>
-        <p:nvSpPr>
-          <p:cNvPr id="23" name="TextBox 22"/>
+              <a:rPr sz="1100" b="0">
+                <a:solidFill>
+                  <a:srgbClr val="B5B2AA"/>
+                </a:solidFill>
+                <a:latin typeface="Aptos"/>
+              </a:rPr>
+              <a:t>Saving the Tokens  ·  Shyamji Tiwari</a:t>
+            </a:r>
+          </a:p>
+        </p:txBody>
+      </p:sp>
+      <p:sp>
+        <p:nvSpPr>
+          <p:cNvPr id="25" name="TextBox 24"/>
           <p:cNvSpPr txBox="1"/>
           <p:nvPr/>
         </p:nvSpPr>
         <p:spPr>
           <a:xfrm>
-            <a:off x="685800" y="6473952"/>
-            <a:ext cx="5486400" cy="274320"/>
+            <a:off x="5760720" y="6473952"/>
+            <a:ext cx="5745175" cy="274320"/>
           </a:xfrm>
           <a:prstGeom prst="rect">
             <a:avLst/>
@@ -10477,7 +10447,7 @@
           </a:bodyPr>
           <a:lstStyle/>
           <a:p>
-            <a:pPr algn="l">
+            <a:pPr algn="r">
               <a:lnSpc>
                 <a:spcPct val="108000"/>
               </a:lnSpc>
@@ -10492,49 +10462,7 @@
                 </a:solidFill>
                 <a:latin typeface="Aptos"/>
               </a:rPr>
-              <a:t>Saving the Tokens  ·  Shyamji Tiwari</a:t>
-            </a:r>
-          </a:p>
-        </p:txBody>
-      </p:sp>
-      <p:sp>
-        <p:nvSpPr>
-          <p:cNvPr id="24" name="TextBox 23"/>
-          <p:cNvSpPr txBox="1"/>
-          <p:nvPr/>
-        </p:nvSpPr>
-        <p:spPr>
-          <a:xfrm>
-            <a:off x="5760720" y="6473952"/>
-            <a:ext cx="5745175" cy="274320"/>
-          </a:xfrm>
-          <a:prstGeom prst="rect">
-            <a:avLst/>
-          </a:prstGeom>
-          <a:noFill/>
-        </p:spPr>
-        <p:txBody>
-          <a:bodyPr wrap="square" lIns="0" rIns="0" tIns="0" bIns="0" anchor="t">
-            <a:spAutoFit/>
-          </a:bodyPr>
-          <a:lstStyle/>
-          <a:p>
-            <a:pPr algn="r">
-              <a:lnSpc>
-                <a:spcPct val="108000"/>
-              </a:lnSpc>
-              <a:spcAft>
-                <a:spcPts val="0"/>
-              </a:spcAft>
-            </a:pPr>
-            <a:r>
-              <a:rPr sz="1100" b="0">
-                <a:solidFill>
-                  <a:srgbClr val="B5B2AA"/>
-                </a:solidFill>
-                <a:latin typeface="Aptos"/>
-              </a:rPr>
-              <a:t>Simulated 20-turn session · illustrative settings · input tokens only</a:t>
+              <a:t>cards 1, 2, 4: example agent · card 3: published rules, checked 2026-10-29</a:t>
             </a:r>
           </a:p>
         </p:txBody>
@@ -11498,6 +11426,1214 @@
               <a:rPr sz="1100" b="0">
                 <a:solidFill>
                   <a:srgbClr val="6B6963"/>
+                </a:solidFill>
+                <a:latin typeface="Aptos"/>
+              </a:rPr>
+              <a:t>Saving the Tokens  ·  Shyamji Tiwari</a:t>
+            </a:r>
+          </a:p>
+        </p:txBody>
+      </p:sp>
+    </p:spTree>
+  </p:cSld>
+  <p:clrMapOvr>
+    <a:masterClrMapping/>
+  </p:clrMapOvr>
+</p:sld>
+</file>
+
+<file path=ppt/slides/slide20.xml><?xml version="1.0" encoding="utf-8"?>
+<p:sld xmlns:a="http://schemas.openxmlformats.org/drawingml/2006/main" xmlns:p="http://schemas.openxmlformats.org/presentationml/2006/main" xmlns:r="http://schemas.openxmlformats.org/officeDocument/2006/relationships">
+  <p:cSld>
+    <p:bg>
+      <p:bgPr>
+        <a:solidFill>
+          <a:srgbClr val="121212"/>
+        </a:solidFill>
+        <a:effectLst/>
+      </p:bgPr>
+    </p:bg>
+    <p:spTree>
+      <p:nvGrpSpPr>
+        <p:cNvPr id="1" name=""/>
+        <p:cNvGrpSpPr/>
+        <p:nvPr/>
+      </p:nvGrpSpPr>
+      <p:grpSpPr/>
+      <p:sp>
+        <p:nvSpPr>
+          <p:cNvPr id="2" name="TextBox 1"/>
+          <p:cNvSpPr txBox="1"/>
+          <p:nvPr/>
+        </p:nvSpPr>
+        <p:spPr>
+          <a:xfrm>
+            <a:off x="685800" y="457200"/>
+            <a:ext cx="5486400" cy="320040"/>
+          </a:xfrm>
+          <a:prstGeom prst="rect">
+            <a:avLst/>
+          </a:prstGeom>
+          <a:noFill/>
+        </p:spPr>
+        <p:txBody>
+          <a:bodyPr wrap="square" lIns="0" rIns="0" tIns="0" bIns="0" anchor="t">
+            <a:spAutoFit/>
+          </a:bodyPr>
+          <a:lstStyle/>
+          <a:p>
+            <a:pPr algn="l">
+              <a:lnSpc>
+                <a:spcPct val="108000"/>
+              </a:lnSpc>
+              <a:spcAft>
+                <a:spcPts val="0"/>
+              </a:spcAft>
+            </a:pPr>
+            <a:r>
+              <a:rPr sz="1400" b="1">
+                <a:solidFill>
+                  <a:srgbClr val="B5B2AA"/>
+                </a:solidFill>
+                <a:latin typeface="Aptos"/>
+              </a:rPr>
+              <a:t>TAKE THIS WITH YOU</a:t>
+            </a:r>
+          </a:p>
+        </p:txBody>
+      </p:sp>
+      <p:sp>
+        <p:nvSpPr>
+          <p:cNvPr id="3" name="Rounded Rectangle 2"/>
+          <p:cNvSpPr/>
+          <p:nvPr/>
+        </p:nvSpPr>
+        <p:spPr>
+          <a:xfrm>
+            <a:off x="10262311" y="548640"/>
+            <a:ext cx="256032" cy="64008"/>
+          </a:xfrm>
+          <a:prstGeom prst="roundRect">
+            <a:avLst>
+              <a:gd name="adj" fmla="val 50000"/>
+            </a:avLst>
+          </a:prstGeom>
+          <a:solidFill>
+            <a:srgbClr val="3A3A38"/>
+          </a:solidFill>
+          <a:ln>
+            <a:noFill/>
+          </a:ln>
+          <a:effectLst/>
+        </p:spPr>
+        <p:style>
+          <a:lnRef idx="1">
+            <a:schemeClr val="accent1"/>
+          </a:lnRef>
+          <a:fillRef idx="3">
+            <a:schemeClr val="accent1"/>
+          </a:fillRef>
+          <a:effectRef idx="2">
+            <a:schemeClr val="accent1"/>
+          </a:effectRef>
+          <a:fontRef idx="minor">
+            <a:schemeClr val="lt1"/>
+          </a:fontRef>
+        </p:style>
+        <p:txBody>
+          <a:bodyPr rtlCol="0" anchor="ctr"/>
+          <a:lstStyle/>
+          <a:p>
+            <a:pPr algn="ctr"/>
+          </a:p>
+        </p:txBody>
+      </p:sp>
+      <p:sp>
+        <p:nvSpPr>
+          <p:cNvPr id="4" name="Rounded Rectangle 3"/>
+          <p:cNvSpPr/>
+          <p:nvPr/>
+        </p:nvSpPr>
+        <p:spPr>
+          <a:xfrm>
+            <a:off x="10591495" y="548640"/>
+            <a:ext cx="256032" cy="64008"/>
+          </a:xfrm>
+          <a:prstGeom prst="roundRect">
+            <a:avLst>
+              <a:gd name="adj" fmla="val 50000"/>
+            </a:avLst>
+          </a:prstGeom>
+          <a:solidFill>
+            <a:srgbClr val="3A3A38"/>
+          </a:solidFill>
+          <a:ln>
+            <a:noFill/>
+          </a:ln>
+          <a:effectLst/>
+        </p:spPr>
+        <p:style>
+          <a:lnRef idx="1">
+            <a:schemeClr val="accent1"/>
+          </a:lnRef>
+          <a:fillRef idx="3">
+            <a:schemeClr val="accent1"/>
+          </a:fillRef>
+          <a:effectRef idx="2">
+            <a:schemeClr val="accent1"/>
+          </a:effectRef>
+          <a:fontRef idx="minor">
+            <a:schemeClr val="lt1"/>
+          </a:fontRef>
+        </p:style>
+        <p:txBody>
+          <a:bodyPr rtlCol="0" anchor="ctr"/>
+          <a:lstStyle/>
+          <a:p>
+            <a:pPr algn="ctr"/>
+          </a:p>
+        </p:txBody>
+      </p:sp>
+      <p:sp>
+        <p:nvSpPr>
+          <p:cNvPr id="5" name="Rounded Rectangle 4"/>
+          <p:cNvSpPr/>
+          <p:nvPr/>
+        </p:nvSpPr>
+        <p:spPr>
+          <a:xfrm>
+            <a:off x="10920679" y="548640"/>
+            <a:ext cx="256032" cy="64008"/>
+          </a:xfrm>
+          <a:prstGeom prst="roundRect">
+            <a:avLst>
+              <a:gd name="adj" fmla="val 50000"/>
+            </a:avLst>
+          </a:prstGeom>
+          <a:solidFill>
+            <a:srgbClr val="3A3A38"/>
+          </a:solidFill>
+          <a:ln>
+            <a:noFill/>
+          </a:ln>
+          <a:effectLst/>
+        </p:spPr>
+        <p:style>
+          <a:lnRef idx="1">
+            <a:schemeClr val="accent1"/>
+          </a:lnRef>
+          <a:fillRef idx="3">
+            <a:schemeClr val="accent1"/>
+          </a:fillRef>
+          <a:effectRef idx="2">
+            <a:schemeClr val="accent1"/>
+          </a:effectRef>
+          <a:fontRef idx="minor">
+            <a:schemeClr val="lt1"/>
+          </a:fontRef>
+        </p:style>
+        <p:txBody>
+          <a:bodyPr rtlCol="0" anchor="ctr"/>
+          <a:lstStyle/>
+          <a:p>
+            <a:pPr algn="ctr"/>
+          </a:p>
+        </p:txBody>
+      </p:sp>
+      <p:sp>
+        <p:nvSpPr>
+          <p:cNvPr id="6" name="Rounded Rectangle 5"/>
+          <p:cNvSpPr/>
+          <p:nvPr/>
+        </p:nvSpPr>
+        <p:spPr>
+          <a:xfrm>
+            <a:off x="11249863" y="548640"/>
+            <a:ext cx="256032" cy="64008"/>
+          </a:xfrm>
+          <a:prstGeom prst="roundRect">
+            <a:avLst>
+              <a:gd name="adj" fmla="val 50000"/>
+            </a:avLst>
+          </a:prstGeom>
+          <a:solidFill>
+            <a:srgbClr val="5AA3F0"/>
+          </a:solidFill>
+          <a:ln>
+            <a:noFill/>
+          </a:ln>
+          <a:effectLst/>
+        </p:spPr>
+        <p:style>
+          <a:lnRef idx="1">
+            <a:schemeClr val="accent1"/>
+          </a:lnRef>
+          <a:fillRef idx="3">
+            <a:schemeClr val="accent1"/>
+          </a:fillRef>
+          <a:effectRef idx="2">
+            <a:schemeClr val="accent1"/>
+          </a:effectRef>
+          <a:fontRef idx="minor">
+            <a:schemeClr val="lt1"/>
+          </a:fontRef>
+        </p:style>
+        <p:txBody>
+          <a:bodyPr rtlCol="0" anchor="ctr"/>
+          <a:lstStyle/>
+          <a:p>
+            <a:pPr algn="ctr"/>
+          </a:p>
+        </p:txBody>
+      </p:sp>
+      <p:sp>
+        <p:nvSpPr>
+          <p:cNvPr id="7" name="TextBox 6"/>
+          <p:cNvSpPr txBox="1"/>
+          <p:nvPr/>
+        </p:nvSpPr>
+        <p:spPr>
+          <a:xfrm>
+            <a:off x="685800" y="841248"/>
+            <a:ext cx="10820095" cy="914400"/>
+          </a:xfrm>
+          <a:prstGeom prst="rect">
+            <a:avLst/>
+          </a:prstGeom>
+          <a:noFill/>
+        </p:spPr>
+        <p:txBody>
+          <a:bodyPr wrap="square" lIns="0" rIns="0" tIns="0" bIns="0" anchor="t">
+            <a:spAutoFit/>
+          </a:bodyPr>
+          <a:lstStyle/>
+          <a:p>
+            <a:pPr algn="l">
+              <a:lnSpc>
+                <a:spcPct val="95000"/>
+              </a:lnSpc>
+              <a:spcAft>
+                <a:spcPts val="0"/>
+              </a:spcAft>
+            </a:pPr>
+            <a:r>
+              <a:rPr sz="4000" b="1">
+                <a:solidFill>
+                  <a:srgbClr val="FFFFFF"/>
+                </a:solidFill>
+                <a:latin typeface="Aptos Display"/>
+              </a:rPr>
+              <a:t>Four questions to ask your own agent</a:t>
+            </a:r>
+          </a:p>
+        </p:txBody>
+      </p:sp>
+      <p:sp>
+        <p:nvSpPr>
+          <p:cNvPr id="8" name="Rounded Rectangle 7"/>
+          <p:cNvSpPr/>
+          <p:nvPr/>
+        </p:nvSpPr>
+        <p:spPr>
+          <a:xfrm>
+            <a:off x="685800" y="1737360"/>
+            <a:ext cx="7223760" cy="1024128"/>
+          </a:xfrm>
+          <a:prstGeom prst="roundRect">
+            <a:avLst>
+              <a:gd name="adj" fmla="val 7000"/>
+            </a:avLst>
+          </a:prstGeom>
+          <a:solidFill>
+            <a:srgbClr val="1F1F1D"/>
+          </a:solidFill>
+          <a:ln>
+            <a:noFill/>
+          </a:ln>
+          <a:effectLst/>
+        </p:spPr>
+        <p:style>
+          <a:lnRef idx="1">
+            <a:schemeClr val="accent1"/>
+          </a:lnRef>
+          <a:fillRef idx="3">
+            <a:schemeClr val="accent1"/>
+          </a:fillRef>
+          <a:effectRef idx="2">
+            <a:schemeClr val="accent1"/>
+          </a:effectRef>
+          <a:fontRef idx="minor">
+            <a:schemeClr val="lt1"/>
+          </a:fontRef>
+        </p:style>
+        <p:txBody>
+          <a:bodyPr rtlCol="0" anchor="ctr"/>
+          <a:lstStyle/>
+          <a:p>
+            <a:pPr algn="ctr"/>
+          </a:p>
+        </p:txBody>
+      </p:sp>
+      <p:sp>
+        <p:nvSpPr>
+          <p:cNvPr id="9" name="TextBox 8"/>
+          <p:cNvSpPr txBox="1"/>
+          <p:nvPr/>
+        </p:nvSpPr>
+        <p:spPr>
+          <a:xfrm>
+            <a:off x="960120" y="1901952"/>
+            <a:ext cx="548640" cy="640080"/>
+          </a:xfrm>
+          <a:prstGeom prst="rect">
+            <a:avLst/>
+          </a:prstGeom>
+          <a:noFill/>
+        </p:spPr>
+        <p:txBody>
+          <a:bodyPr wrap="square" lIns="0" rIns="0" tIns="0" bIns="0" anchor="t">
+            <a:spAutoFit/>
+          </a:bodyPr>
+          <a:lstStyle/>
+          <a:p>
+            <a:pPr algn="l">
+              <a:lnSpc>
+                <a:spcPct val="108000"/>
+              </a:lnSpc>
+              <a:spcAft>
+                <a:spcPts val="0"/>
+              </a:spcAft>
+            </a:pPr>
+            <a:r>
+              <a:rPr sz="3400" b="1">
+                <a:solidFill>
+                  <a:srgbClr val="5AA3F0"/>
+                </a:solidFill>
+                <a:latin typeface="Aptos Display"/>
+              </a:rPr>
+              <a:t>1</a:t>
+            </a:r>
+          </a:p>
+        </p:txBody>
+      </p:sp>
+      <p:sp>
+        <p:nvSpPr>
+          <p:cNvPr id="10" name="TextBox 9"/>
+          <p:cNvSpPr txBox="1"/>
+          <p:nvPr/>
+        </p:nvSpPr>
+        <p:spPr>
+          <a:xfrm>
+            <a:off x="1554480" y="1865376"/>
+            <a:ext cx="6217920" cy="365760"/>
+          </a:xfrm>
+          <a:prstGeom prst="rect">
+            <a:avLst/>
+          </a:prstGeom>
+          <a:noFill/>
+        </p:spPr>
+        <p:txBody>
+          <a:bodyPr wrap="square" lIns="0" rIns="0" tIns="0" bIns="0" anchor="t">
+            <a:spAutoFit/>
+          </a:bodyPr>
+          <a:lstStyle/>
+          <a:p>
+            <a:pPr algn="l">
+              <a:lnSpc>
+                <a:spcPct val="108000"/>
+              </a:lnSpc>
+              <a:spcAft>
+                <a:spcPts val="0"/>
+              </a:spcAft>
+            </a:pPr>
+            <a:r>
+              <a:rPr sz="1900" b="1">
+                <a:solidFill>
+                  <a:srgbClr val="FFFFFF"/>
+                </a:solidFill>
+                <a:latin typeface="Aptos"/>
+              </a:rPr>
+              <a:t>What share of my input is cache reads?</a:t>
+            </a:r>
+          </a:p>
+        </p:txBody>
+      </p:sp>
+      <p:sp>
+        <p:nvSpPr>
+          <p:cNvPr id="11" name="TextBox 10"/>
+          <p:cNvSpPr txBox="1"/>
+          <p:nvPr/>
+        </p:nvSpPr>
+        <p:spPr>
+          <a:xfrm>
+            <a:off x="1554480" y="2240280"/>
+            <a:ext cx="6217920" cy="502920"/>
+          </a:xfrm>
+          <a:prstGeom prst="rect">
+            <a:avLst/>
+          </a:prstGeom>
+          <a:noFill/>
+        </p:spPr>
+        <p:txBody>
+          <a:bodyPr wrap="square" lIns="0" rIns="0" tIns="0" bIns="0" anchor="t">
+            <a:spAutoFit/>
+          </a:bodyPr>
+          <a:lstStyle/>
+          <a:p>
+            <a:pPr algn="l">
+              <a:lnSpc>
+                <a:spcPct val="110000"/>
+              </a:lnSpc>
+              <a:spcAft>
+                <a:spcPts val="0"/>
+              </a:spcAft>
+            </a:pPr>
+            <a:r>
+              <a:rPr sz="1400" b="0">
+                <a:solidFill>
+                  <a:srgbClr val="D7D5CE"/>
+                </a:solidFill>
+                <a:latin typeface="Aptos"/>
+              </a:rPr>
+              <a:t>From the usage field. Near zero means you pay full price for every repeat.</a:t>
+            </a:r>
+          </a:p>
+        </p:txBody>
+      </p:sp>
+      <p:sp>
+        <p:nvSpPr>
+          <p:cNvPr id="12" name="Rounded Rectangle 11"/>
+          <p:cNvSpPr/>
+          <p:nvPr/>
+        </p:nvSpPr>
+        <p:spPr>
+          <a:xfrm>
+            <a:off x="685800" y="2834640"/>
+            <a:ext cx="7223760" cy="1024128"/>
+          </a:xfrm>
+          <a:prstGeom prst="roundRect">
+            <a:avLst>
+              <a:gd name="adj" fmla="val 7000"/>
+            </a:avLst>
+          </a:prstGeom>
+          <a:solidFill>
+            <a:srgbClr val="1F1F1D"/>
+          </a:solidFill>
+          <a:ln>
+            <a:noFill/>
+          </a:ln>
+          <a:effectLst/>
+        </p:spPr>
+        <p:style>
+          <a:lnRef idx="1">
+            <a:schemeClr val="accent1"/>
+          </a:lnRef>
+          <a:fillRef idx="3">
+            <a:schemeClr val="accent1"/>
+          </a:fillRef>
+          <a:effectRef idx="2">
+            <a:schemeClr val="accent1"/>
+          </a:effectRef>
+          <a:fontRef idx="minor">
+            <a:schemeClr val="lt1"/>
+          </a:fontRef>
+        </p:style>
+        <p:txBody>
+          <a:bodyPr rtlCol="0" anchor="ctr"/>
+          <a:lstStyle/>
+          <a:p>
+            <a:pPr algn="ctr"/>
+          </a:p>
+        </p:txBody>
+      </p:sp>
+      <p:sp>
+        <p:nvSpPr>
+          <p:cNvPr id="13" name="TextBox 12"/>
+          <p:cNvSpPr txBox="1"/>
+          <p:nvPr/>
+        </p:nvSpPr>
+        <p:spPr>
+          <a:xfrm>
+            <a:off x="960120" y="2999232"/>
+            <a:ext cx="548640" cy="640080"/>
+          </a:xfrm>
+          <a:prstGeom prst="rect">
+            <a:avLst/>
+          </a:prstGeom>
+          <a:noFill/>
+        </p:spPr>
+        <p:txBody>
+          <a:bodyPr wrap="square" lIns="0" rIns="0" tIns="0" bIns="0" anchor="t">
+            <a:spAutoFit/>
+          </a:bodyPr>
+          <a:lstStyle/>
+          <a:p>
+            <a:pPr algn="l">
+              <a:lnSpc>
+                <a:spcPct val="108000"/>
+              </a:lnSpc>
+              <a:spcAft>
+                <a:spcPts val="0"/>
+              </a:spcAft>
+            </a:pPr>
+            <a:r>
+              <a:rPr sz="3400" b="1">
+                <a:solidFill>
+                  <a:srgbClr val="5AA3F0"/>
+                </a:solidFill>
+                <a:latin typeface="Aptos Display"/>
+              </a:rPr>
+              <a:t>2</a:t>
+            </a:r>
+          </a:p>
+        </p:txBody>
+      </p:sp>
+      <p:sp>
+        <p:nvSpPr>
+          <p:cNvPr id="14" name="TextBox 13"/>
+          <p:cNvSpPr txBox="1"/>
+          <p:nvPr/>
+        </p:nvSpPr>
+        <p:spPr>
+          <a:xfrm>
+            <a:off x="1554480" y="2962656"/>
+            <a:ext cx="6217920" cy="365760"/>
+          </a:xfrm>
+          <a:prstGeom prst="rect">
+            <a:avLst/>
+          </a:prstGeom>
+          <a:noFill/>
+        </p:spPr>
+        <p:txBody>
+          <a:bodyPr wrap="square" lIns="0" rIns="0" tIns="0" bIns="0" anchor="t">
+            <a:spAutoFit/>
+          </a:bodyPr>
+          <a:lstStyle/>
+          <a:p>
+            <a:pPr algn="l">
+              <a:lnSpc>
+                <a:spcPct val="108000"/>
+              </a:lnSpc>
+              <a:spcAft>
+                <a:spcPts val="0"/>
+              </a:spcAft>
+            </a:pPr>
+            <a:r>
+              <a:rPr sz="1900" b="1">
+                <a:solidFill>
+                  <a:srgbClr val="FFFFFF"/>
+                </a:solidFill>
+                <a:latin typeface="Aptos"/>
+              </a:rPr>
+              <a:t>What changes at the start of my prompt?</a:t>
+            </a:r>
+          </a:p>
+        </p:txBody>
+      </p:sp>
+      <p:sp>
+        <p:nvSpPr>
+          <p:cNvPr id="15" name="TextBox 14"/>
+          <p:cNvSpPr txBox="1"/>
+          <p:nvPr/>
+        </p:nvSpPr>
+        <p:spPr>
+          <a:xfrm>
+            <a:off x="1554480" y="3337560"/>
+            <a:ext cx="6217920" cy="502920"/>
+          </a:xfrm>
+          <a:prstGeom prst="rect">
+            <a:avLst/>
+          </a:prstGeom>
+          <a:noFill/>
+        </p:spPr>
+        <p:txBody>
+          <a:bodyPr wrap="square" lIns="0" rIns="0" tIns="0" bIns="0" anchor="t">
+            <a:spAutoFit/>
+          </a:bodyPr>
+          <a:lstStyle/>
+          <a:p>
+            <a:pPr algn="l">
+              <a:lnSpc>
+                <a:spcPct val="110000"/>
+              </a:lnSpc>
+              <a:spcAft>
+                <a:spcPts val="0"/>
+              </a:spcAft>
+            </a:pPr>
+            <a:r>
+              <a:rPr sz="1400" b="0">
+                <a:solidFill>
+                  <a:srgbClr val="D7D5CE"/>
+                </a:solidFill>
+                <a:latin typeface="Aptos"/>
+              </a:rPr>
+              <a:t>A timestamp, a reordered tool list, a dropped message: it voids the cache from that point.</a:t>
+            </a:r>
+          </a:p>
+        </p:txBody>
+      </p:sp>
+      <p:sp>
+        <p:nvSpPr>
+          <p:cNvPr id="16" name="Rounded Rectangle 15"/>
+          <p:cNvSpPr/>
+          <p:nvPr/>
+        </p:nvSpPr>
+        <p:spPr>
+          <a:xfrm>
+            <a:off x="685800" y="3931920"/>
+            <a:ext cx="7223760" cy="1024128"/>
+          </a:xfrm>
+          <a:prstGeom prst="roundRect">
+            <a:avLst>
+              <a:gd name="adj" fmla="val 7000"/>
+            </a:avLst>
+          </a:prstGeom>
+          <a:solidFill>
+            <a:srgbClr val="1F1F1D"/>
+          </a:solidFill>
+          <a:ln>
+            <a:noFill/>
+          </a:ln>
+          <a:effectLst/>
+        </p:spPr>
+        <p:style>
+          <a:lnRef idx="1">
+            <a:schemeClr val="accent1"/>
+          </a:lnRef>
+          <a:fillRef idx="3">
+            <a:schemeClr val="accent1"/>
+          </a:fillRef>
+          <a:effectRef idx="2">
+            <a:schemeClr val="accent1"/>
+          </a:effectRef>
+          <a:fontRef idx="minor">
+            <a:schemeClr val="lt1"/>
+          </a:fontRef>
+        </p:style>
+        <p:txBody>
+          <a:bodyPr rtlCol="0" anchor="ctr"/>
+          <a:lstStyle/>
+          <a:p>
+            <a:pPr algn="ctr"/>
+          </a:p>
+        </p:txBody>
+      </p:sp>
+      <p:sp>
+        <p:nvSpPr>
+          <p:cNvPr id="17" name="TextBox 16"/>
+          <p:cNvSpPr txBox="1"/>
+          <p:nvPr/>
+        </p:nvSpPr>
+        <p:spPr>
+          <a:xfrm>
+            <a:off x="960120" y="4096512"/>
+            <a:ext cx="548640" cy="640080"/>
+          </a:xfrm>
+          <a:prstGeom prst="rect">
+            <a:avLst/>
+          </a:prstGeom>
+          <a:noFill/>
+        </p:spPr>
+        <p:txBody>
+          <a:bodyPr wrap="square" lIns="0" rIns="0" tIns="0" bIns="0" anchor="t">
+            <a:spAutoFit/>
+          </a:bodyPr>
+          <a:lstStyle/>
+          <a:p>
+            <a:pPr algn="l">
+              <a:lnSpc>
+                <a:spcPct val="108000"/>
+              </a:lnSpc>
+              <a:spcAft>
+                <a:spcPts val="0"/>
+              </a:spcAft>
+            </a:pPr>
+            <a:r>
+              <a:rPr sz="3400" b="1">
+                <a:solidFill>
+                  <a:srgbClr val="5AA3F0"/>
+                </a:solidFill>
+                <a:latin typeface="Aptos Display"/>
+              </a:rPr>
+              <a:t>3</a:t>
+            </a:r>
+          </a:p>
+        </p:txBody>
+      </p:sp>
+      <p:sp>
+        <p:nvSpPr>
+          <p:cNvPr id="18" name="TextBox 17"/>
+          <p:cNvSpPr txBox="1"/>
+          <p:nvPr/>
+        </p:nvSpPr>
+        <p:spPr>
+          <a:xfrm>
+            <a:off x="1554480" y="4059936"/>
+            <a:ext cx="6217920" cy="365760"/>
+          </a:xfrm>
+          <a:prstGeom prst="rect">
+            <a:avLst/>
+          </a:prstGeom>
+          <a:noFill/>
+        </p:spPr>
+        <p:txBody>
+          <a:bodyPr wrap="square" lIns="0" rIns="0" tIns="0" bIns="0" anchor="t">
+            <a:spAutoFit/>
+          </a:bodyPr>
+          <a:lstStyle/>
+          <a:p>
+            <a:pPr algn="l">
+              <a:lnSpc>
+                <a:spcPct val="108000"/>
+              </a:lnSpc>
+              <a:spcAft>
+                <a:spcPts val="0"/>
+              </a:spcAft>
+            </a:pPr>
+            <a:r>
+              <a:rPr sz="1900" b="1">
+                <a:solidFill>
+                  <a:srgbClr val="FFFFFF"/>
+                </a:solidFill>
+                <a:latin typeface="Aptos"/>
+              </a:rPr>
+              <a:t>At what turn does my window fill?</a:t>
+            </a:r>
+          </a:p>
+        </p:txBody>
+      </p:sp>
+      <p:sp>
+        <p:nvSpPr>
+          <p:cNvPr id="19" name="TextBox 18"/>
+          <p:cNvSpPr txBox="1"/>
+          <p:nvPr/>
+        </p:nvSpPr>
+        <p:spPr>
+          <a:xfrm>
+            <a:off x="1554480" y="4434840"/>
+            <a:ext cx="6217920" cy="502920"/>
+          </a:xfrm>
+          <a:prstGeom prst="rect">
+            <a:avLst/>
+          </a:prstGeom>
+          <a:noFill/>
+        </p:spPr>
+        <p:txBody>
+          <a:bodyPr wrap="square" lIns="0" rIns="0" tIns="0" bIns="0" anchor="t">
+            <a:spAutoFit/>
+          </a:bodyPr>
+          <a:lstStyle/>
+          <a:p>
+            <a:pPr algn="l">
+              <a:lnSpc>
+                <a:spcPct val="110000"/>
+              </a:lnSpc>
+              <a:spcAft>
+                <a:spcPts val="0"/>
+              </a:spcAft>
+            </a:pPr>
+            <a:r>
+              <a:rPr sz="1400" b="0">
+                <a:solidFill>
+                  <a:srgbClr val="D7D5CE"/>
+                </a:solidFill>
+                <a:latin typeface="Aptos"/>
+              </a:rPr>
+              <a:t>Tokens per call plus growth per turn, against the window. Caching will not move it.</a:t>
+            </a:r>
+          </a:p>
+        </p:txBody>
+      </p:sp>
+      <p:sp>
+        <p:nvSpPr>
+          <p:cNvPr id="20" name="Rounded Rectangle 19"/>
+          <p:cNvSpPr/>
+          <p:nvPr/>
+        </p:nvSpPr>
+        <p:spPr>
+          <a:xfrm>
+            <a:off x="685800" y="5029200"/>
+            <a:ext cx="7223760" cy="1024128"/>
+          </a:xfrm>
+          <a:prstGeom prst="roundRect">
+            <a:avLst>
+              <a:gd name="adj" fmla="val 7000"/>
+            </a:avLst>
+          </a:prstGeom>
+          <a:solidFill>
+            <a:srgbClr val="1F1F1D"/>
+          </a:solidFill>
+          <a:ln>
+            <a:noFill/>
+          </a:ln>
+          <a:effectLst/>
+        </p:spPr>
+        <p:style>
+          <a:lnRef idx="1">
+            <a:schemeClr val="accent1"/>
+          </a:lnRef>
+          <a:fillRef idx="3">
+            <a:schemeClr val="accent1"/>
+          </a:fillRef>
+          <a:effectRef idx="2">
+            <a:schemeClr val="accent1"/>
+          </a:effectRef>
+          <a:fontRef idx="minor">
+            <a:schemeClr val="lt1"/>
+          </a:fontRef>
+        </p:style>
+        <p:txBody>
+          <a:bodyPr rtlCol="0" anchor="ctr"/>
+          <a:lstStyle/>
+          <a:p>
+            <a:pPr algn="ctr"/>
+          </a:p>
+        </p:txBody>
+      </p:sp>
+      <p:sp>
+        <p:nvSpPr>
+          <p:cNvPr id="21" name="TextBox 20"/>
+          <p:cNvSpPr txBox="1"/>
+          <p:nvPr/>
+        </p:nvSpPr>
+        <p:spPr>
+          <a:xfrm>
+            <a:off x="960120" y="5193792"/>
+            <a:ext cx="548640" cy="640080"/>
+          </a:xfrm>
+          <a:prstGeom prst="rect">
+            <a:avLst/>
+          </a:prstGeom>
+          <a:noFill/>
+        </p:spPr>
+        <p:txBody>
+          <a:bodyPr wrap="square" lIns="0" rIns="0" tIns="0" bIns="0" anchor="t">
+            <a:spAutoFit/>
+          </a:bodyPr>
+          <a:lstStyle/>
+          <a:p>
+            <a:pPr algn="l">
+              <a:lnSpc>
+                <a:spcPct val="108000"/>
+              </a:lnSpc>
+              <a:spcAft>
+                <a:spcPts val="0"/>
+              </a:spcAft>
+            </a:pPr>
+            <a:r>
+              <a:rPr sz="3400" b="1">
+                <a:solidFill>
+                  <a:srgbClr val="5AA3F0"/>
+                </a:solidFill>
+                <a:latin typeface="Aptos Display"/>
+              </a:rPr>
+              <a:t>4</a:t>
+            </a:r>
+          </a:p>
+        </p:txBody>
+      </p:sp>
+      <p:sp>
+        <p:nvSpPr>
+          <p:cNvPr id="22" name="TextBox 21"/>
+          <p:cNvSpPr txBox="1"/>
+          <p:nvPr/>
+        </p:nvSpPr>
+        <p:spPr>
+          <a:xfrm>
+            <a:off x="1554480" y="5157216"/>
+            <a:ext cx="6217920" cy="365760"/>
+          </a:xfrm>
+          <a:prstGeom prst="rect">
+            <a:avLst/>
+          </a:prstGeom>
+          <a:noFill/>
+        </p:spPr>
+        <p:txBody>
+          <a:bodyPr wrap="square" lIns="0" rIns="0" tIns="0" bIns="0" anchor="t">
+            <a:spAutoFit/>
+          </a:bodyPr>
+          <a:lstStyle/>
+          <a:p>
+            <a:pPr algn="l">
+              <a:lnSpc>
+                <a:spcPct val="108000"/>
+              </a:lnSpc>
+              <a:spcAft>
+                <a:spcPts val="0"/>
+              </a:spcAft>
+            </a:pPr>
+            <a:r>
+              <a:rPr sz="1900" b="1">
+                <a:solidFill>
+                  <a:srgbClr val="FFFFFF"/>
+                </a:solidFill>
+                <a:latin typeface="Aptos"/>
+              </a:rPr>
+              <a:t>Which item is the biggest share of my bill?</a:t>
+            </a:r>
+          </a:p>
+        </p:txBody>
+      </p:sp>
+      <p:sp>
+        <p:nvSpPr>
+          <p:cNvPr id="23" name="TextBox 22"/>
+          <p:cNvSpPr txBox="1"/>
+          <p:nvPr/>
+        </p:nvSpPr>
+        <p:spPr>
+          <a:xfrm>
+            <a:off x="1554480" y="5532120"/>
+            <a:ext cx="6217920" cy="502920"/>
+          </a:xfrm>
+          <a:prstGeom prst="rect">
+            <a:avLst/>
+          </a:prstGeom>
+          <a:noFill/>
+        </p:spPr>
+        <p:txBody>
+          <a:bodyPr wrap="square" lIns="0" rIns="0" tIns="0" bIns="0" anchor="t">
+            <a:spAutoFit/>
+          </a:bodyPr>
+          <a:lstStyle/>
+          <a:p>
+            <a:pPr algn="l">
+              <a:lnSpc>
+                <a:spcPct val="110000"/>
+              </a:lnSpc>
+              <a:spcAft>
+                <a:spcPts val="0"/>
+              </a:spcAft>
+            </a:pPr>
+            <a:r>
+              <a:rPr sz="1400" b="0">
+                <a:solidFill>
+                  <a:srgbClr val="D7D5CE"/>
+                </a:solidFill>
+                <a:latin typeface="Aptos"/>
+              </a:rPr>
+              <a:t>Run bill_report.py on a log. Then pick the lever: size, sends, or price.</a:t>
+            </a:r>
+          </a:p>
+        </p:txBody>
+      </p:sp>
+      <p:sp>
+        <p:nvSpPr>
+          <p:cNvPr id="24" name="TextBox 23"/>
+          <p:cNvSpPr txBox="1"/>
+          <p:nvPr/>
+        </p:nvSpPr>
+        <p:spPr>
+          <a:xfrm>
+            <a:off x="8321040" y="1783080"/>
+            <a:ext cx="3200400" cy="1737360"/>
+          </a:xfrm>
+          <a:prstGeom prst="rect">
+            <a:avLst/>
+          </a:prstGeom>
+          <a:noFill/>
+        </p:spPr>
+        <p:txBody>
+          <a:bodyPr wrap="square" lIns="0" rIns="0" tIns="0" bIns="0" anchor="t">
+            <a:spAutoFit/>
+          </a:bodyPr>
+          <a:lstStyle/>
+          <a:p>
+            <a:pPr algn="r">
+              <a:lnSpc>
+                <a:spcPct val="108000"/>
+              </a:lnSpc>
+              <a:spcAft>
+                <a:spcPts val="0"/>
+              </a:spcAft>
+            </a:pPr>
+            <a:r>
+              <a:rPr sz="3200" b="1">
+                <a:solidFill>
+                  <a:srgbClr val="FFFFFF"/>
+                </a:solidFill>
+                <a:latin typeface="Aptos Display"/>
+              </a:rPr>
+              <a:t>Thank you</a:t>
+            </a:r>
+          </a:p>
+          <a:p>
+            <a:pPr algn="r">
+              <a:lnSpc>
+                <a:spcPct val="108000"/>
+              </a:lnSpc>
+              <a:spcAft>
+                <a:spcPts val="0"/>
+              </a:spcAft>
+            </a:pPr>
+            <a:r>
+              <a:rPr sz="1700" b="1">
+                <a:solidFill>
+                  <a:srgbClr val="FFFFFF"/>
+                </a:solidFill>
+                <a:latin typeface="Aptos"/>
+              </a:rPr>
+              <a:t>Shyamji Tiwari</a:t>
+            </a:r>
+          </a:p>
+          <a:p>
+            <a:pPr algn="r">
+              <a:lnSpc>
+                <a:spcPct val="108000"/>
+              </a:lnSpc>
+              <a:spcAft>
+                <a:spcPts val="0"/>
+              </a:spcAft>
+            </a:pPr>
+            <a:r>
+              <a:rPr sz="1400" b="0">
+                <a:solidFill>
+                  <a:srgbClr val="D7D5CE"/>
+                </a:solidFill>
+                <a:latin typeface="Aptos"/>
+              </a:rPr>
+              <a:t>Applied Scientist, Amazon</a:t>
+            </a:r>
+          </a:p>
+          <a:p>
+            <a:pPr algn="r">
+              <a:lnSpc>
+                <a:spcPct val="108000"/>
+              </a:lnSpc>
+              <a:spcAft>
+                <a:spcPts val="0"/>
+              </a:spcAft>
+            </a:pPr>
+            <a:r>
+              <a:rPr sz="1200" b="0">
+                <a:solidFill>
+                  <a:srgbClr val="5AA3F0"/>
+                </a:solidFill>
+                <a:latin typeface="Aptos"/>
+              </a:rPr>
+              <a:t>github.com/ieee-ai/agentic-ai-26</a:t>
+            </a:r>
+          </a:p>
+          <a:p>
+            <a:pPr algn="r">
+              <a:lnSpc>
+                <a:spcPct val="108000"/>
+              </a:lnSpc>
+              <a:spcAft>
+                <a:spcPts val="0"/>
+              </a:spcAft>
+            </a:pPr>
+            <a:r>
+              <a:rPr sz="1200" b="0">
+                <a:solidFill>
+                  <a:srgbClr val="5AA3F0"/>
+                </a:solidFill>
+                <a:latin typeface="Aptos"/>
+              </a:rPr>
+              <a:t>/Saving-the-Tokens</a:t>
+            </a:r>
+          </a:p>
+        </p:txBody>
+      </p:sp>
+      <p:pic>
+        <p:nvPicPr>
+          <p:cNvPr id="25" name="Picture 24" descr="qr_dark.png"/>
+          <p:cNvPicPr>
+            <a:picLocks noChangeAspect="1"/>
+          </p:cNvPicPr>
+          <p:nvPr/>
+        </p:nvPicPr>
+        <p:blipFill>
+          <a:blip r:embed="rId2"/>
+          <a:stretch>
+            <a:fillRect/>
+          </a:stretch>
+        </p:blipFill>
+        <p:spPr>
+          <a:xfrm>
+            <a:off x="9921240" y="4023360"/>
+            <a:ext cx="1600200" cy="1600200"/>
+          </a:xfrm>
+          <a:prstGeom prst="rect">
+            <a:avLst/>
+          </a:prstGeom>
+        </p:spPr>
+      </p:pic>
+      <p:sp>
+        <p:nvSpPr>
+          <p:cNvPr id="26" name="TextBox 25"/>
+          <p:cNvSpPr txBox="1"/>
+          <p:nvPr/>
+        </p:nvSpPr>
+        <p:spPr>
+          <a:xfrm>
+            <a:off x="8321040" y="5715000"/>
+            <a:ext cx="3200400" cy="274320"/>
+          </a:xfrm>
+          <a:prstGeom prst="rect">
+            <a:avLst/>
+          </a:prstGeom>
+          <a:noFill/>
+        </p:spPr>
+        <p:txBody>
+          <a:bodyPr wrap="square" lIns="0" rIns="0" tIns="0" bIns="0" anchor="t">
+            <a:spAutoFit/>
+          </a:bodyPr>
+          <a:lstStyle/>
+          <a:p>
+            <a:pPr algn="r">
+              <a:lnSpc>
+                <a:spcPct val="108000"/>
+              </a:lnSpc>
+              <a:spcAft>
+                <a:spcPts val="0"/>
+              </a:spcAft>
+            </a:pPr>
+            <a:r>
+              <a:rPr sz="1200" b="0">
+                <a:solidFill>
+                  <a:srgbClr val="B5B2AA"/>
+                </a:solidFill>
+                <a:latin typeface="Aptos"/>
+              </a:rPr>
+              <a:t>slides, notebook, scripts</a:t>
+            </a:r>
+          </a:p>
+        </p:txBody>
+      </p:sp>
+      <p:sp>
+        <p:nvSpPr>
+          <p:cNvPr id="27" name="TextBox 26"/>
+          <p:cNvSpPr txBox="1"/>
+          <p:nvPr/>
+        </p:nvSpPr>
+        <p:spPr>
+          <a:xfrm>
+            <a:off x="685800" y="6473952"/>
+            <a:ext cx="5486400" cy="274320"/>
+          </a:xfrm>
+          <a:prstGeom prst="rect">
+            <a:avLst/>
+          </a:prstGeom>
+          <a:noFill/>
+        </p:spPr>
+        <p:txBody>
+          <a:bodyPr wrap="square" lIns="0" rIns="0" tIns="0" bIns="0" anchor="t">
+            <a:spAutoFit/>
+          </a:bodyPr>
+          <a:lstStyle/>
+          <a:p>
+            <a:pPr algn="l">
+              <a:lnSpc>
+                <a:spcPct val="108000"/>
+              </a:lnSpc>
+              <a:spcAft>
+                <a:spcPts val="0"/>
+              </a:spcAft>
+            </a:pPr>
+            <a:r>
+              <a:rPr sz="1100" b="0">
+                <a:solidFill>
+                  <a:srgbClr val="B5B2AA"/>
                 </a:solidFill>
                 <a:latin typeface="Aptos"/>
               </a:rPr>
